--- a/ledwave-comercial/sdr/LedWave_Jornada_do_Lead_SDR.pptx
+++ b/ledwave-comercial/sdr/LedWave_Jornada_do_Lead_SDR.pptx
@@ -20,9 +20,10 @@
     <p:sldId id="268" r:id="rId14"/>
     <p:sldId id="269" r:id="rId15"/>
     <p:sldId id="270" r:id="rId16"/>
+    <p:sldId id="271" r:id="rId17"/>
   </p:sldIdLst>
   <p:notesMasterIdLst>
-    <p:notesMasterId r:id="rId17"/>
+    <p:notesMasterId r:id="rId18"/>
   </p:notesMasterIdLst>
   <p:sldSz cx="12192000" cy="6858000"/>
   <p:notesSz cx="6858000" cy="12192000"/>
@@ -121,14 +122,14 @@
   <p:extLst>
     <p:ext uri="{521415D9-36F7-43E2-AB2F-B90AF26B5E84}">
       <p14:sectionLst xmlns:p14="http://schemas.microsoft.com/office/powerpoint/2010/main">
-        <p14:section name="Abertura" id="{a3de7177-ab79-e7b0-1183-4814e9bd43ea}">
+        <p14:section name="Abertura" id="{0683c920-c275-3db4-6b23-dd3a9c2fda0b}">
           <p14:sldIdLst>
             <p14:sldId id="256"/>
             <p14:sldId id="257"/>
             <p14:sldId id="258"/>
           </p14:sldIdLst>
         </p14:section>
-        <p14:section name="Jornada" id="{20ee4086-9cf3-3fb8-c3ca-5b34813606ab}">
+        <p14:section name="Jornada" id="{db779f32-19a0-e788-9f0b-536a171d693d}">
           <p14:sldIdLst>
             <p14:sldId id="259"/>
             <p14:sldId id="260"/>
@@ -137,19 +138,20 @@
             <p14:sldId id="263"/>
             <p14:sldId id="264"/>
             <p14:sldId id="265"/>
+            <p14:sldId id="266"/>
           </p14:sldIdLst>
         </p14:section>
-        <p14:section name="Conversa" id="{a64f1e57-62dd-4d87-c66c-1bed2ebaef65}">
+        <p14:section name="Conversa" id="{af460e2a-806c-3997-416f-edc64f11dbe1}">
           <p14:sldIdLst>
-            <p14:sldId id="266"/>
             <p14:sldId id="267"/>
+            <p14:sldId id="268"/>
           </p14:sldIdLst>
         </p14:section>
-        <p14:section name="Gestão" id="{f5fb275f-b6e0-bc64-e281-92798af9cc99}">
+        <p14:section name="Gestão" id="{713d8bf4-c321-d59c-7a12-c0f885b08427}">
           <p14:sldIdLst>
-            <p14:sldId id="268"/>
             <p14:sldId id="269"/>
             <p14:sldId id="270"/>
+            <p14:sldId id="271"/>
           </p14:sldIdLst>
         </p14:section>
       </p14:sectionLst>
@@ -1126,6 +1128,94 @@
 </p:notes>
 </file>
 
+<file path=ppt/notesSlides/notesSlide16.xml><?xml version="1.0" encoding="utf-8"?>
+<p:notes xmlns:a="http://schemas.openxmlformats.org/drawingml/2006/main" xmlns:r="http://schemas.openxmlformats.org/officeDocument/2006/relationships" xmlns:p="http://schemas.openxmlformats.org/presentationml/2006/main">
+  <p:cSld>
+    <p:spTree>
+      <p:nvGrpSpPr>
+        <p:cNvPr id="1" name=""/>
+        <p:cNvGrpSpPr/>
+        <p:nvPr/>
+      </p:nvGrpSpPr>
+      <p:grpSpPr>
+        <a:xfrm>
+          <a:off x="0" y="0"/>
+          <a:ext cx="0" cy="0"/>
+          <a:chOff x="0" y="0"/>
+          <a:chExt cx="0" cy="0"/>
+        </a:xfrm>
+      </p:grpSpPr>
+      <p:sp>
+        <p:nvSpPr>
+          <p:cNvPr id="2" name="Slide Image Placeholder 1"/>
+          <p:cNvSpPr>
+            <a:spLocks noGrp="1" noRot="1" noChangeAspect="1"/>
+          </p:cNvSpPr>
+          <p:nvPr>
+            <p:ph type="sldImg"/>
+          </p:nvPr>
+        </p:nvSpPr>
+        <p:spPr/>
+      </p:sp>
+      <p:sp>
+        <p:nvSpPr>
+          <p:cNvPr id="3" name="Notes Placeholder 2"/>
+          <p:cNvSpPr>
+            <a:spLocks noGrp="1"/>
+          </p:cNvSpPr>
+          <p:nvPr>
+            <p:ph type="body" idx="1"/>
+          </p:nvPr>
+        </p:nvSpPr>
+        <p:spPr/>
+        <p:txBody>
+          <a:bodyPr/>
+          <a:lstStyle/>
+          <a:p>
+            <a:r>
+              <a:rPr lang="en-US" dirty="0"/>
+              <a:t/>
+            </a:r>
+            <a:endParaRPr lang="en-US" dirty="0"/>
+          </a:p>
+        </p:txBody>
+      </p:sp>
+      <p:sp>
+        <p:nvSpPr>
+          <p:cNvPr id="4" name="Slide Number Placeholder 3"/>
+          <p:cNvSpPr>
+            <a:spLocks noGrp="1"/>
+          </p:cNvSpPr>
+          <p:nvPr>
+            <p:ph type="sldNum" sz="quarter" idx="10"/>
+          </p:nvPr>
+        </p:nvSpPr>
+        <p:spPr/>
+        <p:txBody>
+          <a:bodyPr/>
+          <a:lstStyle/>
+          <a:p>
+            <a:fld id="{F7021451-1387-4CA6-816F-3879F97B5CBC}" type="slidenum">
+              <a:rPr lang="en-US"/>
+              <a:t>16</a:t>
+            </a:fld>
+            <a:endParaRPr lang="en-US"/>
+          </a:p>
+        </p:txBody>
+      </p:sp>
+    </p:spTree>
+    <p:extLst>
+      <p:ext uri="{BB962C8B-B14F-4D97-AF65-F5344CB8AC3E}">
+        <p14:creationId xmlns:p14="http://schemas.microsoft.com/office/powerpoint/2010/main" val="1024086991"/>
+      </p:ext>
+    </p:extLst>
+  </p:cSld>
+  <p:clrMapOvr>
+    <a:masterClrMapping/>
+  </p:clrMapOvr>
+</p:notes>
+</file>
+
 <file path=ppt/notesSlides/notesSlide2.xml><?xml version="1.0" encoding="utf-8"?>
 <p:notes xmlns:a="http://schemas.openxmlformats.org/drawingml/2006/main" xmlns:r="http://schemas.openxmlformats.org/officeDocument/2006/relationships" xmlns:p="http://schemas.openxmlformats.org/presentationml/2006/main">
   <p:cSld>
@@ -1788,7 +1878,7 @@
           <a:p>
             <a:r>
               <a:rPr lang="en-US" dirty="0"/>
-              <a:t/>
+              <a:t>Vale para quem pede telão ou painel para um evento pontual (show, casamento, formatura, feira). Seja gentil e rápida: o lead precisa sair da conversa sabendo que vamos voltar e que o contato dele está guardado. Não indique concorrentes nem passe previsão de data de retorno.</a:t>
             </a:r>
             <a:endParaRPr lang="en-US" dirty="0"/>
           </a:p>
@@ -2907,7 +2997,7 @@
                   <a:schemeClr val="tx1"/>
                 </a:solidFill>
               </a:rPr>
-              <a:t>Etapa 5: cadência de 7 toques em 10 dias</a:t>
+              <a:t>Etapa 4: agendar e passar o bastão</a:t>
             </a:r>
             <a:endParaRPr lang="en-US" sz="3200" dirty="0"/>
           </a:p>
@@ -2915,1157 +3005,445 @@
       </p:sp>
       <p:sp>
         <p:nvSpPr>
-          <p:cNvPr id="3" name="Linha do tempo"/>
+          <p:cNvPr id="3" name="Na conversa título"/>
+          <p:cNvSpPr txBox="1"/>
+          <p:nvPr/>
+        </p:nvSpPr>
+        <p:spPr>
+          <a:xfrm>
+            <a:off x="548640" y="1554480"/>
+            <a:ext cx="5486400" cy="411480"/>
+          </a:xfrm>
+          <a:prstGeom prst="rect">
+            <a:avLst/>
+          </a:prstGeom>
+          <a:noFill/>
+          <a:ln/>
+        </p:spPr>
+        <p:txBody>
+          <a:bodyPr wrap="square" lIns="0" tIns="0" rIns="0" bIns="0" rtlCol="0" anchor="t"/>
+          <a:lstStyle/>
+          <a:p>
+            <a:pPr indent="0" marL="0">
+              <a:buNone/>
+            </a:pPr>
+            <a:r>
+              <a:rPr lang="en-US" sz="2000" b="1" dirty="0">
+                <a:solidFill>
+                  <a:schemeClr val="accent1"/>
+                </a:solidFill>
+              </a:rPr>
+              <a:t>Na conversa</a:t>
+            </a:r>
+            <a:endParaRPr lang="en-US" sz="2000" dirty="0"/>
+          </a:p>
+        </p:txBody>
+      </p:sp>
+      <p:sp>
+        <p:nvSpPr>
+          <p:cNvPr id="4" name="Script agenda"/>
+          <p:cNvSpPr txBox="1"/>
+          <p:nvPr/>
+        </p:nvSpPr>
+        <p:spPr>
+          <a:xfrm>
+            <a:off x="548640" y="2057400"/>
+            <a:ext cx="5394960" cy="1463040"/>
+          </a:xfrm>
+          <a:prstGeom prst="rect">
+            <a:avLst/>
+          </a:prstGeom>
+          <a:noFill/>
+          <a:ln/>
+        </p:spPr>
+        <p:txBody>
+          <a:bodyPr wrap="square" lIns="0" tIns="0" rIns="0" bIns="0" rtlCol="0" anchor="t"/>
+          <a:lstStyle/>
+          <a:p>
+            <a:pPr indent="0" marL="0">
+              <a:buNone/>
+            </a:pPr>
+            <a:r>
+              <a:rPr lang="en-US" sz="1600" i="1" dirty="0">
+                <a:solidFill>
+                  <a:schemeClr val="tx1"/>
+                </a:solidFill>
+              </a:rPr>
+              <a:t>"Faz sentido uma conversa de 30 minutos com o [executivo], nosso especialista em [nicho]. Ele mostra como ficaria no seu espaço. Terça às 10h ou quinta às 15h?"</a:t>
+            </a:r>
+            <a:endParaRPr lang="en-US" sz="1600" dirty="0"/>
+          </a:p>
+        </p:txBody>
+      </p:sp>
+      <p:sp>
+        <p:nvSpPr>
+          <p:cNvPr id="5" name="Depois título"/>
+          <p:cNvSpPr txBox="1"/>
+          <p:nvPr/>
+        </p:nvSpPr>
+        <p:spPr>
+          <a:xfrm>
+            <a:off x="548640" y="3657600"/>
+            <a:ext cx="5486400" cy="411480"/>
+          </a:xfrm>
+          <a:prstGeom prst="rect">
+            <a:avLst/>
+          </a:prstGeom>
+          <a:noFill/>
+          <a:ln/>
+        </p:spPr>
+        <p:txBody>
+          <a:bodyPr wrap="square" lIns="0" tIns="0" rIns="0" bIns="0" rtlCol="0" anchor="t"/>
+          <a:lstStyle/>
+          <a:p>
+            <a:pPr indent="0" marL="0">
+              <a:buNone/>
+            </a:pPr>
+            <a:r>
+              <a:rPr lang="en-US" sz="2000" b="1" dirty="0">
+                <a:solidFill>
+                  <a:schemeClr val="accent1"/>
+                </a:solidFill>
+              </a:rPr>
+              <a:t>Depois</a:t>
+            </a:r>
+            <a:endParaRPr lang="en-US" sz="2000" dirty="0"/>
+          </a:p>
+        </p:txBody>
+      </p:sp>
+      <p:sp>
+        <p:nvSpPr>
+          <p:cNvPr id="6" name="Depois lista"/>
+          <p:cNvSpPr txBox="1"/>
+          <p:nvPr/>
+        </p:nvSpPr>
+        <p:spPr>
+          <a:xfrm>
+            <a:off x="548640" y="4114800"/>
+            <a:ext cx="5394960" cy="1828800"/>
+          </a:xfrm>
+          <a:prstGeom prst="rect">
+            <a:avLst/>
+          </a:prstGeom>
+          <a:noFill/>
+          <a:ln/>
+        </p:spPr>
+        <p:txBody>
+          <a:bodyPr wrap="square" lIns="0" tIns="0" rIns="0" bIns="0" rtlCol="0" anchor="t"/>
+          <a:lstStyle/>
+          <a:p>
+            <a:pPr marL="342900" indent="-342900">
+              <a:spcAft>
+                <a:spcPts val="600"/>
+              </a:spcAft>
+              <a:buSzPct val="100000"/>
+              <a:buChar char="•"/>
+            </a:pPr>
+            <a:r>
+              <a:rPr lang="en-US" sz="1500" dirty="0">
+                <a:solidFill>
+                  <a:schemeClr val="tx1"/>
+                </a:solidFill>
+              </a:rPr>
+              <a:t>Confirmação no WhatsApp com data, hora e formato</a:t>
+            </a:r>
+            <a:endParaRPr lang="en-US" sz="1500" dirty="0"/>
+          </a:p>
+          <a:p>
+            <a:pPr marL="342900" indent="-342900">
+              <a:spcAft>
+                <a:spcPts val="600"/>
+              </a:spcAft>
+              <a:buSzPct val="100000"/>
+              <a:buChar char="•"/>
+            </a:pPr>
+            <a:r>
+              <a:rPr lang="en-US" sz="1500" dirty="0">
+                <a:solidFill>
+                  <a:schemeClr val="tx1"/>
+                </a:solidFill>
+              </a:rPr>
+              <a:t>Pedir uma foto do espaço para a simulação</a:t>
+            </a:r>
+            <a:endParaRPr lang="en-US" sz="1500" dirty="0"/>
+          </a:p>
+          <a:p>
+            <a:pPr marL="342900" indent="-342900">
+              <a:spcAft>
+                <a:spcPts val="600"/>
+              </a:spcAft>
+              <a:buSzPct val="100000"/>
+              <a:buChar char="•"/>
+            </a:pPr>
+            <a:r>
+              <a:rPr lang="en-US" sz="1500" dirty="0">
+                <a:solidFill>
+                  <a:schemeClr val="tx1"/>
+                </a:solidFill>
+              </a:rPr>
+              <a:t>Lembrete na véspera e 1 hora antes</a:t>
+            </a:r>
+            <a:endParaRPr lang="en-US" sz="1500" dirty="0"/>
+          </a:p>
+          <a:p>
+            <a:pPr marL="342900" indent="-342900">
+              <a:spcAft>
+                <a:spcPts val="600"/>
+              </a:spcAft>
+              <a:buSzPct val="100000"/>
+              <a:buChar char="•"/>
+            </a:pPr>
+            <a:r>
+              <a:rPr lang="en-US" sz="1500" dirty="0">
+                <a:solidFill>
+                  <a:schemeClr val="tx1"/>
+                </a:solidFill>
+              </a:rPr>
+              <a:t>Faltou? Remarcar no mesmo dia</a:t>
+            </a:r>
+            <a:endParaRPr lang="en-US" sz="1500" dirty="0"/>
+          </a:p>
+        </p:txBody>
+      </p:sp>
+      <p:sp>
+        <p:nvSpPr>
+          <p:cNvPr id="7" name="Nota de passagem"/>
           <p:cNvSpPr/>
           <p:nvPr/>
         </p:nvSpPr>
         <p:spPr>
           <a:xfrm>
-            <a:off x="868680" y="2377440"/>
-            <a:ext cx="10424160" cy="0"/>
-          </a:xfrm>
-          <a:prstGeom prst="line">
-            <a:avLst/>
-          </a:prstGeom>
-          <a:noFill/>
-          <a:ln w="50800">
-            <a:solidFill>
-              <a:srgbClr val="F2F3F7"/>
-            </a:solidFill>
-            <a:prstDash val="solid"/>
-          </a:ln>
-        </p:spPr>
-      </p:sp>
-      <p:sp>
-        <p:nvSpPr>
-          <p:cNvPr id="4" name="Toque D0 círculo"/>
-          <p:cNvSpPr/>
-          <p:nvPr/>
-        </p:nvSpPr>
-        <p:spPr>
-          <a:xfrm>
-            <a:off x="982980" y="2057400"/>
-            <a:ext cx="640080" cy="640080"/>
-          </a:xfrm>
-          <a:prstGeom prst="ellipse">
-            <a:avLst/>
-          </a:prstGeom>
-          <a:solidFill>
-            <a:srgbClr val="12D9FF"/>
-          </a:solidFill>
-          <a:ln/>
-        </p:spPr>
-      </p:sp>
-      <p:pic>
-        <p:nvPicPr>
-          <p:cNvPr id="5" name="Toque D0 ícone" descr="preencoded.png">    </p:cNvPr>
-          <p:cNvPicPr>
-            <a:picLocks noChangeAspect="1"/>
-          </p:cNvPicPr>
-          <p:nvPr/>
-        </p:nvPicPr>
-        <p:blipFill>
-          <a:blip r:embed="rId1"/>
-          <a:stretch>
-            <a:fillRect/>
-          </a:stretch>
-        </p:blipFill>
-        <p:spPr>
-          <a:xfrm>
-            <a:off x="1143000" y="2217420"/>
-            <a:ext cx="320040" cy="320040"/>
-          </a:xfrm>
-          <a:prstGeom prst="rect">
-            <a:avLst/>
-          </a:prstGeom>
-        </p:spPr>
-      </p:pic>
-      <p:sp>
-        <p:nvSpPr>
-          <p:cNvPr id="6" name="Toque dia 1"/>
-          <p:cNvSpPr txBox="1"/>
-          <p:nvPr/>
-        </p:nvSpPr>
-        <p:spPr>
-          <a:xfrm>
-            <a:off x="548640" y="2834640"/>
-            <a:ext cx="1508760" cy="457200"/>
-          </a:xfrm>
-          <a:prstGeom prst="rect">
-            <a:avLst/>
-          </a:prstGeom>
-          <a:noFill/>
-          <a:ln/>
-        </p:spPr>
-        <p:txBody>
-          <a:bodyPr wrap="square" lIns="0" tIns="0" rIns="0" bIns="0" rtlCol="0" anchor="t"/>
-          <a:lstStyle/>
-          <a:p>
-            <a:pPr algn="ctr" indent="0" marL="0">
-              <a:buNone/>
-            </a:pPr>
-            <a:r>
-              <a:rPr lang="en-US" sz="2200" b="1" dirty="0">
-                <a:solidFill>
-                  <a:schemeClr val="accent1"/>
-                </a:solidFill>
-              </a:rPr>
-              <a:t>D0</a:t>
-            </a:r>
-            <a:endParaRPr lang="en-US" sz="2200" dirty="0"/>
-          </a:p>
-        </p:txBody>
-      </p:sp>
-      <p:sp>
-        <p:nvSpPr>
-          <p:cNvPr id="7" name="Toque canal 1"/>
-          <p:cNvSpPr txBox="1"/>
-          <p:nvPr/>
-        </p:nvSpPr>
-        <p:spPr>
-          <a:xfrm>
-            <a:off x="548640" y="3337560"/>
-            <a:ext cx="1508760" cy="548640"/>
-          </a:xfrm>
-          <a:prstGeom prst="rect">
-            <a:avLst/>
-          </a:prstGeom>
-          <a:noFill/>
-          <a:ln/>
-        </p:spPr>
-        <p:txBody>
-          <a:bodyPr wrap="square" lIns="0" tIns="0" rIns="0" bIns="0" rtlCol="0" anchor="t"/>
-          <a:lstStyle/>
-          <a:p>
-            <a:pPr algn="ctr" indent="0" marL="0">
-              <a:buNone/>
-            </a:pPr>
-            <a:r>
-              <a:rPr lang="en-US" sz="1400" b="1" dirty="0">
-                <a:solidFill>
-                  <a:schemeClr val="tx1"/>
-                </a:solidFill>
-              </a:rPr>
-              <a:t>Ligação + WhatsApp</a:t>
-            </a:r>
-            <a:endParaRPr lang="en-US" sz="1400" dirty="0"/>
-          </a:p>
-        </p:txBody>
-      </p:sp>
-      <p:sp>
-        <p:nvSpPr>
-          <p:cNvPr id="8" name="Toque ação 1"/>
-          <p:cNvSpPr txBox="1"/>
-          <p:nvPr/>
-        </p:nvSpPr>
-        <p:spPr>
-          <a:xfrm>
-            <a:off x="548640" y="3931920"/>
-            <a:ext cx="1508760" cy="822960"/>
-          </a:xfrm>
-          <a:prstGeom prst="rect">
-            <a:avLst/>
-          </a:prstGeom>
-          <a:noFill/>
-          <a:ln/>
-        </p:spPr>
-        <p:txBody>
-          <a:bodyPr wrap="square" lIns="0" tIns="0" rIns="0" bIns="0" rtlCol="0" anchor="t"/>
-          <a:lstStyle/>
-          <a:p>
-            <a:pPr algn="ctr" indent="0" marL="0">
-              <a:buNone/>
-            </a:pPr>
-            <a:r>
-              <a:rPr lang="en-US" sz="1300" dirty="0">
-                <a:solidFill>
-                  <a:schemeClr val="tx2"/>
-                </a:solidFill>
-              </a:rPr>
-              <a:t>Primeiro contato</a:t>
-            </a:r>
-            <a:endParaRPr lang="en-US" sz="1300" dirty="0"/>
-          </a:p>
-        </p:txBody>
-      </p:sp>
-      <p:sp>
-        <p:nvSpPr>
-          <p:cNvPr id="9" name="Toque D1 círculo"/>
-          <p:cNvSpPr/>
-          <p:nvPr/>
-        </p:nvSpPr>
-        <p:spPr>
-          <a:xfrm>
-            <a:off x="2583180" y="2057400"/>
-            <a:ext cx="640080" cy="640080"/>
-          </a:xfrm>
-          <a:prstGeom prst="ellipse">
-            <a:avLst/>
-          </a:prstGeom>
-          <a:solidFill>
-            <a:srgbClr val="3EB1FE"/>
-          </a:solidFill>
-          <a:ln/>
-        </p:spPr>
-      </p:sp>
-      <p:pic>
-        <p:nvPicPr>
-          <p:cNvPr id="10" name="Toque D1 ícone" descr="preencoded.png">    </p:cNvPr>
-          <p:cNvPicPr>
-            <a:picLocks noChangeAspect="1"/>
-          </p:cNvPicPr>
-          <p:nvPr/>
-        </p:nvPicPr>
-        <p:blipFill>
-          <a:blip r:embed="rId2"/>
-          <a:stretch>
-            <a:fillRect/>
-          </a:stretch>
-        </p:blipFill>
-        <p:spPr>
-          <a:xfrm>
-            <a:off x="2743200" y="2217420"/>
-            <a:ext cx="320040" cy="320040"/>
-          </a:xfrm>
-          <a:prstGeom prst="rect">
-            <a:avLst/>
-          </a:prstGeom>
-        </p:spPr>
-      </p:pic>
-      <p:sp>
-        <p:nvSpPr>
-          <p:cNvPr id="11" name="Toque dia 2"/>
-          <p:cNvSpPr txBox="1"/>
-          <p:nvPr/>
-        </p:nvSpPr>
-        <p:spPr>
-          <a:xfrm>
-            <a:off x="2148840" y="2834640"/>
-            <a:ext cx="1508760" cy="457200"/>
-          </a:xfrm>
-          <a:prstGeom prst="rect">
-            <a:avLst/>
-          </a:prstGeom>
-          <a:noFill/>
-          <a:ln/>
-        </p:spPr>
-        <p:txBody>
-          <a:bodyPr wrap="square" lIns="0" tIns="0" rIns="0" bIns="0" rtlCol="0" anchor="t"/>
-          <a:lstStyle/>
-          <a:p>
-            <a:pPr algn="ctr" indent="0" marL="0">
-              <a:buNone/>
-            </a:pPr>
-            <a:r>
-              <a:rPr lang="en-US" sz="2200" b="1" dirty="0">
-                <a:solidFill>
-                  <a:schemeClr val="accent1"/>
-                </a:solidFill>
-              </a:rPr>
-              <a:t>D1</a:t>
-            </a:r>
-            <a:endParaRPr lang="en-US" sz="2200" dirty="0"/>
-          </a:p>
-        </p:txBody>
-      </p:sp>
-      <p:sp>
-        <p:nvSpPr>
-          <p:cNvPr id="12" name="Toque canal 2"/>
-          <p:cNvSpPr txBox="1"/>
-          <p:nvPr/>
-        </p:nvSpPr>
-        <p:spPr>
-          <a:xfrm>
-            <a:off x="2148840" y="3337560"/>
-            <a:ext cx="1508760" cy="548640"/>
-          </a:xfrm>
-          <a:prstGeom prst="rect">
-            <a:avLst/>
-          </a:prstGeom>
-          <a:noFill/>
-          <a:ln/>
-        </p:spPr>
-        <p:txBody>
-          <a:bodyPr wrap="square" lIns="0" tIns="0" rIns="0" bIns="0" rtlCol="0" anchor="t"/>
-          <a:lstStyle/>
-          <a:p>
-            <a:pPr algn="ctr" indent="0" marL="0">
-              <a:buNone/>
-            </a:pPr>
-            <a:r>
-              <a:rPr lang="en-US" sz="1400" b="1" dirty="0">
-                <a:solidFill>
-                  <a:schemeClr val="tx1"/>
-                </a:solidFill>
-              </a:rPr>
-              <a:t>Ligação</a:t>
-            </a:r>
-            <a:endParaRPr lang="en-US" sz="1400" dirty="0"/>
-          </a:p>
-        </p:txBody>
-      </p:sp>
-      <p:sp>
-        <p:nvSpPr>
-          <p:cNvPr id="13" name="Toque ação 2"/>
-          <p:cNvSpPr txBox="1"/>
-          <p:nvPr/>
-        </p:nvSpPr>
-        <p:spPr>
-          <a:xfrm>
-            <a:off x="2148840" y="3931920"/>
-            <a:ext cx="1508760" cy="822960"/>
-          </a:xfrm>
-          <a:prstGeom prst="rect">
-            <a:avLst/>
-          </a:prstGeom>
-          <a:noFill/>
-          <a:ln/>
-        </p:spPr>
-        <p:txBody>
-          <a:bodyPr wrap="square" lIns="0" tIns="0" rIns="0" bIns="0" rtlCol="0" anchor="t"/>
-          <a:lstStyle/>
-          <a:p>
-            <a:pPr algn="ctr" indent="0" marL="0">
-              <a:buNone/>
-            </a:pPr>
-            <a:r>
-              <a:rPr lang="en-US" sz="1300" dirty="0">
-                <a:solidFill>
-                  <a:schemeClr val="tx2"/>
-                </a:solidFill>
-              </a:rPr>
-              <a:t>Outro horário</a:t>
-            </a:r>
-            <a:endParaRPr lang="en-US" sz="1300" dirty="0"/>
-          </a:p>
-        </p:txBody>
-      </p:sp>
-      <p:sp>
-        <p:nvSpPr>
-          <p:cNvPr id="14" name="Toque D2 círculo"/>
-          <p:cNvSpPr/>
-          <p:nvPr/>
-        </p:nvSpPr>
-        <p:spPr>
-          <a:xfrm>
-            <a:off x="4183380" y="2057400"/>
-            <a:ext cx="640080" cy="640080"/>
-          </a:xfrm>
-          <a:prstGeom prst="ellipse">
-            <a:avLst/>
-          </a:prstGeom>
-          <a:solidFill>
-            <a:srgbClr val="658DFF"/>
-          </a:solidFill>
-          <a:ln/>
-        </p:spPr>
-      </p:sp>
-      <p:pic>
-        <p:nvPicPr>
-          <p:cNvPr id="15" name="Toque D2 ícone" descr="preencoded.png">    </p:cNvPr>
-          <p:cNvPicPr>
-            <a:picLocks noChangeAspect="1"/>
-          </p:cNvPicPr>
-          <p:nvPr/>
-        </p:nvPicPr>
-        <p:blipFill>
-          <a:blip r:embed="rId3"/>
-          <a:stretch>
-            <a:fillRect/>
-          </a:stretch>
-        </p:blipFill>
-        <p:spPr>
-          <a:xfrm>
-            <a:off x="4343400" y="2217420"/>
-            <a:ext cx="320040" cy="320040"/>
-          </a:xfrm>
-          <a:prstGeom prst="rect">
-            <a:avLst/>
-          </a:prstGeom>
-        </p:spPr>
-      </p:pic>
-      <p:sp>
-        <p:nvSpPr>
-          <p:cNvPr id="16" name="Toque dia 3"/>
-          <p:cNvSpPr txBox="1"/>
-          <p:nvPr/>
-        </p:nvSpPr>
-        <p:spPr>
-          <a:xfrm>
-            <a:off x="3749040" y="2834640"/>
-            <a:ext cx="1508760" cy="457200"/>
-          </a:xfrm>
-          <a:prstGeom prst="rect">
-            <a:avLst/>
-          </a:prstGeom>
-          <a:noFill/>
-          <a:ln/>
-        </p:spPr>
-        <p:txBody>
-          <a:bodyPr wrap="square" lIns="0" tIns="0" rIns="0" bIns="0" rtlCol="0" anchor="t"/>
-          <a:lstStyle/>
-          <a:p>
-            <a:pPr algn="ctr" indent="0" marL="0">
-              <a:buNone/>
-            </a:pPr>
-            <a:r>
-              <a:rPr lang="en-US" sz="2200" b="1" dirty="0">
-                <a:solidFill>
-                  <a:schemeClr val="accent1"/>
-                </a:solidFill>
-              </a:rPr>
-              <a:t>D2</a:t>
-            </a:r>
-            <a:endParaRPr lang="en-US" sz="2200" dirty="0"/>
-          </a:p>
-        </p:txBody>
-      </p:sp>
-      <p:sp>
-        <p:nvSpPr>
-          <p:cNvPr id="17" name="Toque canal 3"/>
-          <p:cNvSpPr txBox="1"/>
-          <p:nvPr/>
-        </p:nvSpPr>
-        <p:spPr>
-          <a:xfrm>
-            <a:off x="3749040" y="3337560"/>
-            <a:ext cx="1508760" cy="548640"/>
-          </a:xfrm>
-          <a:prstGeom prst="rect">
-            <a:avLst/>
-          </a:prstGeom>
-          <a:noFill/>
-          <a:ln/>
-        </p:spPr>
-        <p:txBody>
-          <a:bodyPr wrap="square" lIns="0" tIns="0" rIns="0" bIns="0" rtlCol="0" anchor="t"/>
-          <a:lstStyle/>
-          <a:p>
-            <a:pPr algn="ctr" indent="0" marL="0">
-              <a:buNone/>
-            </a:pPr>
-            <a:r>
-              <a:rPr lang="en-US" sz="1400" b="1" dirty="0">
-                <a:solidFill>
-                  <a:schemeClr val="tx1"/>
-                </a:solidFill>
-              </a:rPr>
-              <a:t>WhatsApp</a:t>
-            </a:r>
-            <a:endParaRPr lang="en-US" sz="1400" dirty="0"/>
-          </a:p>
-        </p:txBody>
-      </p:sp>
-      <p:sp>
-        <p:nvSpPr>
-          <p:cNvPr id="18" name="Toque ação 3"/>
-          <p:cNvSpPr txBox="1"/>
-          <p:nvPr/>
-        </p:nvSpPr>
-        <p:spPr>
-          <a:xfrm>
-            <a:off x="3749040" y="3931920"/>
-            <a:ext cx="1508760" cy="822960"/>
-          </a:xfrm>
-          <a:prstGeom prst="rect">
-            <a:avLst/>
-          </a:prstGeom>
-          <a:noFill/>
-          <a:ln/>
-        </p:spPr>
-        <p:txBody>
-          <a:bodyPr wrap="square" lIns="0" tIns="0" rIns="0" bIns="0" rtlCol="0" anchor="t"/>
-          <a:lstStyle/>
-          <a:p>
-            <a:pPr algn="ctr" indent="0" marL="0">
-              <a:buNone/>
-            </a:pPr>
-            <a:r>
-              <a:rPr lang="en-US" sz="1300" dirty="0">
-                <a:solidFill>
-                  <a:schemeClr val="tx2"/>
-                </a:solidFill>
-              </a:rPr>
-              <a:t>Ideia do nicho</a:t>
-            </a:r>
-            <a:endParaRPr lang="en-US" sz="1300" dirty="0"/>
-          </a:p>
-        </p:txBody>
-      </p:sp>
-      <p:sp>
-        <p:nvSpPr>
-          <p:cNvPr id="19" name="Toque D4 círculo"/>
-          <p:cNvSpPr/>
-          <p:nvPr/>
-        </p:nvSpPr>
-        <p:spPr>
-          <a:xfrm>
-            <a:off x="5783580" y="2057400"/>
-            <a:ext cx="640080" cy="640080"/>
-          </a:xfrm>
-          <a:prstGeom prst="ellipse">
-            <a:avLst/>
-          </a:prstGeom>
-          <a:solidFill>
-            <a:srgbClr val="8A5CF6"/>
-          </a:solidFill>
-          <a:ln/>
-        </p:spPr>
-      </p:sp>
-      <p:pic>
-        <p:nvPicPr>
-          <p:cNvPr id="20" name="Toque D4 ícone" descr="preencoded.png">    </p:cNvPr>
-          <p:cNvPicPr>
-            <a:picLocks noChangeAspect="1"/>
-          </p:cNvPicPr>
-          <p:nvPr/>
-        </p:nvPicPr>
-        <p:blipFill>
-          <a:blip r:embed="rId4"/>
-          <a:stretch>
-            <a:fillRect/>
-          </a:stretch>
-        </p:blipFill>
-        <p:spPr>
-          <a:xfrm>
-            <a:off x="5943600" y="2217420"/>
-            <a:ext cx="320040" cy="320040"/>
-          </a:xfrm>
-          <a:prstGeom prst="rect">
-            <a:avLst/>
-          </a:prstGeom>
-        </p:spPr>
-      </p:pic>
-      <p:sp>
-        <p:nvSpPr>
-          <p:cNvPr id="21" name="Toque dia 4"/>
-          <p:cNvSpPr txBox="1"/>
-          <p:nvPr/>
-        </p:nvSpPr>
-        <p:spPr>
-          <a:xfrm>
-            <a:off x="5349240" y="2834640"/>
-            <a:ext cx="1508760" cy="457200"/>
-          </a:xfrm>
-          <a:prstGeom prst="rect">
-            <a:avLst/>
-          </a:prstGeom>
-          <a:noFill/>
-          <a:ln/>
-        </p:spPr>
-        <p:txBody>
-          <a:bodyPr wrap="square" lIns="0" tIns="0" rIns="0" bIns="0" rtlCol="0" anchor="t"/>
-          <a:lstStyle/>
-          <a:p>
-            <a:pPr algn="ctr" indent="0" marL="0">
-              <a:buNone/>
-            </a:pPr>
-            <a:r>
-              <a:rPr lang="en-US" sz="2200" b="1" dirty="0">
-                <a:solidFill>
-                  <a:schemeClr val="accent1"/>
-                </a:solidFill>
-              </a:rPr>
-              <a:t>D4</a:t>
-            </a:r>
-            <a:endParaRPr lang="en-US" sz="2200" dirty="0"/>
-          </a:p>
-        </p:txBody>
-      </p:sp>
-      <p:sp>
-        <p:nvSpPr>
-          <p:cNvPr id="22" name="Toque canal 4"/>
-          <p:cNvSpPr txBox="1"/>
-          <p:nvPr/>
-        </p:nvSpPr>
-        <p:spPr>
-          <a:xfrm>
-            <a:off x="5349240" y="3337560"/>
-            <a:ext cx="1508760" cy="548640"/>
-          </a:xfrm>
-          <a:prstGeom prst="rect">
-            <a:avLst/>
-          </a:prstGeom>
-          <a:noFill/>
-          <a:ln/>
-        </p:spPr>
-        <p:txBody>
-          <a:bodyPr wrap="square" lIns="0" tIns="0" rIns="0" bIns="0" rtlCol="0" anchor="t"/>
-          <a:lstStyle/>
-          <a:p>
-            <a:pPr algn="ctr" indent="0" marL="0">
-              <a:buNone/>
-            </a:pPr>
-            <a:r>
-              <a:rPr lang="en-US" sz="1400" b="1" dirty="0">
-                <a:solidFill>
-                  <a:schemeClr val="tx1"/>
-                </a:solidFill>
-              </a:rPr>
-              <a:t>E-mail</a:t>
-            </a:r>
-            <a:endParaRPr lang="en-US" sz="1400" dirty="0"/>
-          </a:p>
-        </p:txBody>
-      </p:sp>
-      <p:sp>
-        <p:nvSpPr>
-          <p:cNvPr id="23" name="Toque ação 4"/>
-          <p:cNvSpPr txBox="1"/>
-          <p:nvPr/>
-        </p:nvSpPr>
-        <p:spPr>
-          <a:xfrm>
-            <a:off x="5349240" y="3931920"/>
-            <a:ext cx="1508760" cy="822960"/>
-          </a:xfrm>
-          <a:prstGeom prst="rect">
-            <a:avLst/>
-          </a:prstGeom>
-          <a:noFill/>
-          <a:ln/>
-        </p:spPr>
-        <p:txBody>
-          <a:bodyPr wrap="square" lIns="0" tIns="0" rIns="0" bIns="0" rtlCol="0" anchor="t"/>
-          <a:lstStyle/>
-          <a:p>
-            <a:pPr algn="ctr" indent="0" marL="0">
-              <a:buNone/>
-            </a:pPr>
-            <a:r>
-              <a:rPr lang="en-US" sz="1300" dirty="0">
-                <a:solidFill>
-                  <a:schemeClr val="tx2"/>
-                </a:solidFill>
-              </a:rPr>
-              <a:t>Case ou antes/depois</a:t>
-            </a:r>
-            <a:endParaRPr lang="en-US" sz="1300" dirty="0"/>
-          </a:p>
-        </p:txBody>
-      </p:sp>
-      <p:sp>
-        <p:nvSpPr>
-          <p:cNvPr id="24" name="Toque D6 círculo"/>
-          <p:cNvSpPr/>
-          <p:nvPr/>
-        </p:nvSpPr>
-        <p:spPr>
-          <a:xfrm>
-            <a:off x="7383780" y="2057400"/>
-            <a:ext cx="640080" cy="640080"/>
-          </a:xfrm>
-          <a:prstGeom prst="ellipse">
-            <a:avLst/>
-          </a:prstGeom>
-          <a:solidFill>
-            <a:srgbClr val="B43CF8"/>
-          </a:solidFill>
-          <a:ln/>
-        </p:spPr>
-      </p:sp>
-      <p:pic>
-        <p:nvPicPr>
-          <p:cNvPr id="25" name="Toque D6 ícone" descr="preencoded.png">    </p:cNvPr>
-          <p:cNvPicPr>
-            <a:picLocks noChangeAspect="1"/>
-          </p:cNvPicPr>
-          <p:nvPr/>
-        </p:nvPicPr>
-        <p:blipFill>
-          <a:blip r:embed="rId5"/>
-          <a:stretch>
-            <a:fillRect/>
-          </a:stretch>
-        </p:blipFill>
-        <p:spPr>
-          <a:xfrm>
-            <a:off x="7543800" y="2217420"/>
-            <a:ext cx="320040" cy="320040"/>
-          </a:xfrm>
-          <a:prstGeom prst="rect">
-            <a:avLst/>
-          </a:prstGeom>
-        </p:spPr>
-      </p:pic>
-      <p:sp>
-        <p:nvSpPr>
-          <p:cNvPr id="26" name="Toque dia 5"/>
-          <p:cNvSpPr txBox="1"/>
-          <p:nvPr/>
-        </p:nvSpPr>
-        <p:spPr>
-          <a:xfrm>
-            <a:off x="6949440" y="2834640"/>
-            <a:ext cx="1508760" cy="457200"/>
-          </a:xfrm>
-          <a:prstGeom prst="rect">
-            <a:avLst/>
-          </a:prstGeom>
-          <a:noFill/>
-          <a:ln/>
-        </p:spPr>
-        <p:txBody>
-          <a:bodyPr wrap="square" lIns="0" tIns="0" rIns="0" bIns="0" rtlCol="0" anchor="t"/>
-          <a:lstStyle/>
-          <a:p>
-            <a:pPr algn="ctr" indent="0" marL="0">
-              <a:buNone/>
-            </a:pPr>
-            <a:r>
-              <a:rPr lang="en-US" sz="2200" b="1" dirty="0">
-                <a:solidFill>
-                  <a:schemeClr val="accent1"/>
-                </a:solidFill>
-              </a:rPr>
-              <a:t>D6</a:t>
-            </a:r>
-            <a:endParaRPr lang="en-US" sz="2200" dirty="0"/>
-          </a:p>
-        </p:txBody>
-      </p:sp>
-      <p:sp>
-        <p:nvSpPr>
-          <p:cNvPr id="27" name="Toque canal 5"/>
-          <p:cNvSpPr txBox="1"/>
-          <p:nvPr/>
-        </p:nvSpPr>
-        <p:spPr>
-          <a:xfrm>
-            <a:off x="6949440" y="3337560"/>
-            <a:ext cx="1508760" cy="548640"/>
-          </a:xfrm>
-          <a:prstGeom prst="rect">
-            <a:avLst/>
-          </a:prstGeom>
-          <a:noFill/>
-          <a:ln/>
-        </p:spPr>
-        <p:txBody>
-          <a:bodyPr wrap="square" lIns="0" tIns="0" rIns="0" bIns="0" rtlCol="0" anchor="t"/>
-          <a:lstStyle/>
-          <a:p>
-            <a:pPr algn="ctr" indent="0" marL="0">
-              <a:buNone/>
-            </a:pPr>
-            <a:r>
-              <a:rPr lang="en-US" sz="1400" b="1" dirty="0">
-                <a:solidFill>
-                  <a:schemeClr val="tx1"/>
-                </a:solidFill>
-              </a:rPr>
-              <a:t>Ligação</a:t>
-            </a:r>
-            <a:endParaRPr lang="en-US" sz="1400" dirty="0"/>
-          </a:p>
-        </p:txBody>
-      </p:sp>
-      <p:sp>
-        <p:nvSpPr>
-          <p:cNvPr id="28" name="Toque ação 5"/>
-          <p:cNvSpPr txBox="1"/>
-          <p:nvPr/>
-        </p:nvSpPr>
-        <p:spPr>
-          <a:xfrm>
-            <a:off x="6949440" y="3931920"/>
-            <a:ext cx="1508760" cy="822960"/>
-          </a:xfrm>
-          <a:prstGeom prst="rect">
-            <a:avLst/>
-          </a:prstGeom>
-          <a:noFill/>
-          <a:ln/>
-        </p:spPr>
-        <p:txBody>
-          <a:bodyPr wrap="square" lIns="0" tIns="0" rIns="0" bIns="0" rtlCol="0" anchor="t"/>
-          <a:lstStyle/>
-          <a:p>
-            <a:pPr algn="ctr" indent="0" marL="0">
-              <a:buNone/>
-            </a:pPr>
-            <a:r>
-              <a:rPr lang="en-US" sz="1300" dirty="0">
-                <a:solidFill>
-                  <a:schemeClr val="tx2"/>
-                </a:solidFill>
-              </a:rPr>
-              <a:t>Citar o e-mail</a:t>
-            </a:r>
-            <a:endParaRPr lang="en-US" sz="1300" dirty="0"/>
-          </a:p>
-        </p:txBody>
-      </p:sp>
-      <p:sp>
-        <p:nvSpPr>
-          <p:cNvPr id="29" name="Toque D8 círculo"/>
-          <p:cNvSpPr/>
-          <p:nvPr/>
-        </p:nvSpPr>
-        <p:spPr>
-          <a:xfrm>
-            <a:off x="8983980" y="2057400"/>
-            <a:ext cx="640080" cy="640080"/>
-          </a:xfrm>
-          <a:prstGeom prst="ellipse">
-            <a:avLst/>
-          </a:prstGeom>
-          <a:solidFill>
-            <a:srgbClr val="E011FF"/>
-          </a:solidFill>
-          <a:ln/>
-        </p:spPr>
-      </p:sp>
-      <p:pic>
-        <p:nvPicPr>
-          <p:cNvPr id="30" name="Toque D8 ícone" descr="preencoded.png">    </p:cNvPr>
-          <p:cNvPicPr>
-            <a:picLocks noChangeAspect="1"/>
-          </p:cNvPicPr>
-          <p:nvPr/>
-        </p:nvPicPr>
-        <p:blipFill>
-          <a:blip r:embed="rId6"/>
-          <a:stretch>
-            <a:fillRect/>
-          </a:stretch>
-        </p:blipFill>
-        <p:spPr>
-          <a:xfrm>
-            <a:off x="9144000" y="2217420"/>
-            <a:ext cx="320040" cy="320040"/>
-          </a:xfrm>
-          <a:prstGeom prst="rect">
-            <a:avLst/>
-          </a:prstGeom>
-        </p:spPr>
-      </p:pic>
-      <p:sp>
-        <p:nvSpPr>
-          <p:cNvPr id="31" name="Toque dia 6"/>
-          <p:cNvSpPr txBox="1"/>
-          <p:nvPr/>
-        </p:nvSpPr>
-        <p:spPr>
-          <a:xfrm>
-            <a:off x="8549640" y="2834640"/>
-            <a:ext cx="1508760" cy="457200"/>
-          </a:xfrm>
-          <a:prstGeom prst="rect">
-            <a:avLst/>
-          </a:prstGeom>
-          <a:noFill/>
-          <a:ln/>
-        </p:spPr>
-        <p:txBody>
-          <a:bodyPr wrap="square" lIns="0" tIns="0" rIns="0" bIns="0" rtlCol="0" anchor="t"/>
-          <a:lstStyle/>
-          <a:p>
-            <a:pPr algn="ctr" indent="0" marL="0">
-              <a:buNone/>
-            </a:pPr>
-            <a:r>
-              <a:rPr lang="en-US" sz="2200" b="1" dirty="0">
-                <a:solidFill>
-                  <a:schemeClr val="accent1"/>
-                </a:solidFill>
-              </a:rPr>
-              <a:t>D8</a:t>
-            </a:r>
-            <a:endParaRPr lang="en-US" sz="2200" dirty="0"/>
-          </a:p>
-        </p:txBody>
-      </p:sp>
-      <p:sp>
-        <p:nvSpPr>
-          <p:cNvPr id="32" name="Toque canal 6"/>
-          <p:cNvSpPr txBox="1"/>
-          <p:nvPr/>
-        </p:nvSpPr>
-        <p:spPr>
-          <a:xfrm>
-            <a:off x="8549640" y="3337560"/>
-            <a:ext cx="1508760" cy="548640"/>
-          </a:xfrm>
-          <a:prstGeom prst="rect">
-            <a:avLst/>
-          </a:prstGeom>
-          <a:noFill/>
-          <a:ln/>
-        </p:spPr>
-        <p:txBody>
-          <a:bodyPr wrap="square" lIns="0" tIns="0" rIns="0" bIns="0" rtlCol="0" anchor="t"/>
-          <a:lstStyle/>
-          <a:p>
-            <a:pPr algn="ctr" indent="0" marL="0">
-              <a:buNone/>
-            </a:pPr>
-            <a:r>
-              <a:rPr lang="en-US" sz="1400" b="1" dirty="0">
-                <a:solidFill>
-                  <a:schemeClr val="tx1"/>
-                </a:solidFill>
-              </a:rPr>
-              <a:t>Áudio ou vídeo</a:t>
-            </a:r>
-            <a:endParaRPr lang="en-US" sz="1400" dirty="0"/>
-          </a:p>
-        </p:txBody>
-      </p:sp>
-      <p:sp>
-        <p:nvSpPr>
-          <p:cNvPr id="33" name="Toque ação 6"/>
-          <p:cNvSpPr txBox="1"/>
-          <p:nvPr/>
-        </p:nvSpPr>
-        <p:spPr>
-          <a:xfrm>
-            <a:off x="8549640" y="3931920"/>
-            <a:ext cx="1508760" cy="822960"/>
-          </a:xfrm>
-          <a:prstGeom prst="rect">
-            <a:avLst/>
-          </a:prstGeom>
-          <a:noFill/>
-          <a:ln/>
-        </p:spPr>
-        <p:txBody>
-          <a:bodyPr wrap="square" lIns="0" tIns="0" rIns="0" bIns="0" rtlCol="0" anchor="t"/>
-          <a:lstStyle/>
-          <a:p>
-            <a:pPr algn="ctr" indent="0" marL="0">
-              <a:buNone/>
-            </a:pPr>
-            <a:r>
-              <a:rPr lang="en-US" sz="1300" dirty="0">
-                <a:solidFill>
-                  <a:schemeClr val="tx2"/>
-                </a:solidFill>
-              </a:rPr>
-              <a:t>Ideia para o espaço</a:t>
-            </a:r>
-            <a:endParaRPr lang="en-US" sz="1300" dirty="0"/>
-          </a:p>
-        </p:txBody>
-      </p:sp>
-      <p:sp>
-        <p:nvSpPr>
-          <p:cNvPr id="34" name="Toque D10 círculo"/>
-          <p:cNvSpPr/>
-          <p:nvPr/>
-        </p:nvSpPr>
-        <p:spPr>
-          <a:xfrm>
-            <a:off x="10584180" y="2057400"/>
-            <a:ext cx="640080" cy="640080"/>
-          </a:xfrm>
-          <a:prstGeom prst="ellipse">
-            <a:avLst/>
-          </a:prstGeom>
-          <a:solidFill>
-            <a:srgbClr val="5F5F5F"/>
-          </a:solidFill>
-          <a:ln/>
-        </p:spPr>
-      </p:sp>
-      <p:pic>
-        <p:nvPicPr>
-          <p:cNvPr id="35" name="Toque D10 ícone" descr="preencoded.png">    </p:cNvPr>
-          <p:cNvPicPr>
-            <a:picLocks noChangeAspect="1"/>
-          </p:cNvPicPr>
-          <p:nvPr/>
-        </p:nvPicPr>
-        <p:blipFill>
-          <a:blip r:embed="rId7"/>
-          <a:stretch>
-            <a:fillRect/>
-          </a:stretch>
-        </p:blipFill>
-        <p:spPr>
-          <a:xfrm>
-            <a:off x="10744200" y="2217420"/>
-            <a:ext cx="320040" cy="320040"/>
-          </a:xfrm>
-          <a:prstGeom prst="rect">
-            <a:avLst/>
-          </a:prstGeom>
-        </p:spPr>
-      </p:pic>
-      <p:sp>
-        <p:nvSpPr>
-          <p:cNvPr id="36" name="Toque dia 7"/>
-          <p:cNvSpPr txBox="1"/>
-          <p:nvPr/>
-        </p:nvSpPr>
-        <p:spPr>
-          <a:xfrm>
-            <a:off x="10149840" y="2834640"/>
-            <a:ext cx="1508760" cy="457200"/>
-          </a:xfrm>
-          <a:prstGeom prst="rect">
-            <a:avLst/>
-          </a:prstGeom>
-          <a:noFill/>
-          <a:ln/>
-        </p:spPr>
-        <p:txBody>
-          <a:bodyPr wrap="square" lIns="0" tIns="0" rIns="0" bIns="0" rtlCol="0" anchor="t"/>
-          <a:lstStyle/>
-          <a:p>
-            <a:pPr algn="ctr" indent="0" marL="0">
-              <a:buNone/>
-            </a:pPr>
-            <a:r>
-              <a:rPr lang="en-US" sz="2200" b="1" dirty="0">
-                <a:solidFill>
-                  <a:schemeClr val="accent1"/>
-                </a:solidFill>
-              </a:rPr>
-              <a:t>D10</a:t>
-            </a:r>
-            <a:endParaRPr lang="en-US" sz="2200" dirty="0"/>
-          </a:p>
-        </p:txBody>
-      </p:sp>
-      <p:sp>
-        <p:nvSpPr>
-          <p:cNvPr id="37" name="Toque canal 7"/>
-          <p:cNvSpPr txBox="1"/>
-          <p:nvPr/>
-        </p:nvSpPr>
-        <p:spPr>
-          <a:xfrm>
-            <a:off x="10149840" y="3337560"/>
-            <a:ext cx="1508760" cy="548640"/>
-          </a:xfrm>
-          <a:prstGeom prst="rect">
-            <a:avLst/>
-          </a:prstGeom>
-          <a:noFill/>
-          <a:ln/>
-        </p:spPr>
-        <p:txBody>
-          <a:bodyPr wrap="square" lIns="0" tIns="0" rIns="0" bIns="0" rtlCol="0" anchor="t"/>
-          <a:lstStyle/>
-          <a:p>
-            <a:pPr algn="ctr" indent="0" marL="0">
-              <a:buNone/>
-            </a:pPr>
-            <a:r>
-              <a:rPr lang="en-US" sz="1400" b="1" dirty="0">
-                <a:solidFill>
-                  <a:schemeClr val="tx1"/>
-                </a:solidFill>
-              </a:rPr>
-              <a:t>Encerramento</a:t>
-            </a:r>
-            <a:endParaRPr lang="en-US" sz="1400" dirty="0"/>
-          </a:p>
-        </p:txBody>
-      </p:sp>
-      <p:sp>
-        <p:nvSpPr>
-          <p:cNvPr id="38" name="Toque ação 7"/>
-          <p:cNvSpPr txBox="1"/>
-          <p:nvPr/>
-        </p:nvSpPr>
-        <p:spPr>
-          <a:xfrm>
-            <a:off x="10149840" y="3931920"/>
-            <a:ext cx="1508760" cy="822960"/>
-          </a:xfrm>
-          <a:prstGeom prst="rect">
-            <a:avLst/>
-          </a:prstGeom>
-          <a:noFill/>
-          <a:ln/>
-        </p:spPr>
-        <p:txBody>
-          <a:bodyPr wrap="square" lIns="0" tIns="0" rIns="0" bIns="0" rtlCol="0" anchor="t"/>
-          <a:lstStyle/>
-          <a:p>
-            <a:pPr algn="ctr" indent="0" marL="0">
-              <a:buNone/>
-            </a:pPr>
-            <a:r>
-              <a:rPr lang="en-US" sz="1300" dirty="0">
-                <a:solidFill>
-                  <a:schemeClr val="tx2"/>
-                </a:solidFill>
-              </a:rPr>
-              <a:t>"Encerro ou volto em [mês]?"</a:t>
-            </a:r>
-            <a:endParaRPr lang="en-US" sz="1300" dirty="0"/>
-          </a:p>
-        </p:txBody>
-      </p:sp>
-      <p:sp>
-        <p:nvSpPr>
-          <p:cNvPr id="39" name="Faixa cadência"/>
-          <p:cNvSpPr/>
-          <p:nvPr/>
-        </p:nvSpPr>
-        <p:spPr>
-          <a:xfrm>
-            <a:off x="548640" y="5029200"/>
-            <a:ext cx="11064240" cy="1005840"/>
+            <a:off x="6400800" y="1554480"/>
+            <a:ext cx="5212080" cy="4526280"/>
           </a:xfrm>
           <a:prstGeom prst="roundRect">
             <a:avLst>
-              <a:gd name="adj" fmla="val 10909"/>
+              <a:gd name="adj" fmla="val 2424"/>
             </a:avLst>
           </a:prstGeom>
           <a:solidFill>
-            <a:schemeClr val="bg2"/>
+            <a:schemeClr val="tx2"/>
           </a:solidFill>
           <a:ln/>
         </p:spPr>
       </p:sp>
       <p:sp>
         <p:nvSpPr>
-          <p:cNvPr id="40" name="Regra cadência"/>
-          <p:cNvSpPr txBox="1"/>
-          <p:nvPr/>
-        </p:nvSpPr>
-        <p:spPr>
-          <a:xfrm>
-            <a:off x="868680" y="5029200"/>
-            <a:ext cx="10424160" cy="1005840"/>
-          </a:xfrm>
-          <a:prstGeom prst="rect">
-            <a:avLst/>
-          </a:prstGeom>
-          <a:noFill/>
-          <a:ln/>
-        </p:spPr>
-        <p:txBody>
-          <a:bodyPr wrap="square" lIns="0" tIns="0" rIns="0" bIns="0" rtlCol="0" anchor="ctr"/>
+          <p:cNvPr id="8" name="Nota título"/>
+          <p:cNvSpPr txBox="1"/>
+          <p:nvPr/>
+        </p:nvSpPr>
+        <p:spPr>
+          <a:xfrm>
+            <a:off x="6720840" y="1783080"/>
+            <a:ext cx="4572000" cy="457200"/>
+          </a:xfrm>
+          <a:prstGeom prst="rect">
+            <a:avLst/>
+          </a:prstGeom>
+          <a:noFill/>
+          <a:ln/>
+        </p:spPr>
+        <p:txBody>
+          <a:bodyPr wrap="square" lIns="0" tIns="0" rIns="0" bIns="0" rtlCol="0" anchor="t"/>
           <a:lstStyle/>
           <a:p>
             <a:pPr indent="0" marL="0">
               <a:buNone/>
             </a:pPr>
             <a:r>
-              <a:rPr lang="en-US" sz="1600" b="1" dirty="0">
-                <a:solidFill>
-                  <a:schemeClr val="accent4"/>
-                </a:solidFill>
-              </a:rPr>
-              <a:t>Cada toque traz algo novo. </a:t>
-            </a:r>
-            <a:pPr indent="0" marL="0">
-              <a:buNone/>
-            </a:pPr>
-            <a:r>
-              <a:rPr lang="en-US" sz="1600" dirty="0">
-                <a:solidFill>
-                  <a:schemeClr val="tx1"/>
-                </a:solidFill>
-              </a:rPr>
-              <a:t>Nunca "só passando para saber". Respondeu? Volta para a qualificação. Sem resposta no D10? Nutrição com motivo.</a:t>
-            </a:r>
-            <a:endParaRPr lang="en-US" sz="1600" dirty="0"/>
+              <a:rPr lang="en-US" sz="1800" b="1" dirty="0">
+                <a:solidFill>
+                  <a:schemeClr val="accent2"/>
+                </a:solidFill>
+              </a:rPr>
+              <a:t>Nota de passagem no Salesforce</a:t>
+            </a:r>
+            <a:endParaRPr lang="en-US" sz="1800" dirty="0"/>
+          </a:p>
+        </p:txBody>
+      </p:sp>
+      <p:sp>
+        <p:nvSpPr>
+          <p:cNvPr id="9" name="Nota campos"/>
+          <p:cNvSpPr txBox="1"/>
+          <p:nvPr/>
+        </p:nvSpPr>
+        <p:spPr>
+          <a:xfrm>
+            <a:off x="6720840" y="2377440"/>
+            <a:ext cx="4572000" cy="3566160"/>
+          </a:xfrm>
+          <a:prstGeom prst="rect">
+            <a:avLst/>
+          </a:prstGeom>
+          <a:noFill/>
+          <a:ln/>
+        </p:spPr>
+        <p:txBody>
+          <a:bodyPr wrap="square" lIns="0" tIns="0" rIns="0" bIns="0" rtlCol="0" anchor="t"/>
+          <a:lstStyle/>
+          <a:p>
+            <a:pPr marL="342900" indent="-342900">
+              <a:spcAft>
+                <a:spcPts val="500"/>
+              </a:spcAft>
+              <a:buSzPct val="100000"/>
+              <a:buChar char="•"/>
+            </a:pPr>
+            <a:r>
+              <a:rPr lang="en-US" sz="1500" dirty="0">
+                <a:solidFill>
+                  <a:schemeClr val="bg1"/>
+                </a:solidFill>
+              </a:rPr>
+              <a:t>Empresa, nicho e contato</a:t>
+            </a:r>
+            <a:endParaRPr lang="en-US" sz="1500" dirty="0"/>
+          </a:p>
+          <a:p>
+            <a:pPr marL="342900" indent="-342900">
+              <a:spcAft>
+                <a:spcPts val="500"/>
+              </a:spcAft>
+              <a:buSzPct val="100000"/>
+              <a:buChar char="•"/>
+            </a:pPr>
+            <a:r>
+              <a:rPr lang="en-US" sz="1500" dirty="0">
+                <a:solidFill>
+                  <a:schemeClr val="bg1"/>
+                </a:solidFill>
+              </a:rPr>
+              <a:t>Decisor(es)</a:t>
+            </a:r>
+            <a:endParaRPr lang="en-US" sz="1500" dirty="0"/>
+          </a:p>
+          <a:p>
+            <a:pPr marL="342900" indent="-342900">
+              <a:spcAft>
+                <a:spcPts val="500"/>
+              </a:spcAft>
+              <a:buSzPct val="100000"/>
+              <a:buChar char="•"/>
+            </a:pPr>
+            <a:r>
+              <a:rPr lang="en-US" sz="1500" dirty="0">
+                <a:solidFill>
+                  <a:schemeClr val="bg1"/>
+                </a:solidFill>
+              </a:rPr>
+              <a:t>Projeto: local, medidas, indoor/outdoor</a:t>
+            </a:r>
+            <a:endParaRPr lang="en-US" sz="1500" dirty="0"/>
+          </a:p>
+          <a:p>
+            <a:pPr marL="342900" indent="-342900">
+              <a:spcAft>
+                <a:spcPts val="500"/>
+              </a:spcAft>
+              <a:buSzPct val="100000"/>
+              <a:buChar char="•"/>
+            </a:pPr>
+            <a:r>
+              <a:rPr lang="en-US" sz="1500" dirty="0">
+                <a:solidFill>
+                  <a:schemeClr val="bg1"/>
+                </a:solidFill>
+              </a:rPr>
+              <a:t>Propósito de compra</a:t>
+            </a:r>
+            <a:endParaRPr lang="en-US" sz="1500" dirty="0"/>
+          </a:p>
+          <a:p>
+            <a:pPr marL="342900" indent="-342900">
+              <a:spcAft>
+                <a:spcPts val="500"/>
+              </a:spcAft>
+              <a:buSzPct val="100000"/>
+              <a:buChar char="•"/>
+            </a:pPr>
+            <a:r>
+              <a:rPr lang="en-US" sz="1500" dirty="0">
+                <a:solidFill>
+                  <a:schemeClr val="bg1"/>
+                </a:solidFill>
+              </a:rPr>
+              <a:t>Dor nas palavras do cliente</a:t>
+            </a:r>
+            <a:endParaRPr lang="en-US" sz="1500" dirty="0"/>
+          </a:p>
+          <a:p>
+            <a:pPr marL="342900" indent="-342900">
+              <a:spcAft>
+                <a:spcPts val="500"/>
+              </a:spcAft>
+              <a:buSzPct val="100000"/>
+              <a:buChar char="•"/>
+            </a:pPr>
+            <a:r>
+              <a:rPr lang="en-US" sz="1500" dirty="0">
+                <a:solidFill>
+                  <a:schemeClr val="bg1"/>
+                </a:solidFill>
+              </a:rPr>
+              <a:t>Prazo ou evento</a:t>
+            </a:r>
+            <a:endParaRPr lang="en-US" sz="1500" dirty="0"/>
+          </a:p>
+          <a:p>
+            <a:pPr marL="342900" indent="-342900">
+              <a:spcAft>
+                <a:spcPts val="500"/>
+              </a:spcAft>
+              <a:buSzPct val="100000"/>
+              <a:buChar char="•"/>
+            </a:pPr>
+            <a:r>
+              <a:rPr lang="en-US" sz="1500" dirty="0">
+                <a:solidFill>
+                  <a:schemeClr val="bg1"/>
+                </a:solidFill>
+              </a:rPr>
+              <a:t>Compra ou locação e investimento</a:t>
+            </a:r>
+            <a:endParaRPr lang="en-US" sz="1500" dirty="0"/>
+          </a:p>
+          <a:p>
+            <a:pPr marL="342900" indent="-342900">
+              <a:spcAft>
+                <a:spcPts val="500"/>
+              </a:spcAft>
+              <a:buSzPct val="100000"/>
+              <a:buChar char="•"/>
+            </a:pPr>
+            <a:r>
+              <a:rPr lang="en-US" sz="1500" dirty="0">
+                <a:solidFill>
+                  <a:schemeClr val="bg1"/>
+                </a:solidFill>
+              </a:rPr>
+              <a:t>Objeções que apareceram</a:t>
+            </a:r>
+            <a:endParaRPr lang="en-US" sz="1500" dirty="0"/>
+          </a:p>
+          <a:p>
+            <a:pPr marL="342900" indent="-342900">
+              <a:spcAft>
+                <a:spcPts val="500"/>
+              </a:spcAft>
+              <a:buSzPct val="100000"/>
+              <a:buChar char="•"/>
+            </a:pPr>
+            <a:r>
+              <a:rPr lang="en-US" sz="1500" dirty="0">
+                <a:solidFill>
+                  <a:schemeClr val="bg1"/>
+                </a:solidFill>
+              </a:rPr>
+              <a:t>Origem, TAG e próximo passo</a:t>
+            </a:r>
+            <a:endParaRPr lang="en-US" sz="1500" dirty="0"/>
           </a:p>
         </p:txBody>
       </p:sp>
@@ -4171,7 +3549,7 @@
                   <a:schemeClr val="tx1"/>
                 </a:solidFill>
               </a:rPr>
-              <a:t>Objeções na etapa de SDR</a:t>
+              <a:t>Etapa 5: cadência de 7 toques em 10 dias</a:t>
             </a:r>
             <a:endParaRPr lang="en-US" sz="3200" dirty="0"/>
           </a:p>
@@ -4179,18 +3557,1105 @@
       </p:sp>
       <p:sp>
         <p:nvSpPr>
-          <p:cNvPr id="3" name="Objeção 1"/>
+          <p:cNvPr id="3" name="Linha do tempo"/>
           <p:cNvSpPr/>
           <p:nvPr/>
         </p:nvSpPr>
         <p:spPr>
           <a:xfrm>
-            <a:off x="548640" y="1508760"/>
-            <a:ext cx="5440680" cy="1325880"/>
+            <a:off x="868680" y="2377440"/>
+            <a:ext cx="10424160" cy="0"/>
+          </a:xfrm>
+          <a:prstGeom prst="line">
+            <a:avLst/>
+          </a:prstGeom>
+          <a:noFill/>
+          <a:ln w="50800">
+            <a:solidFill>
+              <a:srgbClr val="F2F3F7"/>
+            </a:solidFill>
+            <a:prstDash val="solid"/>
+          </a:ln>
+        </p:spPr>
+      </p:sp>
+      <p:sp>
+        <p:nvSpPr>
+          <p:cNvPr id="4" name="Toque D0 círculo"/>
+          <p:cNvSpPr/>
+          <p:nvPr/>
+        </p:nvSpPr>
+        <p:spPr>
+          <a:xfrm>
+            <a:off x="982980" y="2057400"/>
+            <a:ext cx="640080" cy="640080"/>
+          </a:xfrm>
+          <a:prstGeom prst="ellipse">
+            <a:avLst/>
+          </a:prstGeom>
+          <a:solidFill>
+            <a:srgbClr val="12D9FF"/>
+          </a:solidFill>
+          <a:ln/>
+        </p:spPr>
+      </p:sp>
+      <p:pic>
+        <p:nvPicPr>
+          <p:cNvPr id="5" name="Toque D0 ícone" descr="preencoded.png">    </p:cNvPr>
+          <p:cNvPicPr>
+            <a:picLocks noChangeAspect="1"/>
+          </p:cNvPicPr>
+          <p:nvPr/>
+        </p:nvPicPr>
+        <p:blipFill>
+          <a:blip r:embed="rId1"/>
+          <a:stretch>
+            <a:fillRect/>
+          </a:stretch>
+        </p:blipFill>
+        <p:spPr>
+          <a:xfrm>
+            <a:off x="1143000" y="2217420"/>
+            <a:ext cx="320040" cy="320040"/>
+          </a:xfrm>
+          <a:prstGeom prst="rect">
+            <a:avLst/>
+          </a:prstGeom>
+        </p:spPr>
+      </p:pic>
+      <p:sp>
+        <p:nvSpPr>
+          <p:cNvPr id="6" name="Toque dia 1"/>
+          <p:cNvSpPr txBox="1"/>
+          <p:nvPr/>
+        </p:nvSpPr>
+        <p:spPr>
+          <a:xfrm>
+            <a:off x="548640" y="2834640"/>
+            <a:ext cx="1508760" cy="457200"/>
+          </a:xfrm>
+          <a:prstGeom prst="rect">
+            <a:avLst/>
+          </a:prstGeom>
+          <a:noFill/>
+          <a:ln/>
+        </p:spPr>
+        <p:txBody>
+          <a:bodyPr wrap="square" lIns="0" tIns="0" rIns="0" bIns="0" rtlCol="0" anchor="t"/>
+          <a:lstStyle/>
+          <a:p>
+            <a:pPr algn="ctr" indent="0" marL="0">
+              <a:buNone/>
+            </a:pPr>
+            <a:r>
+              <a:rPr lang="en-US" sz="2200" b="1" dirty="0">
+                <a:solidFill>
+                  <a:schemeClr val="accent1"/>
+                </a:solidFill>
+              </a:rPr>
+              <a:t>D0</a:t>
+            </a:r>
+            <a:endParaRPr lang="en-US" sz="2200" dirty="0"/>
+          </a:p>
+        </p:txBody>
+      </p:sp>
+      <p:sp>
+        <p:nvSpPr>
+          <p:cNvPr id="7" name="Toque canal 1"/>
+          <p:cNvSpPr txBox="1"/>
+          <p:nvPr/>
+        </p:nvSpPr>
+        <p:spPr>
+          <a:xfrm>
+            <a:off x="548640" y="3337560"/>
+            <a:ext cx="1508760" cy="548640"/>
+          </a:xfrm>
+          <a:prstGeom prst="rect">
+            <a:avLst/>
+          </a:prstGeom>
+          <a:noFill/>
+          <a:ln/>
+        </p:spPr>
+        <p:txBody>
+          <a:bodyPr wrap="square" lIns="0" tIns="0" rIns="0" bIns="0" rtlCol="0" anchor="t"/>
+          <a:lstStyle/>
+          <a:p>
+            <a:pPr algn="ctr" indent="0" marL="0">
+              <a:buNone/>
+            </a:pPr>
+            <a:r>
+              <a:rPr lang="en-US" sz="1400" b="1" dirty="0">
+                <a:solidFill>
+                  <a:schemeClr val="tx1"/>
+                </a:solidFill>
+              </a:rPr>
+              <a:t>Ligação + WhatsApp</a:t>
+            </a:r>
+            <a:endParaRPr lang="en-US" sz="1400" dirty="0"/>
+          </a:p>
+        </p:txBody>
+      </p:sp>
+      <p:sp>
+        <p:nvSpPr>
+          <p:cNvPr id="8" name="Toque ação 1"/>
+          <p:cNvSpPr txBox="1"/>
+          <p:nvPr/>
+        </p:nvSpPr>
+        <p:spPr>
+          <a:xfrm>
+            <a:off x="548640" y="3931920"/>
+            <a:ext cx="1508760" cy="822960"/>
+          </a:xfrm>
+          <a:prstGeom prst="rect">
+            <a:avLst/>
+          </a:prstGeom>
+          <a:noFill/>
+          <a:ln/>
+        </p:spPr>
+        <p:txBody>
+          <a:bodyPr wrap="square" lIns="0" tIns="0" rIns="0" bIns="0" rtlCol="0" anchor="t"/>
+          <a:lstStyle/>
+          <a:p>
+            <a:pPr algn="ctr" indent="0" marL="0">
+              <a:buNone/>
+            </a:pPr>
+            <a:r>
+              <a:rPr lang="en-US" sz="1300" dirty="0">
+                <a:solidFill>
+                  <a:schemeClr val="tx2"/>
+                </a:solidFill>
+              </a:rPr>
+              <a:t>Primeiro contato</a:t>
+            </a:r>
+            <a:endParaRPr lang="en-US" sz="1300" dirty="0"/>
+          </a:p>
+        </p:txBody>
+      </p:sp>
+      <p:sp>
+        <p:nvSpPr>
+          <p:cNvPr id="9" name="Toque D1 círculo"/>
+          <p:cNvSpPr/>
+          <p:nvPr/>
+        </p:nvSpPr>
+        <p:spPr>
+          <a:xfrm>
+            <a:off x="2583180" y="2057400"/>
+            <a:ext cx="640080" cy="640080"/>
+          </a:xfrm>
+          <a:prstGeom prst="ellipse">
+            <a:avLst/>
+          </a:prstGeom>
+          <a:solidFill>
+            <a:srgbClr val="3EB1FE"/>
+          </a:solidFill>
+          <a:ln/>
+        </p:spPr>
+      </p:sp>
+      <p:pic>
+        <p:nvPicPr>
+          <p:cNvPr id="10" name="Toque D1 ícone" descr="preencoded.png">    </p:cNvPr>
+          <p:cNvPicPr>
+            <a:picLocks noChangeAspect="1"/>
+          </p:cNvPicPr>
+          <p:nvPr/>
+        </p:nvPicPr>
+        <p:blipFill>
+          <a:blip r:embed="rId2"/>
+          <a:stretch>
+            <a:fillRect/>
+          </a:stretch>
+        </p:blipFill>
+        <p:spPr>
+          <a:xfrm>
+            <a:off x="2743200" y="2217420"/>
+            <a:ext cx="320040" cy="320040"/>
+          </a:xfrm>
+          <a:prstGeom prst="rect">
+            <a:avLst/>
+          </a:prstGeom>
+        </p:spPr>
+      </p:pic>
+      <p:sp>
+        <p:nvSpPr>
+          <p:cNvPr id="11" name="Toque dia 2"/>
+          <p:cNvSpPr txBox="1"/>
+          <p:nvPr/>
+        </p:nvSpPr>
+        <p:spPr>
+          <a:xfrm>
+            <a:off x="2148840" y="2834640"/>
+            <a:ext cx="1508760" cy="457200"/>
+          </a:xfrm>
+          <a:prstGeom prst="rect">
+            <a:avLst/>
+          </a:prstGeom>
+          <a:noFill/>
+          <a:ln/>
+        </p:spPr>
+        <p:txBody>
+          <a:bodyPr wrap="square" lIns="0" tIns="0" rIns="0" bIns="0" rtlCol="0" anchor="t"/>
+          <a:lstStyle/>
+          <a:p>
+            <a:pPr algn="ctr" indent="0" marL="0">
+              <a:buNone/>
+            </a:pPr>
+            <a:r>
+              <a:rPr lang="en-US" sz="2200" b="1" dirty="0">
+                <a:solidFill>
+                  <a:schemeClr val="accent1"/>
+                </a:solidFill>
+              </a:rPr>
+              <a:t>D1</a:t>
+            </a:r>
+            <a:endParaRPr lang="en-US" sz="2200" dirty="0"/>
+          </a:p>
+        </p:txBody>
+      </p:sp>
+      <p:sp>
+        <p:nvSpPr>
+          <p:cNvPr id="12" name="Toque canal 2"/>
+          <p:cNvSpPr txBox="1"/>
+          <p:nvPr/>
+        </p:nvSpPr>
+        <p:spPr>
+          <a:xfrm>
+            <a:off x="2148840" y="3337560"/>
+            <a:ext cx="1508760" cy="548640"/>
+          </a:xfrm>
+          <a:prstGeom prst="rect">
+            <a:avLst/>
+          </a:prstGeom>
+          <a:noFill/>
+          <a:ln/>
+        </p:spPr>
+        <p:txBody>
+          <a:bodyPr wrap="square" lIns="0" tIns="0" rIns="0" bIns="0" rtlCol="0" anchor="t"/>
+          <a:lstStyle/>
+          <a:p>
+            <a:pPr algn="ctr" indent="0" marL="0">
+              <a:buNone/>
+            </a:pPr>
+            <a:r>
+              <a:rPr lang="en-US" sz="1400" b="1" dirty="0">
+                <a:solidFill>
+                  <a:schemeClr val="tx1"/>
+                </a:solidFill>
+              </a:rPr>
+              <a:t>Ligação</a:t>
+            </a:r>
+            <a:endParaRPr lang="en-US" sz="1400" dirty="0"/>
+          </a:p>
+        </p:txBody>
+      </p:sp>
+      <p:sp>
+        <p:nvSpPr>
+          <p:cNvPr id="13" name="Toque ação 2"/>
+          <p:cNvSpPr txBox="1"/>
+          <p:nvPr/>
+        </p:nvSpPr>
+        <p:spPr>
+          <a:xfrm>
+            <a:off x="2148840" y="3931920"/>
+            <a:ext cx="1508760" cy="822960"/>
+          </a:xfrm>
+          <a:prstGeom prst="rect">
+            <a:avLst/>
+          </a:prstGeom>
+          <a:noFill/>
+          <a:ln/>
+        </p:spPr>
+        <p:txBody>
+          <a:bodyPr wrap="square" lIns="0" tIns="0" rIns="0" bIns="0" rtlCol="0" anchor="t"/>
+          <a:lstStyle/>
+          <a:p>
+            <a:pPr algn="ctr" indent="0" marL="0">
+              <a:buNone/>
+            </a:pPr>
+            <a:r>
+              <a:rPr lang="en-US" sz="1300" dirty="0">
+                <a:solidFill>
+                  <a:schemeClr val="tx2"/>
+                </a:solidFill>
+              </a:rPr>
+              <a:t>Outro horário</a:t>
+            </a:r>
+            <a:endParaRPr lang="en-US" sz="1300" dirty="0"/>
+          </a:p>
+        </p:txBody>
+      </p:sp>
+      <p:sp>
+        <p:nvSpPr>
+          <p:cNvPr id="14" name="Toque D2 círculo"/>
+          <p:cNvSpPr/>
+          <p:nvPr/>
+        </p:nvSpPr>
+        <p:spPr>
+          <a:xfrm>
+            <a:off x="4183380" y="2057400"/>
+            <a:ext cx="640080" cy="640080"/>
+          </a:xfrm>
+          <a:prstGeom prst="ellipse">
+            <a:avLst/>
+          </a:prstGeom>
+          <a:solidFill>
+            <a:srgbClr val="658DFF"/>
+          </a:solidFill>
+          <a:ln/>
+        </p:spPr>
+      </p:sp>
+      <p:pic>
+        <p:nvPicPr>
+          <p:cNvPr id="15" name="Toque D2 ícone" descr="preencoded.png">    </p:cNvPr>
+          <p:cNvPicPr>
+            <a:picLocks noChangeAspect="1"/>
+          </p:cNvPicPr>
+          <p:nvPr/>
+        </p:nvPicPr>
+        <p:blipFill>
+          <a:blip r:embed="rId3"/>
+          <a:stretch>
+            <a:fillRect/>
+          </a:stretch>
+        </p:blipFill>
+        <p:spPr>
+          <a:xfrm>
+            <a:off x="4343400" y="2217420"/>
+            <a:ext cx="320040" cy="320040"/>
+          </a:xfrm>
+          <a:prstGeom prst="rect">
+            <a:avLst/>
+          </a:prstGeom>
+        </p:spPr>
+      </p:pic>
+      <p:sp>
+        <p:nvSpPr>
+          <p:cNvPr id="16" name="Toque dia 3"/>
+          <p:cNvSpPr txBox="1"/>
+          <p:nvPr/>
+        </p:nvSpPr>
+        <p:spPr>
+          <a:xfrm>
+            <a:off x="3749040" y="2834640"/>
+            <a:ext cx="1508760" cy="457200"/>
+          </a:xfrm>
+          <a:prstGeom prst="rect">
+            <a:avLst/>
+          </a:prstGeom>
+          <a:noFill/>
+          <a:ln/>
+        </p:spPr>
+        <p:txBody>
+          <a:bodyPr wrap="square" lIns="0" tIns="0" rIns="0" bIns="0" rtlCol="0" anchor="t"/>
+          <a:lstStyle/>
+          <a:p>
+            <a:pPr algn="ctr" indent="0" marL="0">
+              <a:buNone/>
+            </a:pPr>
+            <a:r>
+              <a:rPr lang="en-US" sz="2200" b="1" dirty="0">
+                <a:solidFill>
+                  <a:schemeClr val="accent1"/>
+                </a:solidFill>
+              </a:rPr>
+              <a:t>D2</a:t>
+            </a:r>
+            <a:endParaRPr lang="en-US" sz="2200" dirty="0"/>
+          </a:p>
+        </p:txBody>
+      </p:sp>
+      <p:sp>
+        <p:nvSpPr>
+          <p:cNvPr id="17" name="Toque canal 3"/>
+          <p:cNvSpPr txBox="1"/>
+          <p:nvPr/>
+        </p:nvSpPr>
+        <p:spPr>
+          <a:xfrm>
+            <a:off x="3749040" y="3337560"/>
+            <a:ext cx="1508760" cy="548640"/>
+          </a:xfrm>
+          <a:prstGeom prst="rect">
+            <a:avLst/>
+          </a:prstGeom>
+          <a:noFill/>
+          <a:ln/>
+        </p:spPr>
+        <p:txBody>
+          <a:bodyPr wrap="square" lIns="0" tIns="0" rIns="0" bIns="0" rtlCol="0" anchor="t"/>
+          <a:lstStyle/>
+          <a:p>
+            <a:pPr algn="ctr" indent="0" marL="0">
+              <a:buNone/>
+            </a:pPr>
+            <a:r>
+              <a:rPr lang="en-US" sz="1400" b="1" dirty="0">
+                <a:solidFill>
+                  <a:schemeClr val="tx1"/>
+                </a:solidFill>
+              </a:rPr>
+              <a:t>WhatsApp</a:t>
+            </a:r>
+            <a:endParaRPr lang="en-US" sz="1400" dirty="0"/>
+          </a:p>
+        </p:txBody>
+      </p:sp>
+      <p:sp>
+        <p:nvSpPr>
+          <p:cNvPr id="18" name="Toque ação 3"/>
+          <p:cNvSpPr txBox="1"/>
+          <p:nvPr/>
+        </p:nvSpPr>
+        <p:spPr>
+          <a:xfrm>
+            <a:off x="3749040" y="3931920"/>
+            <a:ext cx="1508760" cy="822960"/>
+          </a:xfrm>
+          <a:prstGeom prst="rect">
+            <a:avLst/>
+          </a:prstGeom>
+          <a:noFill/>
+          <a:ln/>
+        </p:spPr>
+        <p:txBody>
+          <a:bodyPr wrap="square" lIns="0" tIns="0" rIns="0" bIns="0" rtlCol="0" anchor="t"/>
+          <a:lstStyle/>
+          <a:p>
+            <a:pPr algn="ctr" indent="0" marL="0">
+              <a:buNone/>
+            </a:pPr>
+            <a:r>
+              <a:rPr lang="en-US" sz="1300" dirty="0">
+                <a:solidFill>
+                  <a:schemeClr val="tx2"/>
+                </a:solidFill>
+              </a:rPr>
+              <a:t>Ideia do nicho</a:t>
+            </a:r>
+            <a:endParaRPr lang="en-US" sz="1300" dirty="0"/>
+          </a:p>
+        </p:txBody>
+      </p:sp>
+      <p:sp>
+        <p:nvSpPr>
+          <p:cNvPr id="19" name="Toque D4 círculo"/>
+          <p:cNvSpPr/>
+          <p:nvPr/>
+        </p:nvSpPr>
+        <p:spPr>
+          <a:xfrm>
+            <a:off x="5783580" y="2057400"/>
+            <a:ext cx="640080" cy="640080"/>
+          </a:xfrm>
+          <a:prstGeom prst="ellipse">
+            <a:avLst/>
+          </a:prstGeom>
+          <a:solidFill>
+            <a:srgbClr val="8A5CF6"/>
+          </a:solidFill>
+          <a:ln/>
+        </p:spPr>
+      </p:sp>
+      <p:pic>
+        <p:nvPicPr>
+          <p:cNvPr id="20" name="Toque D4 ícone" descr="preencoded.png">    </p:cNvPr>
+          <p:cNvPicPr>
+            <a:picLocks noChangeAspect="1"/>
+          </p:cNvPicPr>
+          <p:nvPr/>
+        </p:nvPicPr>
+        <p:blipFill>
+          <a:blip r:embed="rId4"/>
+          <a:stretch>
+            <a:fillRect/>
+          </a:stretch>
+        </p:blipFill>
+        <p:spPr>
+          <a:xfrm>
+            <a:off x="5943600" y="2217420"/>
+            <a:ext cx="320040" cy="320040"/>
+          </a:xfrm>
+          <a:prstGeom prst="rect">
+            <a:avLst/>
+          </a:prstGeom>
+        </p:spPr>
+      </p:pic>
+      <p:sp>
+        <p:nvSpPr>
+          <p:cNvPr id="21" name="Toque dia 4"/>
+          <p:cNvSpPr txBox="1"/>
+          <p:nvPr/>
+        </p:nvSpPr>
+        <p:spPr>
+          <a:xfrm>
+            <a:off x="5349240" y="2834640"/>
+            <a:ext cx="1508760" cy="457200"/>
+          </a:xfrm>
+          <a:prstGeom prst="rect">
+            <a:avLst/>
+          </a:prstGeom>
+          <a:noFill/>
+          <a:ln/>
+        </p:spPr>
+        <p:txBody>
+          <a:bodyPr wrap="square" lIns="0" tIns="0" rIns="0" bIns="0" rtlCol="0" anchor="t"/>
+          <a:lstStyle/>
+          <a:p>
+            <a:pPr algn="ctr" indent="0" marL="0">
+              <a:buNone/>
+            </a:pPr>
+            <a:r>
+              <a:rPr lang="en-US" sz="2200" b="1" dirty="0">
+                <a:solidFill>
+                  <a:schemeClr val="accent1"/>
+                </a:solidFill>
+              </a:rPr>
+              <a:t>D4</a:t>
+            </a:r>
+            <a:endParaRPr lang="en-US" sz="2200" dirty="0"/>
+          </a:p>
+        </p:txBody>
+      </p:sp>
+      <p:sp>
+        <p:nvSpPr>
+          <p:cNvPr id="22" name="Toque canal 4"/>
+          <p:cNvSpPr txBox="1"/>
+          <p:nvPr/>
+        </p:nvSpPr>
+        <p:spPr>
+          <a:xfrm>
+            <a:off x="5349240" y="3337560"/>
+            <a:ext cx="1508760" cy="548640"/>
+          </a:xfrm>
+          <a:prstGeom prst="rect">
+            <a:avLst/>
+          </a:prstGeom>
+          <a:noFill/>
+          <a:ln/>
+        </p:spPr>
+        <p:txBody>
+          <a:bodyPr wrap="square" lIns="0" tIns="0" rIns="0" bIns="0" rtlCol="0" anchor="t"/>
+          <a:lstStyle/>
+          <a:p>
+            <a:pPr algn="ctr" indent="0" marL="0">
+              <a:buNone/>
+            </a:pPr>
+            <a:r>
+              <a:rPr lang="en-US" sz="1400" b="1" dirty="0">
+                <a:solidFill>
+                  <a:schemeClr val="tx1"/>
+                </a:solidFill>
+              </a:rPr>
+              <a:t>E-mail</a:t>
+            </a:r>
+            <a:endParaRPr lang="en-US" sz="1400" dirty="0"/>
+          </a:p>
+        </p:txBody>
+      </p:sp>
+      <p:sp>
+        <p:nvSpPr>
+          <p:cNvPr id="23" name="Toque ação 4"/>
+          <p:cNvSpPr txBox="1"/>
+          <p:nvPr/>
+        </p:nvSpPr>
+        <p:spPr>
+          <a:xfrm>
+            <a:off x="5349240" y="3931920"/>
+            <a:ext cx="1508760" cy="822960"/>
+          </a:xfrm>
+          <a:prstGeom prst="rect">
+            <a:avLst/>
+          </a:prstGeom>
+          <a:noFill/>
+          <a:ln/>
+        </p:spPr>
+        <p:txBody>
+          <a:bodyPr wrap="square" lIns="0" tIns="0" rIns="0" bIns="0" rtlCol="0" anchor="t"/>
+          <a:lstStyle/>
+          <a:p>
+            <a:pPr algn="ctr" indent="0" marL="0">
+              <a:buNone/>
+            </a:pPr>
+            <a:r>
+              <a:rPr lang="en-US" sz="1300" dirty="0">
+                <a:solidFill>
+                  <a:schemeClr val="tx2"/>
+                </a:solidFill>
+              </a:rPr>
+              <a:t>Case ou antes/depois</a:t>
+            </a:r>
+            <a:endParaRPr lang="en-US" sz="1300" dirty="0"/>
+          </a:p>
+        </p:txBody>
+      </p:sp>
+      <p:sp>
+        <p:nvSpPr>
+          <p:cNvPr id="24" name="Toque D6 círculo"/>
+          <p:cNvSpPr/>
+          <p:nvPr/>
+        </p:nvSpPr>
+        <p:spPr>
+          <a:xfrm>
+            <a:off x="7383780" y="2057400"/>
+            <a:ext cx="640080" cy="640080"/>
+          </a:xfrm>
+          <a:prstGeom prst="ellipse">
+            <a:avLst/>
+          </a:prstGeom>
+          <a:solidFill>
+            <a:srgbClr val="B43CF8"/>
+          </a:solidFill>
+          <a:ln/>
+        </p:spPr>
+      </p:sp>
+      <p:pic>
+        <p:nvPicPr>
+          <p:cNvPr id="25" name="Toque D6 ícone" descr="preencoded.png">    </p:cNvPr>
+          <p:cNvPicPr>
+            <a:picLocks noChangeAspect="1"/>
+          </p:cNvPicPr>
+          <p:nvPr/>
+        </p:nvPicPr>
+        <p:blipFill>
+          <a:blip r:embed="rId5"/>
+          <a:stretch>
+            <a:fillRect/>
+          </a:stretch>
+        </p:blipFill>
+        <p:spPr>
+          <a:xfrm>
+            <a:off x="7543800" y="2217420"/>
+            <a:ext cx="320040" cy="320040"/>
+          </a:xfrm>
+          <a:prstGeom prst="rect">
+            <a:avLst/>
+          </a:prstGeom>
+        </p:spPr>
+      </p:pic>
+      <p:sp>
+        <p:nvSpPr>
+          <p:cNvPr id="26" name="Toque dia 5"/>
+          <p:cNvSpPr txBox="1"/>
+          <p:nvPr/>
+        </p:nvSpPr>
+        <p:spPr>
+          <a:xfrm>
+            <a:off x="6949440" y="2834640"/>
+            <a:ext cx="1508760" cy="457200"/>
+          </a:xfrm>
+          <a:prstGeom prst="rect">
+            <a:avLst/>
+          </a:prstGeom>
+          <a:noFill/>
+          <a:ln/>
+        </p:spPr>
+        <p:txBody>
+          <a:bodyPr wrap="square" lIns="0" tIns="0" rIns="0" bIns="0" rtlCol="0" anchor="t"/>
+          <a:lstStyle/>
+          <a:p>
+            <a:pPr algn="ctr" indent="0" marL="0">
+              <a:buNone/>
+            </a:pPr>
+            <a:r>
+              <a:rPr lang="en-US" sz="2200" b="1" dirty="0">
+                <a:solidFill>
+                  <a:schemeClr val="accent1"/>
+                </a:solidFill>
+              </a:rPr>
+              <a:t>D6</a:t>
+            </a:r>
+            <a:endParaRPr lang="en-US" sz="2200" dirty="0"/>
+          </a:p>
+        </p:txBody>
+      </p:sp>
+      <p:sp>
+        <p:nvSpPr>
+          <p:cNvPr id="27" name="Toque canal 5"/>
+          <p:cNvSpPr txBox="1"/>
+          <p:nvPr/>
+        </p:nvSpPr>
+        <p:spPr>
+          <a:xfrm>
+            <a:off x="6949440" y="3337560"/>
+            <a:ext cx="1508760" cy="548640"/>
+          </a:xfrm>
+          <a:prstGeom prst="rect">
+            <a:avLst/>
+          </a:prstGeom>
+          <a:noFill/>
+          <a:ln/>
+        </p:spPr>
+        <p:txBody>
+          <a:bodyPr wrap="square" lIns="0" tIns="0" rIns="0" bIns="0" rtlCol="0" anchor="t"/>
+          <a:lstStyle/>
+          <a:p>
+            <a:pPr algn="ctr" indent="0" marL="0">
+              <a:buNone/>
+            </a:pPr>
+            <a:r>
+              <a:rPr lang="en-US" sz="1400" b="1" dirty="0">
+                <a:solidFill>
+                  <a:schemeClr val="tx1"/>
+                </a:solidFill>
+              </a:rPr>
+              <a:t>Ligação</a:t>
+            </a:r>
+            <a:endParaRPr lang="en-US" sz="1400" dirty="0"/>
+          </a:p>
+        </p:txBody>
+      </p:sp>
+      <p:sp>
+        <p:nvSpPr>
+          <p:cNvPr id="28" name="Toque ação 5"/>
+          <p:cNvSpPr txBox="1"/>
+          <p:nvPr/>
+        </p:nvSpPr>
+        <p:spPr>
+          <a:xfrm>
+            <a:off x="6949440" y="3931920"/>
+            <a:ext cx="1508760" cy="822960"/>
+          </a:xfrm>
+          <a:prstGeom prst="rect">
+            <a:avLst/>
+          </a:prstGeom>
+          <a:noFill/>
+          <a:ln/>
+        </p:spPr>
+        <p:txBody>
+          <a:bodyPr wrap="square" lIns="0" tIns="0" rIns="0" bIns="0" rtlCol="0" anchor="t"/>
+          <a:lstStyle/>
+          <a:p>
+            <a:pPr algn="ctr" indent="0" marL="0">
+              <a:buNone/>
+            </a:pPr>
+            <a:r>
+              <a:rPr lang="en-US" sz="1300" dirty="0">
+                <a:solidFill>
+                  <a:schemeClr val="tx2"/>
+                </a:solidFill>
+              </a:rPr>
+              <a:t>Citar o e-mail</a:t>
+            </a:r>
+            <a:endParaRPr lang="en-US" sz="1300" dirty="0"/>
+          </a:p>
+        </p:txBody>
+      </p:sp>
+      <p:sp>
+        <p:nvSpPr>
+          <p:cNvPr id="29" name="Toque D8 círculo"/>
+          <p:cNvSpPr/>
+          <p:nvPr/>
+        </p:nvSpPr>
+        <p:spPr>
+          <a:xfrm>
+            <a:off x="8983980" y="2057400"/>
+            <a:ext cx="640080" cy="640080"/>
+          </a:xfrm>
+          <a:prstGeom prst="ellipse">
+            <a:avLst/>
+          </a:prstGeom>
+          <a:solidFill>
+            <a:srgbClr val="E011FF"/>
+          </a:solidFill>
+          <a:ln/>
+        </p:spPr>
+      </p:sp>
+      <p:pic>
+        <p:nvPicPr>
+          <p:cNvPr id="30" name="Toque D8 ícone" descr="preencoded.png">    </p:cNvPr>
+          <p:cNvPicPr>
+            <a:picLocks noChangeAspect="1"/>
+          </p:cNvPicPr>
+          <p:nvPr/>
+        </p:nvPicPr>
+        <p:blipFill>
+          <a:blip r:embed="rId6"/>
+          <a:stretch>
+            <a:fillRect/>
+          </a:stretch>
+        </p:blipFill>
+        <p:spPr>
+          <a:xfrm>
+            <a:off x="9144000" y="2217420"/>
+            <a:ext cx="320040" cy="320040"/>
+          </a:xfrm>
+          <a:prstGeom prst="rect">
+            <a:avLst/>
+          </a:prstGeom>
+        </p:spPr>
+      </p:pic>
+      <p:sp>
+        <p:nvSpPr>
+          <p:cNvPr id="31" name="Toque dia 6"/>
+          <p:cNvSpPr txBox="1"/>
+          <p:nvPr/>
+        </p:nvSpPr>
+        <p:spPr>
+          <a:xfrm>
+            <a:off x="8549640" y="2834640"/>
+            <a:ext cx="1508760" cy="457200"/>
+          </a:xfrm>
+          <a:prstGeom prst="rect">
+            <a:avLst/>
+          </a:prstGeom>
+          <a:noFill/>
+          <a:ln/>
+        </p:spPr>
+        <p:txBody>
+          <a:bodyPr wrap="square" lIns="0" tIns="0" rIns="0" bIns="0" rtlCol="0" anchor="t"/>
+          <a:lstStyle/>
+          <a:p>
+            <a:pPr algn="ctr" indent="0" marL="0">
+              <a:buNone/>
+            </a:pPr>
+            <a:r>
+              <a:rPr lang="en-US" sz="2200" b="1" dirty="0">
+                <a:solidFill>
+                  <a:schemeClr val="accent1"/>
+                </a:solidFill>
+              </a:rPr>
+              <a:t>D8</a:t>
+            </a:r>
+            <a:endParaRPr lang="en-US" sz="2200" dirty="0"/>
+          </a:p>
+        </p:txBody>
+      </p:sp>
+      <p:sp>
+        <p:nvSpPr>
+          <p:cNvPr id="32" name="Toque canal 6"/>
+          <p:cNvSpPr txBox="1"/>
+          <p:nvPr/>
+        </p:nvSpPr>
+        <p:spPr>
+          <a:xfrm>
+            <a:off x="8549640" y="3337560"/>
+            <a:ext cx="1508760" cy="548640"/>
+          </a:xfrm>
+          <a:prstGeom prst="rect">
+            <a:avLst/>
+          </a:prstGeom>
+          <a:noFill/>
+          <a:ln/>
+        </p:spPr>
+        <p:txBody>
+          <a:bodyPr wrap="square" lIns="0" tIns="0" rIns="0" bIns="0" rtlCol="0" anchor="t"/>
+          <a:lstStyle/>
+          <a:p>
+            <a:pPr algn="ctr" indent="0" marL="0">
+              <a:buNone/>
+            </a:pPr>
+            <a:r>
+              <a:rPr lang="en-US" sz="1400" b="1" dirty="0">
+                <a:solidFill>
+                  <a:schemeClr val="tx1"/>
+                </a:solidFill>
+              </a:rPr>
+              <a:t>Áudio ou vídeo</a:t>
+            </a:r>
+            <a:endParaRPr lang="en-US" sz="1400" dirty="0"/>
+          </a:p>
+        </p:txBody>
+      </p:sp>
+      <p:sp>
+        <p:nvSpPr>
+          <p:cNvPr id="33" name="Toque ação 6"/>
+          <p:cNvSpPr txBox="1"/>
+          <p:nvPr/>
+        </p:nvSpPr>
+        <p:spPr>
+          <a:xfrm>
+            <a:off x="8549640" y="3931920"/>
+            <a:ext cx="1508760" cy="822960"/>
+          </a:xfrm>
+          <a:prstGeom prst="rect">
+            <a:avLst/>
+          </a:prstGeom>
+          <a:noFill/>
+          <a:ln/>
+        </p:spPr>
+        <p:txBody>
+          <a:bodyPr wrap="square" lIns="0" tIns="0" rIns="0" bIns="0" rtlCol="0" anchor="t"/>
+          <a:lstStyle/>
+          <a:p>
+            <a:pPr algn="ctr" indent="0" marL="0">
+              <a:buNone/>
+            </a:pPr>
+            <a:r>
+              <a:rPr lang="en-US" sz="1300" dirty="0">
+                <a:solidFill>
+                  <a:schemeClr val="tx2"/>
+                </a:solidFill>
+              </a:rPr>
+              <a:t>Ideia para o espaço</a:t>
+            </a:r>
+            <a:endParaRPr lang="en-US" sz="1300" dirty="0"/>
+          </a:p>
+        </p:txBody>
+      </p:sp>
+      <p:sp>
+        <p:nvSpPr>
+          <p:cNvPr id="34" name="Toque D10 círculo"/>
+          <p:cNvSpPr/>
+          <p:nvPr/>
+        </p:nvSpPr>
+        <p:spPr>
+          <a:xfrm>
+            <a:off x="10584180" y="2057400"/>
+            <a:ext cx="640080" cy="640080"/>
+          </a:xfrm>
+          <a:prstGeom prst="ellipse">
+            <a:avLst/>
+          </a:prstGeom>
+          <a:solidFill>
+            <a:srgbClr val="5F5F5F"/>
+          </a:solidFill>
+          <a:ln/>
+        </p:spPr>
+      </p:sp>
+      <p:pic>
+        <p:nvPicPr>
+          <p:cNvPr id="35" name="Toque D10 ícone" descr="preencoded.png">    </p:cNvPr>
+          <p:cNvPicPr>
+            <a:picLocks noChangeAspect="1"/>
+          </p:cNvPicPr>
+          <p:nvPr/>
+        </p:nvPicPr>
+        <p:blipFill>
+          <a:blip r:embed="rId7"/>
+          <a:stretch>
+            <a:fillRect/>
+          </a:stretch>
+        </p:blipFill>
+        <p:spPr>
+          <a:xfrm>
+            <a:off x="10744200" y="2217420"/>
+            <a:ext cx="320040" cy="320040"/>
+          </a:xfrm>
+          <a:prstGeom prst="rect">
+            <a:avLst/>
+          </a:prstGeom>
+        </p:spPr>
+      </p:pic>
+      <p:sp>
+        <p:nvSpPr>
+          <p:cNvPr id="36" name="Toque dia 7"/>
+          <p:cNvSpPr txBox="1"/>
+          <p:nvPr/>
+        </p:nvSpPr>
+        <p:spPr>
+          <a:xfrm>
+            <a:off x="10149840" y="2834640"/>
+            <a:ext cx="1508760" cy="457200"/>
+          </a:xfrm>
+          <a:prstGeom prst="rect">
+            <a:avLst/>
+          </a:prstGeom>
+          <a:noFill/>
+          <a:ln/>
+        </p:spPr>
+        <p:txBody>
+          <a:bodyPr wrap="square" lIns="0" tIns="0" rIns="0" bIns="0" rtlCol="0" anchor="t"/>
+          <a:lstStyle/>
+          <a:p>
+            <a:pPr algn="ctr" indent="0" marL="0">
+              <a:buNone/>
+            </a:pPr>
+            <a:r>
+              <a:rPr lang="en-US" sz="2200" b="1" dirty="0">
+                <a:solidFill>
+                  <a:schemeClr val="accent1"/>
+                </a:solidFill>
+              </a:rPr>
+              <a:t>D10</a:t>
+            </a:r>
+            <a:endParaRPr lang="en-US" sz="2200" dirty="0"/>
+          </a:p>
+        </p:txBody>
+      </p:sp>
+      <p:sp>
+        <p:nvSpPr>
+          <p:cNvPr id="37" name="Toque canal 7"/>
+          <p:cNvSpPr txBox="1"/>
+          <p:nvPr/>
+        </p:nvSpPr>
+        <p:spPr>
+          <a:xfrm>
+            <a:off x="10149840" y="3337560"/>
+            <a:ext cx="1508760" cy="548640"/>
+          </a:xfrm>
+          <a:prstGeom prst="rect">
+            <a:avLst/>
+          </a:prstGeom>
+          <a:noFill/>
+          <a:ln/>
+        </p:spPr>
+        <p:txBody>
+          <a:bodyPr wrap="square" lIns="0" tIns="0" rIns="0" bIns="0" rtlCol="0" anchor="t"/>
+          <a:lstStyle/>
+          <a:p>
+            <a:pPr algn="ctr" indent="0" marL="0">
+              <a:buNone/>
+            </a:pPr>
+            <a:r>
+              <a:rPr lang="en-US" sz="1400" b="1" dirty="0">
+                <a:solidFill>
+                  <a:schemeClr val="tx1"/>
+                </a:solidFill>
+              </a:rPr>
+              <a:t>Encerramento</a:t>
+            </a:r>
+            <a:endParaRPr lang="en-US" sz="1400" dirty="0"/>
+          </a:p>
+        </p:txBody>
+      </p:sp>
+      <p:sp>
+        <p:nvSpPr>
+          <p:cNvPr id="38" name="Toque ação 7"/>
+          <p:cNvSpPr txBox="1"/>
+          <p:nvPr/>
+        </p:nvSpPr>
+        <p:spPr>
+          <a:xfrm>
+            <a:off x="10149840" y="3931920"/>
+            <a:ext cx="1508760" cy="822960"/>
+          </a:xfrm>
+          <a:prstGeom prst="rect">
+            <a:avLst/>
+          </a:prstGeom>
+          <a:noFill/>
+          <a:ln/>
+        </p:spPr>
+        <p:txBody>
+          <a:bodyPr wrap="square" lIns="0" tIns="0" rIns="0" bIns="0" rtlCol="0" anchor="t"/>
+          <a:lstStyle/>
+          <a:p>
+            <a:pPr algn="ctr" indent="0" marL="0">
+              <a:buNone/>
+            </a:pPr>
+            <a:r>
+              <a:rPr lang="en-US" sz="1300" dirty="0">
+                <a:solidFill>
+                  <a:schemeClr val="tx2"/>
+                </a:solidFill>
+              </a:rPr>
+              <a:t>"Encerro ou volto em [mês]?"</a:t>
+            </a:r>
+            <a:endParaRPr lang="en-US" sz="1300" dirty="0"/>
+          </a:p>
+        </p:txBody>
+      </p:sp>
+      <p:sp>
+        <p:nvSpPr>
+          <p:cNvPr id="39" name="Faixa cadência"/>
+          <p:cNvSpPr/>
+          <p:nvPr/>
+        </p:nvSpPr>
+        <p:spPr>
+          <a:xfrm>
+            <a:off x="548640" y="5029200"/>
+            <a:ext cx="11064240" cy="1005840"/>
           </a:xfrm>
           <a:prstGeom prst="roundRect">
             <a:avLst>
-              <a:gd name="adj" fmla="val 8276"/>
+              <a:gd name="adj" fmla="val 10909"/>
             </a:avLst>
           </a:prstGeom>
           <a:solidFill>
@@ -4201,23 +4666,23 @@
       </p:sp>
       <p:sp>
         <p:nvSpPr>
-          <p:cNvPr id="4" name="Objeção frase 1"/>
-          <p:cNvSpPr txBox="1"/>
-          <p:nvPr/>
-        </p:nvSpPr>
-        <p:spPr>
-          <a:xfrm>
-            <a:off x="822960" y="1645920"/>
-            <a:ext cx="4937760" cy="411480"/>
-          </a:xfrm>
-          <a:prstGeom prst="rect">
-            <a:avLst/>
-          </a:prstGeom>
-          <a:noFill/>
-          <a:ln/>
-        </p:spPr>
-        <p:txBody>
-          <a:bodyPr wrap="square" lIns="0" tIns="0" rIns="0" bIns="0" rtlCol="0" anchor="t"/>
+          <p:cNvPr id="40" name="Regra cadência"/>
+          <p:cNvSpPr txBox="1"/>
+          <p:nvPr/>
+        </p:nvSpPr>
+        <p:spPr>
+          <a:xfrm>
+            <a:off x="868680" y="5029200"/>
+            <a:ext cx="10424160" cy="1005840"/>
+          </a:xfrm>
+          <a:prstGeom prst="rect">
+            <a:avLst/>
+          </a:prstGeom>
+          <a:noFill/>
+          <a:ln/>
+        </p:spPr>
+        <p:txBody>
+          <a:bodyPr wrap="square" lIns="0" tIns="0" rIns="0" bIns="0" rtlCol="0" anchor="ctr"/>
           <a:lstStyle/>
           <a:p>
             <a:pPr indent="0" marL="0">
@@ -4229,551 +4694,20 @@
                   <a:schemeClr val="accent4"/>
                 </a:solidFill>
               </a:rPr>
-              <a:t>"Só quero o preço."</a:t>
+              <a:t>Cada toque traz algo novo. </a:t>
+            </a:r>
+            <a:pPr indent="0" marL="0">
+              <a:buNone/>
+            </a:pPr>
+            <a:r>
+              <a:rPr lang="en-US" sz="1600" dirty="0">
+                <a:solidFill>
+                  <a:schemeClr val="tx1"/>
+                </a:solidFill>
+              </a:rPr>
+              <a:t>Nunca "só passando para saber". Respondeu? Volta para a qualificação. Sem resposta no D10? Nutrição com motivo.</a:t>
             </a:r>
             <a:endParaRPr lang="en-US" sz="1600" dirty="0"/>
-          </a:p>
-        </p:txBody>
-      </p:sp>
-      <p:sp>
-        <p:nvSpPr>
-          <p:cNvPr id="5" name="Objeção resposta 1"/>
-          <p:cNvSpPr txBox="1"/>
-          <p:nvPr/>
-        </p:nvSpPr>
-        <p:spPr>
-          <a:xfrm>
-            <a:off x="822960" y="2075688"/>
-            <a:ext cx="4937760" cy="685800"/>
-          </a:xfrm>
-          <a:prstGeom prst="rect">
-            <a:avLst/>
-          </a:prstGeom>
-          <a:noFill/>
-          <a:ln/>
-        </p:spPr>
-        <p:txBody>
-          <a:bodyPr wrap="square" lIns="0" tIns="0" rIns="0" bIns="0" rtlCol="0" anchor="t"/>
-          <a:lstStyle/>
-          <a:p>
-            <a:pPr indent="0" marL="0">
-              <a:buNone/>
-            </a:pPr>
-            <a:r>
-              <a:rPr lang="en-US" sz="1400" dirty="0">
-                <a:solidFill>
-                  <a:schemeClr val="tx1"/>
-                </a:solidFill>
-              </a:rPr>
-              <a:t>O valor muda com tamanho, local e modelo. Com 3 perguntas te passo ao especialista para uma proposta certa.</a:t>
-            </a:r>
-            <a:endParaRPr lang="en-US" sz="1400" dirty="0"/>
-          </a:p>
-        </p:txBody>
-      </p:sp>
-      <p:sp>
-        <p:nvSpPr>
-          <p:cNvPr id="6" name="Objeção 2"/>
-          <p:cNvSpPr/>
-          <p:nvPr/>
-        </p:nvSpPr>
-        <p:spPr>
-          <a:xfrm>
-            <a:off x="6172200" y="1508760"/>
-            <a:ext cx="5440680" cy="1325880"/>
-          </a:xfrm>
-          <a:prstGeom prst="roundRect">
-            <a:avLst>
-              <a:gd name="adj" fmla="val 8276"/>
-            </a:avLst>
-          </a:prstGeom>
-          <a:solidFill>
-            <a:schemeClr val="bg2"/>
-          </a:solidFill>
-          <a:ln/>
-        </p:spPr>
-      </p:sp>
-      <p:sp>
-        <p:nvSpPr>
-          <p:cNvPr id="7" name="Objeção frase 2"/>
-          <p:cNvSpPr txBox="1"/>
-          <p:nvPr/>
-        </p:nvSpPr>
-        <p:spPr>
-          <a:xfrm>
-            <a:off x="6446520" y="1645920"/>
-            <a:ext cx="4937760" cy="411480"/>
-          </a:xfrm>
-          <a:prstGeom prst="rect">
-            <a:avLst/>
-          </a:prstGeom>
-          <a:noFill/>
-          <a:ln/>
-        </p:spPr>
-        <p:txBody>
-          <a:bodyPr wrap="square" lIns="0" tIns="0" rIns="0" bIns="0" rtlCol="0" anchor="t"/>
-          <a:lstStyle/>
-          <a:p>
-            <a:pPr indent="0" marL="0">
-              <a:buNone/>
-            </a:pPr>
-            <a:r>
-              <a:rPr lang="en-US" sz="1600" b="1" dirty="0">
-                <a:solidFill>
-                  <a:schemeClr val="accent4"/>
-                </a:solidFill>
-              </a:rPr>
-              <a:t>"Me manda por WhatsApp."</a:t>
-            </a:r>
-            <a:endParaRPr lang="en-US" sz="1600" dirty="0"/>
-          </a:p>
-        </p:txBody>
-      </p:sp>
-      <p:sp>
-        <p:nvSpPr>
-          <p:cNvPr id="8" name="Objeção resposta 2"/>
-          <p:cNvSpPr txBox="1"/>
-          <p:nvPr/>
-        </p:nvSpPr>
-        <p:spPr>
-          <a:xfrm>
-            <a:off x="6446520" y="2075688"/>
-            <a:ext cx="4937760" cy="685800"/>
-          </a:xfrm>
-          <a:prstGeom prst="rect">
-            <a:avLst/>
-          </a:prstGeom>
-          <a:noFill/>
-          <a:ln/>
-        </p:spPr>
-        <p:txBody>
-          <a:bodyPr wrap="square" lIns="0" tIns="0" rIns="0" bIns="0" rtlCol="0" anchor="t"/>
-          <a:lstStyle/>
-          <a:p>
-            <a:pPr indent="0" marL="0">
-              <a:buNone/>
-            </a:pPr>
-            <a:r>
-              <a:rPr lang="en-US" sz="1400" dirty="0">
-                <a:solidFill>
-                  <a:schemeClr val="tx1"/>
-                </a:solidFill>
-              </a:rPr>
-              <a:t>Mando sim. Para não ser genérico: é para qual espaço e qual o tamanho?</a:t>
-            </a:r>
-            <a:endParaRPr lang="en-US" sz="1400" dirty="0"/>
-          </a:p>
-        </p:txBody>
-      </p:sp>
-      <p:sp>
-        <p:nvSpPr>
-          <p:cNvPr id="9" name="Objeção 3"/>
-          <p:cNvSpPr/>
-          <p:nvPr/>
-        </p:nvSpPr>
-        <p:spPr>
-          <a:xfrm>
-            <a:off x="548640" y="2971800"/>
-            <a:ext cx="5440680" cy="1325880"/>
-          </a:xfrm>
-          <a:prstGeom prst="roundRect">
-            <a:avLst>
-              <a:gd name="adj" fmla="val 8276"/>
-            </a:avLst>
-          </a:prstGeom>
-          <a:solidFill>
-            <a:schemeClr val="bg2"/>
-          </a:solidFill>
-          <a:ln/>
-        </p:spPr>
-      </p:sp>
-      <p:sp>
-        <p:nvSpPr>
-          <p:cNvPr id="10" name="Objeção frase 3"/>
-          <p:cNvSpPr txBox="1"/>
-          <p:nvPr/>
-        </p:nvSpPr>
-        <p:spPr>
-          <a:xfrm>
-            <a:off x="822960" y="3108960"/>
-            <a:ext cx="4937760" cy="411480"/>
-          </a:xfrm>
-          <a:prstGeom prst="rect">
-            <a:avLst/>
-          </a:prstGeom>
-          <a:noFill/>
-          <a:ln/>
-        </p:spPr>
-        <p:txBody>
-          <a:bodyPr wrap="square" lIns="0" tIns="0" rIns="0" bIns="0" rtlCol="0" anchor="t"/>
-          <a:lstStyle/>
-          <a:p>
-            <a:pPr indent="0" marL="0">
-              <a:buNone/>
-            </a:pPr>
-            <a:r>
-              <a:rPr lang="en-US" sz="1600" b="1" dirty="0">
-                <a:solidFill>
-                  <a:schemeClr val="accent4"/>
-                </a:solidFill>
-              </a:rPr>
-              <a:t>"Estou só pesquisando."</a:t>
-            </a:r>
-            <a:endParaRPr lang="en-US" sz="1600" dirty="0"/>
-          </a:p>
-        </p:txBody>
-      </p:sp>
-      <p:sp>
-        <p:nvSpPr>
-          <p:cNvPr id="11" name="Objeção resposta 3"/>
-          <p:cNvSpPr txBox="1"/>
-          <p:nvPr/>
-        </p:nvSpPr>
-        <p:spPr>
-          <a:xfrm>
-            <a:off x="822960" y="3538728"/>
-            <a:ext cx="4937760" cy="685800"/>
-          </a:xfrm>
-          <a:prstGeom prst="rect">
-            <a:avLst/>
-          </a:prstGeom>
-          <a:noFill/>
-          <a:ln/>
-        </p:spPr>
-        <p:txBody>
-          <a:bodyPr wrap="square" lIns="0" tIns="0" rIns="0" bIns="0" rtlCol="0" anchor="t"/>
-          <a:lstStyle/>
-          <a:p>
-            <a:pPr indent="0" marL="0">
-              <a:buNone/>
-            </a:pPr>
-            <a:r>
-              <a:rPr lang="en-US" sz="1400" dirty="0">
-                <a:solidFill>
-                  <a:schemeClr val="tx1"/>
-                </a:solidFill>
-              </a:rPr>
-              <a:t>Ótimo momento para conversar. O que te fez começar a pesquisar agora?</a:t>
-            </a:r>
-            <a:endParaRPr lang="en-US" sz="1400" dirty="0"/>
-          </a:p>
-        </p:txBody>
-      </p:sp>
-      <p:sp>
-        <p:nvSpPr>
-          <p:cNvPr id="12" name="Objeção 4"/>
-          <p:cNvSpPr/>
-          <p:nvPr/>
-        </p:nvSpPr>
-        <p:spPr>
-          <a:xfrm>
-            <a:off x="6172200" y="2971800"/>
-            <a:ext cx="5440680" cy="1325880"/>
-          </a:xfrm>
-          <a:prstGeom prst="roundRect">
-            <a:avLst>
-              <a:gd name="adj" fmla="val 8276"/>
-            </a:avLst>
-          </a:prstGeom>
-          <a:solidFill>
-            <a:schemeClr val="bg2"/>
-          </a:solidFill>
-          <a:ln/>
-        </p:spPr>
-      </p:sp>
-      <p:sp>
-        <p:nvSpPr>
-          <p:cNvPr id="13" name="Objeção frase 4"/>
-          <p:cNvSpPr txBox="1"/>
-          <p:nvPr/>
-        </p:nvSpPr>
-        <p:spPr>
-          <a:xfrm>
-            <a:off x="6446520" y="3108960"/>
-            <a:ext cx="4937760" cy="411480"/>
-          </a:xfrm>
-          <a:prstGeom prst="rect">
-            <a:avLst/>
-          </a:prstGeom>
-          <a:noFill/>
-          <a:ln/>
-        </p:spPr>
-        <p:txBody>
-          <a:bodyPr wrap="square" lIns="0" tIns="0" rIns="0" bIns="0" rtlCol="0" anchor="t"/>
-          <a:lstStyle/>
-          <a:p>
-            <a:pPr indent="0" marL="0">
-              <a:buNone/>
-            </a:pPr>
-            <a:r>
-              <a:rPr lang="en-US" sz="1600" b="1" dirty="0">
-                <a:solidFill>
-                  <a:schemeClr val="accent4"/>
-                </a:solidFill>
-              </a:rPr>
-              <a:t>"Não sou eu que decido."</a:t>
-            </a:r>
-            <a:endParaRPr lang="en-US" sz="1600" dirty="0"/>
-          </a:p>
-        </p:txBody>
-      </p:sp>
-      <p:sp>
-        <p:nvSpPr>
-          <p:cNvPr id="14" name="Objeção resposta 4"/>
-          <p:cNvSpPr txBox="1"/>
-          <p:nvPr/>
-        </p:nvSpPr>
-        <p:spPr>
-          <a:xfrm>
-            <a:off x="6446520" y="3538728"/>
-            <a:ext cx="4937760" cy="685800"/>
-          </a:xfrm>
-          <a:prstGeom prst="rect">
-            <a:avLst/>
-          </a:prstGeom>
-          <a:noFill/>
-          <a:ln/>
-        </p:spPr>
-        <p:txBody>
-          <a:bodyPr wrap="square" lIns="0" tIns="0" rIns="0" bIns="0" rtlCol="0" anchor="t"/>
-          <a:lstStyle/>
-          <a:p>
-            <a:pPr indent="0" marL="0">
-              <a:buNone/>
-            </a:pPr>
-            <a:r>
-              <a:rPr lang="en-US" sz="1400" dirty="0">
-                <a:solidFill>
-                  <a:schemeClr val="tx1"/>
-                </a:solidFill>
-              </a:rPr>
-              <a:t>Sem problema. Quem decide? Marcamos uma conversa com vocês dois.</a:t>
-            </a:r>
-            <a:endParaRPr lang="en-US" sz="1400" dirty="0"/>
-          </a:p>
-        </p:txBody>
-      </p:sp>
-      <p:sp>
-        <p:nvSpPr>
-          <p:cNvPr id="15" name="Objeção 5"/>
-          <p:cNvSpPr/>
-          <p:nvPr/>
-        </p:nvSpPr>
-        <p:spPr>
-          <a:xfrm>
-            <a:off x="548640" y="4434840"/>
-            <a:ext cx="5440680" cy="1325880"/>
-          </a:xfrm>
-          <a:prstGeom prst="roundRect">
-            <a:avLst>
-              <a:gd name="adj" fmla="val 8276"/>
-            </a:avLst>
-          </a:prstGeom>
-          <a:solidFill>
-            <a:schemeClr val="bg2"/>
-          </a:solidFill>
-          <a:ln/>
-        </p:spPr>
-      </p:sp>
-      <p:sp>
-        <p:nvSpPr>
-          <p:cNvPr id="16" name="Objeção frase 5"/>
-          <p:cNvSpPr txBox="1"/>
-          <p:nvPr/>
-        </p:nvSpPr>
-        <p:spPr>
-          <a:xfrm>
-            <a:off x="822960" y="4572000"/>
-            <a:ext cx="4937760" cy="411480"/>
-          </a:xfrm>
-          <a:prstGeom prst="rect">
-            <a:avLst/>
-          </a:prstGeom>
-          <a:noFill/>
-          <a:ln/>
-        </p:spPr>
-        <p:txBody>
-          <a:bodyPr wrap="square" lIns="0" tIns="0" rIns="0" bIns="0" rtlCol="0" anchor="t"/>
-          <a:lstStyle/>
-          <a:p>
-            <a:pPr indent="0" marL="0">
-              <a:buNone/>
-            </a:pPr>
-            <a:r>
-              <a:rPr lang="en-US" sz="1600" b="1" dirty="0">
-                <a:solidFill>
-                  <a:schemeClr val="accent4"/>
-                </a:solidFill>
-              </a:rPr>
-              <a:t>"Já tenho fornecedor."</a:t>
-            </a:r>
-            <a:endParaRPr lang="en-US" sz="1600" dirty="0"/>
-          </a:p>
-        </p:txBody>
-      </p:sp>
-      <p:sp>
-        <p:nvSpPr>
-          <p:cNvPr id="17" name="Objeção resposta 5"/>
-          <p:cNvSpPr txBox="1"/>
-          <p:nvPr/>
-        </p:nvSpPr>
-        <p:spPr>
-          <a:xfrm>
-            <a:off x="822960" y="5001768"/>
-            <a:ext cx="4937760" cy="685800"/>
-          </a:xfrm>
-          <a:prstGeom prst="rect">
-            <a:avLst/>
-          </a:prstGeom>
-          <a:noFill/>
-          <a:ln/>
-        </p:spPr>
-        <p:txBody>
-          <a:bodyPr wrap="square" lIns="0" tIns="0" rIns="0" bIns="0" rtlCol="0" anchor="t"/>
-          <a:lstStyle/>
-          <a:p>
-            <a:pPr indent="0" marL="0">
-              <a:buNone/>
-            </a:pPr>
-            <a:r>
-              <a:rPr lang="en-US" sz="1400" dirty="0">
-                <a:solidFill>
-                  <a:schemeClr val="tx1"/>
-                </a:solidFill>
-              </a:rPr>
-              <a:t>Que bom. O que você melhoraria no atendimento de hoje?</a:t>
-            </a:r>
-            <a:endParaRPr lang="en-US" sz="1400" dirty="0"/>
-          </a:p>
-        </p:txBody>
-      </p:sp>
-      <p:sp>
-        <p:nvSpPr>
-          <p:cNvPr id="18" name="Objeção 6"/>
-          <p:cNvSpPr/>
-          <p:nvPr/>
-        </p:nvSpPr>
-        <p:spPr>
-          <a:xfrm>
-            <a:off x="6172200" y="4434840"/>
-            <a:ext cx="5440680" cy="1325880"/>
-          </a:xfrm>
-          <a:prstGeom prst="roundRect">
-            <a:avLst>
-              <a:gd name="adj" fmla="val 8276"/>
-            </a:avLst>
-          </a:prstGeom>
-          <a:solidFill>
-            <a:schemeClr val="bg2"/>
-          </a:solidFill>
-          <a:ln/>
-        </p:spPr>
-      </p:sp>
-      <p:sp>
-        <p:nvSpPr>
-          <p:cNvPr id="19" name="Objeção frase 6"/>
-          <p:cNvSpPr txBox="1"/>
-          <p:nvPr/>
-        </p:nvSpPr>
-        <p:spPr>
-          <a:xfrm>
-            <a:off x="6446520" y="4572000"/>
-            <a:ext cx="4937760" cy="411480"/>
-          </a:xfrm>
-          <a:prstGeom prst="rect">
-            <a:avLst/>
-          </a:prstGeom>
-          <a:noFill/>
-          <a:ln/>
-        </p:spPr>
-        <p:txBody>
-          <a:bodyPr wrap="square" lIns="0" tIns="0" rIns="0" bIns="0" rtlCol="0" anchor="t"/>
-          <a:lstStyle/>
-          <a:p>
-            <a:pPr indent="0" marL="0">
-              <a:buNone/>
-            </a:pPr>
-            <a:r>
-              <a:rPr lang="en-US" sz="1600" b="1" dirty="0">
-                <a:solidFill>
-                  <a:schemeClr val="accent4"/>
-                </a:solidFill>
-              </a:rPr>
-              <a:t>"Agora não é o momento."</a:t>
-            </a:r>
-            <a:endParaRPr lang="en-US" sz="1600" dirty="0"/>
-          </a:p>
-        </p:txBody>
-      </p:sp>
-      <p:sp>
-        <p:nvSpPr>
-          <p:cNvPr id="20" name="Objeção resposta 6"/>
-          <p:cNvSpPr txBox="1"/>
-          <p:nvPr/>
-        </p:nvSpPr>
-        <p:spPr>
-          <a:xfrm>
-            <a:off x="6446520" y="5001768"/>
-            <a:ext cx="4937760" cy="685800"/>
-          </a:xfrm>
-          <a:prstGeom prst="rect">
-            <a:avLst/>
-          </a:prstGeom>
-          <a:noFill/>
-          <a:ln/>
-        </p:spPr>
-        <p:txBody>
-          <a:bodyPr wrap="square" lIns="0" tIns="0" rIns="0" bIns="0" rtlCol="0" anchor="t"/>
-          <a:lstStyle/>
-          <a:p>
-            <a:pPr indent="0" marL="0">
-              <a:buNone/>
-            </a:pPr>
-            <a:r>
-              <a:rPr lang="en-US" sz="1400" dirty="0">
-                <a:solidFill>
-                  <a:schemeClr val="tx1"/>
-                </a:solidFill>
-              </a:rPr>
-              <a:t>Quando seria? Anoto aqui e te chamo na data.</a:t>
-            </a:r>
-            <a:endParaRPr lang="en-US" sz="1400" dirty="0"/>
-          </a:p>
-        </p:txBody>
-      </p:sp>
-      <p:sp>
-        <p:nvSpPr>
-          <p:cNvPr id="21" name="Método objeções"/>
-          <p:cNvSpPr txBox="1"/>
-          <p:nvPr/>
-        </p:nvSpPr>
-        <p:spPr>
-          <a:xfrm>
-            <a:off x="548640" y="5943600"/>
-            <a:ext cx="11064240" cy="320040"/>
-          </a:xfrm>
-          <a:prstGeom prst="rect">
-            <a:avLst/>
-          </a:prstGeom>
-          <a:noFill/>
-          <a:ln/>
-        </p:spPr>
-        <p:txBody>
-          <a:bodyPr wrap="square" lIns="0" tIns="0" rIns="0" bIns="0" rtlCol="0" anchor="t"/>
-          <a:lstStyle/>
-          <a:p>
-            <a:pPr indent="0" marL="0">
-              <a:buNone/>
-            </a:pPr>
-            <a:r>
-              <a:rPr lang="en-US" sz="1300" dirty="0">
-                <a:solidFill>
-                  <a:schemeClr val="tx2"/>
-                </a:solidFill>
-              </a:rPr>
-              <a:t>Acolha, pergunte o motivo e leve ao próximo passo. Preço, crédito e contrato ficam com o executivo.</a:t>
-            </a:r>
-            <a:endParaRPr lang="en-US" sz="1300" dirty="0"/>
           </a:p>
         </p:txBody>
       </p:sp>
@@ -4879,7 +4813,7 @@
                   <a:schemeClr val="tx1"/>
                 </a:solidFill>
               </a:rPr>
-              <a:t>Etapas 6 e 7: ninguém fica sem status</a:t>
+              <a:t>Objeções na etapa de SDR</a:t>
             </a:r>
             <a:endParaRPr lang="en-US" sz="3200" dirty="0"/>
           </a:p>
@@ -4887,54 +4821,18 @@
       </p:sp>
       <p:sp>
         <p:nvSpPr>
-          <p:cNvPr id="3" name="Saídas título"/>
-          <p:cNvSpPr txBox="1"/>
-          <p:nvPr/>
-        </p:nvSpPr>
-        <p:spPr>
-          <a:xfrm>
-            <a:off x="548640" y="1554480"/>
-            <a:ext cx="5486400" cy="411480"/>
-          </a:xfrm>
-          <a:prstGeom prst="rect">
-            <a:avLst/>
-          </a:prstGeom>
-          <a:noFill/>
-          <a:ln/>
-        </p:spPr>
-        <p:txBody>
-          <a:bodyPr wrap="square" lIns="0" tIns="0" rIns="0" bIns="0" rtlCol="0" anchor="t"/>
-          <a:lstStyle/>
-          <a:p>
-            <a:pPr indent="0" marL="0">
-              <a:buNone/>
-            </a:pPr>
-            <a:r>
-              <a:rPr lang="en-US" sz="2000" b="1" dirty="0">
-                <a:solidFill>
-                  <a:schemeClr val="accent1"/>
-                </a:solidFill>
-              </a:rPr>
-              <a:t>Saídas da fila</a:t>
-            </a:r>
-            <a:endParaRPr lang="en-US" sz="2000" dirty="0"/>
-          </a:p>
-        </p:txBody>
-      </p:sp>
-      <p:sp>
-        <p:nvSpPr>
-          <p:cNvPr id="4" name="Saída 1"/>
+          <p:cNvPr id="3" name="Objeção 1"/>
           <p:cNvSpPr/>
           <p:nvPr/>
         </p:nvSpPr>
         <p:spPr>
           <a:xfrm>
-            <a:off x="548640" y="2103120"/>
-            <a:ext cx="5394960" cy="822960"/>
+            <a:off x="548640" y="1508760"/>
+            <a:ext cx="5440680" cy="1325880"/>
           </a:xfrm>
           <a:prstGeom prst="roundRect">
             <a:avLst>
-              <a:gd name="adj" fmla="val 13333"/>
+              <a:gd name="adj" fmla="val 8276"/>
             </a:avLst>
           </a:prstGeom>
           <a:solidFill>
@@ -4945,14 +4843,14 @@
       </p:sp>
       <p:sp>
         <p:nvSpPr>
-          <p:cNvPr id="5" name="Saída situação 1"/>
-          <p:cNvSpPr txBox="1"/>
-          <p:nvPr/>
-        </p:nvSpPr>
-        <p:spPr>
-          <a:xfrm>
-            <a:off x="777240" y="2176272"/>
-            <a:ext cx="4937760" cy="365760"/>
+          <p:cNvPr id="4" name="Objeção frase 1"/>
+          <p:cNvSpPr txBox="1"/>
+          <p:nvPr/>
+        </p:nvSpPr>
+        <p:spPr>
+          <a:xfrm>
+            <a:off x="822960" y="1645920"/>
+            <a:ext cx="4937760" cy="411480"/>
           </a:xfrm>
           <a:prstGeom prst="rect">
             <a:avLst/>
@@ -4968,67 +4866,67 @@
               <a:buNone/>
             </a:pPr>
             <a:r>
-              <a:rPr lang="en-US" sz="1500" b="1" dirty="0">
+              <a:rPr lang="en-US" sz="1600" b="1" dirty="0">
+                <a:solidFill>
+                  <a:schemeClr val="accent4"/>
+                </a:solidFill>
+              </a:rPr>
+              <a:t>"Só quero o preço."</a:t>
+            </a:r>
+            <a:endParaRPr lang="en-US" sz="1600" dirty="0"/>
+          </a:p>
+        </p:txBody>
+      </p:sp>
+      <p:sp>
+        <p:nvSpPr>
+          <p:cNvPr id="5" name="Objeção resposta 1"/>
+          <p:cNvSpPr txBox="1"/>
+          <p:nvPr/>
+        </p:nvSpPr>
+        <p:spPr>
+          <a:xfrm>
+            <a:off x="822960" y="2075688"/>
+            <a:ext cx="4937760" cy="685800"/>
+          </a:xfrm>
+          <a:prstGeom prst="rect">
+            <a:avLst/>
+          </a:prstGeom>
+          <a:noFill/>
+          <a:ln/>
+        </p:spPr>
+        <p:txBody>
+          <a:bodyPr wrap="square" lIns="0" tIns="0" rIns="0" bIns="0" rtlCol="0" anchor="t"/>
+          <a:lstStyle/>
+          <a:p>
+            <a:pPr indent="0" marL="0">
+              <a:buNone/>
+            </a:pPr>
+            <a:r>
+              <a:rPr lang="en-US" sz="1400" dirty="0">
                 <a:solidFill>
                   <a:schemeClr val="tx1"/>
                 </a:solidFill>
               </a:rPr>
-              <a:t>Bom perfil, sem prazo</a:t>
-            </a:r>
-            <a:endParaRPr lang="en-US" sz="1500" dirty="0"/>
-          </a:p>
-        </p:txBody>
-      </p:sp>
-      <p:sp>
-        <p:nvSpPr>
-          <p:cNvPr id="6" name="Saída destino 1"/>
-          <p:cNvSpPr txBox="1"/>
-          <p:nvPr/>
-        </p:nvSpPr>
-        <p:spPr>
-          <a:xfrm>
-            <a:off x="777240" y="2532888"/>
-            <a:ext cx="4937760" cy="347472"/>
-          </a:xfrm>
-          <a:prstGeom prst="rect">
-            <a:avLst/>
-          </a:prstGeom>
-          <a:noFill/>
-          <a:ln/>
-        </p:spPr>
-        <p:txBody>
-          <a:bodyPr wrap="square" lIns="0" tIns="0" rIns="0" bIns="0" rtlCol="0" anchor="t"/>
-          <a:lstStyle/>
-          <a:p>
-            <a:pPr indent="0" marL="0">
-              <a:buNone/>
-            </a:pPr>
-            <a:r>
-              <a:rPr lang="en-US" sz="1300" dirty="0">
-                <a:solidFill>
-                  <a:schemeClr val="tx2"/>
-                </a:solidFill>
-              </a:rPr>
-              <a:t>Nutrição com retorno em 30, 60 ou 90 dias</a:t>
-            </a:r>
-            <a:endParaRPr lang="en-US" sz="1300" dirty="0"/>
-          </a:p>
-        </p:txBody>
-      </p:sp>
-      <p:sp>
-        <p:nvSpPr>
-          <p:cNvPr id="7" name="Saída 2"/>
+              <a:t>O valor muda com tamanho, local e modelo. Com 3 perguntas te passo ao especialista para uma proposta certa.</a:t>
+            </a:r>
+            <a:endParaRPr lang="en-US" sz="1400" dirty="0"/>
+          </a:p>
+        </p:txBody>
+      </p:sp>
+      <p:sp>
+        <p:nvSpPr>
+          <p:cNvPr id="6" name="Objeção 2"/>
           <p:cNvSpPr/>
           <p:nvPr/>
         </p:nvSpPr>
         <p:spPr>
           <a:xfrm>
-            <a:off x="548640" y="3063240"/>
-            <a:ext cx="5394960" cy="822960"/>
+            <a:off x="6172200" y="1508760"/>
+            <a:ext cx="5440680" cy="1325880"/>
           </a:xfrm>
           <a:prstGeom prst="roundRect">
             <a:avLst>
-              <a:gd name="adj" fmla="val 13333"/>
+              <a:gd name="adj" fmla="val 8276"/>
             </a:avLst>
           </a:prstGeom>
           <a:solidFill>
@@ -5039,14 +4937,14 @@
       </p:sp>
       <p:sp>
         <p:nvSpPr>
-          <p:cNvPr id="8" name="Saída situação 2"/>
-          <p:cNvSpPr txBox="1"/>
-          <p:nvPr/>
-        </p:nvSpPr>
-        <p:spPr>
-          <a:xfrm>
-            <a:off x="777240" y="3136392"/>
-            <a:ext cx="4937760" cy="365760"/>
+          <p:cNvPr id="7" name="Objeção frase 2"/>
+          <p:cNvSpPr txBox="1"/>
+          <p:nvPr/>
+        </p:nvSpPr>
+        <p:spPr>
+          <a:xfrm>
+            <a:off x="6446520" y="1645920"/>
+            <a:ext cx="4937760" cy="411480"/>
           </a:xfrm>
           <a:prstGeom prst="rect">
             <a:avLst/>
@@ -5062,67 +4960,67 @@
               <a:buNone/>
             </a:pPr>
             <a:r>
-              <a:rPr lang="en-US" sz="1500" b="1" dirty="0">
+              <a:rPr lang="en-US" sz="1600" b="1" dirty="0">
+                <a:solidFill>
+                  <a:schemeClr val="accent4"/>
+                </a:solidFill>
+              </a:rPr>
+              <a:t>"Me manda por WhatsApp."</a:t>
+            </a:r>
+            <a:endParaRPr lang="en-US" sz="1600" dirty="0"/>
+          </a:p>
+        </p:txBody>
+      </p:sp>
+      <p:sp>
+        <p:nvSpPr>
+          <p:cNvPr id="8" name="Objeção resposta 2"/>
+          <p:cNvSpPr txBox="1"/>
+          <p:nvPr/>
+        </p:nvSpPr>
+        <p:spPr>
+          <a:xfrm>
+            <a:off x="6446520" y="2075688"/>
+            <a:ext cx="4937760" cy="685800"/>
+          </a:xfrm>
+          <a:prstGeom prst="rect">
+            <a:avLst/>
+          </a:prstGeom>
+          <a:noFill/>
+          <a:ln/>
+        </p:spPr>
+        <p:txBody>
+          <a:bodyPr wrap="square" lIns="0" tIns="0" rIns="0" bIns="0" rtlCol="0" anchor="t"/>
+          <a:lstStyle/>
+          <a:p>
+            <a:pPr indent="0" marL="0">
+              <a:buNone/>
+            </a:pPr>
+            <a:r>
+              <a:rPr lang="en-US" sz="1400" dirty="0">
                 <a:solidFill>
                   <a:schemeClr val="tx1"/>
                 </a:solidFill>
               </a:rPr>
-              <a:t>Sem resposta na cadência</a:t>
-            </a:r>
-            <a:endParaRPr lang="en-US" sz="1500" dirty="0"/>
-          </a:p>
-        </p:txBody>
-      </p:sp>
-      <p:sp>
-        <p:nvSpPr>
-          <p:cNvPr id="9" name="Saída destino 2"/>
-          <p:cNvSpPr txBox="1"/>
-          <p:nvPr/>
-        </p:nvSpPr>
-        <p:spPr>
-          <a:xfrm>
-            <a:off x="777240" y="3493008"/>
-            <a:ext cx="4937760" cy="347472"/>
-          </a:xfrm>
-          <a:prstGeom prst="rect">
-            <a:avLst/>
-          </a:prstGeom>
-          <a:noFill/>
-          <a:ln/>
-        </p:spPr>
-        <p:txBody>
-          <a:bodyPr wrap="square" lIns="0" tIns="0" rIns="0" bIns="0" rtlCol="0" anchor="t"/>
-          <a:lstStyle/>
-          <a:p>
-            <a:pPr indent="0" marL="0">
-              <a:buNone/>
-            </a:pPr>
-            <a:r>
-              <a:rPr lang="en-US" sz="1300" dirty="0">
-                <a:solidFill>
-                  <a:schemeClr val="tx2"/>
-                </a:solidFill>
-              </a:rPr>
-              <a:t>Nutrição por e-mail (automação)</a:t>
-            </a:r>
-            <a:endParaRPr lang="en-US" sz="1300" dirty="0"/>
-          </a:p>
-        </p:txBody>
-      </p:sp>
-      <p:sp>
-        <p:nvSpPr>
-          <p:cNvPr id="10" name="Saída 3"/>
+              <a:t>Mando sim. Para não ser genérico: é para qual espaço e qual o tamanho?</a:t>
+            </a:r>
+            <a:endParaRPr lang="en-US" sz="1400" dirty="0"/>
+          </a:p>
+        </p:txBody>
+      </p:sp>
+      <p:sp>
+        <p:nvSpPr>
+          <p:cNvPr id="9" name="Objeção 3"/>
           <p:cNvSpPr/>
           <p:nvPr/>
         </p:nvSpPr>
         <p:spPr>
           <a:xfrm>
-            <a:off x="548640" y="4023360"/>
-            <a:ext cx="5394960" cy="822960"/>
+            <a:off x="548640" y="2971800"/>
+            <a:ext cx="5440680" cy="1325880"/>
           </a:xfrm>
           <a:prstGeom prst="roundRect">
             <a:avLst>
-              <a:gd name="adj" fmla="val 13333"/>
+              <a:gd name="adj" fmla="val 8276"/>
             </a:avLst>
           </a:prstGeom>
           <a:solidFill>
@@ -5133,14 +5031,14 @@
       </p:sp>
       <p:sp>
         <p:nvSpPr>
-          <p:cNvPr id="11" name="Saída situação 3"/>
-          <p:cNvSpPr txBox="1"/>
-          <p:nvPr/>
-        </p:nvSpPr>
-        <p:spPr>
-          <a:xfrm>
-            <a:off x="777240" y="4096512"/>
-            <a:ext cx="4937760" cy="365760"/>
+          <p:cNvPr id="10" name="Objeção frase 3"/>
+          <p:cNvSpPr txBox="1"/>
+          <p:nvPr/>
+        </p:nvSpPr>
+        <p:spPr>
+          <a:xfrm>
+            <a:off x="822960" y="3108960"/>
+            <a:ext cx="4937760" cy="411480"/>
           </a:xfrm>
           <a:prstGeom prst="rect">
             <a:avLst/>
@@ -5156,67 +5054,67 @@
               <a:buNone/>
             </a:pPr>
             <a:r>
-              <a:rPr lang="en-US" sz="1500" b="1" dirty="0">
+              <a:rPr lang="en-US" sz="1600" b="1" dirty="0">
+                <a:solidFill>
+                  <a:schemeClr val="accent4"/>
+                </a:solidFill>
+              </a:rPr>
+              <a:t>"Estou só pesquisando."</a:t>
+            </a:r>
+            <a:endParaRPr lang="en-US" sz="1600" dirty="0"/>
+          </a:p>
+        </p:txBody>
+      </p:sp>
+      <p:sp>
+        <p:nvSpPr>
+          <p:cNvPr id="11" name="Objeção resposta 3"/>
+          <p:cNvSpPr txBox="1"/>
+          <p:nvPr/>
+        </p:nvSpPr>
+        <p:spPr>
+          <a:xfrm>
+            <a:off x="822960" y="3538728"/>
+            <a:ext cx="4937760" cy="685800"/>
+          </a:xfrm>
+          <a:prstGeom prst="rect">
+            <a:avLst/>
+          </a:prstGeom>
+          <a:noFill/>
+          <a:ln/>
+        </p:spPr>
+        <p:txBody>
+          <a:bodyPr wrap="square" lIns="0" tIns="0" rIns="0" bIns="0" rtlCol="0" anchor="t"/>
+          <a:lstStyle/>
+          <a:p>
+            <a:pPr indent="0" marL="0">
+              <a:buNone/>
+            </a:pPr>
+            <a:r>
+              <a:rPr lang="en-US" sz="1400" dirty="0">
                 <a:solidFill>
                   <a:schemeClr val="tx1"/>
                 </a:solidFill>
               </a:rPr>
-              <a:t>Fora do perfil</a:t>
-            </a:r>
-            <a:endParaRPr lang="en-US" sz="1500" dirty="0"/>
-          </a:p>
-        </p:txBody>
-      </p:sp>
-      <p:sp>
-        <p:nvSpPr>
-          <p:cNvPr id="12" name="Saída destino 3"/>
-          <p:cNvSpPr txBox="1"/>
-          <p:nvPr/>
-        </p:nvSpPr>
-        <p:spPr>
-          <a:xfrm>
-            <a:off x="777240" y="4453128"/>
-            <a:ext cx="4937760" cy="347472"/>
-          </a:xfrm>
-          <a:prstGeom prst="rect">
-            <a:avLst/>
-          </a:prstGeom>
-          <a:noFill/>
-          <a:ln/>
-        </p:spPr>
-        <p:txBody>
-          <a:bodyPr wrap="square" lIns="0" tIns="0" rIns="0" bIns="0" rtlCol="0" anchor="t"/>
-          <a:lstStyle/>
-          <a:p>
-            <a:pPr indent="0" marL="0">
-              <a:buNone/>
-            </a:pPr>
-            <a:r>
-              <a:rPr lang="en-US" sz="1300" dirty="0">
-                <a:solidFill>
-                  <a:schemeClr val="tx2"/>
-                </a:solidFill>
-              </a:rPr>
-              <a:t>Desqualificado, com motivo</a:t>
-            </a:r>
-            <a:endParaRPr lang="en-US" sz="1300" dirty="0"/>
-          </a:p>
-        </p:txBody>
-      </p:sp>
-      <p:sp>
-        <p:nvSpPr>
-          <p:cNvPr id="13" name="Saída 4"/>
+              <a:t>Ótimo momento para conversar. O que te fez começar a pesquisar agora?</a:t>
+            </a:r>
+            <a:endParaRPr lang="en-US" sz="1400" dirty="0"/>
+          </a:p>
+        </p:txBody>
+      </p:sp>
+      <p:sp>
+        <p:nvSpPr>
+          <p:cNvPr id="12" name="Objeção 4"/>
           <p:cNvSpPr/>
           <p:nvPr/>
         </p:nvSpPr>
         <p:spPr>
           <a:xfrm>
-            <a:off x="548640" y="4983480"/>
-            <a:ext cx="5394960" cy="822960"/>
+            <a:off x="6172200" y="2971800"/>
+            <a:ext cx="5440680" cy="1325880"/>
           </a:xfrm>
           <a:prstGeom prst="roundRect">
             <a:avLst>
-              <a:gd name="adj" fmla="val 13333"/>
+              <a:gd name="adj" fmla="val 8276"/>
             </a:avLst>
           </a:prstGeom>
           <a:solidFill>
@@ -5227,14 +5125,14 @@
       </p:sp>
       <p:sp>
         <p:nvSpPr>
-          <p:cNvPr id="14" name="Saída situação 4"/>
-          <p:cNvSpPr txBox="1"/>
-          <p:nvPr/>
-        </p:nvSpPr>
-        <p:spPr>
-          <a:xfrm>
-            <a:off x="777240" y="5056632"/>
-            <a:ext cx="4937760" cy="365760"/>
+          <p:cNvPr id="13" name="Objeção frase 4"/>
+          <p:cNvSpPr txBox="1"/>
+          <p:nvPr/>
+        </p:nvSpPr>
+        <p:spPr>
+          <a:xfrm>
+            <a:off x="6446520" y="3108960"/>
+            <a:ext cx="4937760" cy="411480"/>
           </a:xfrm>
           <a:prstGeom prst="rect">
             <a:avLst/>
@@ -5250,129 +5148,179 @@
               <a:buNone/>
             </a:pPr>
             <a:r>
-              <a:rPr lang="en-US" sz="1500" b="1" dirty="0">
+              <a:rPr lang="en-US" sz="1600" b="1" dirty="0">
+                <a:solidFill>
+                  <a:schemeClr val="accent4"/>
+                </a:solidFill>
+              </a:rPr>
+              <a:t>"Não sou eu que decido."</a:t>
+            </a:r>
+            <a:endParaRPr lang="en-US" sz="1600" dirty="0"/>
+          </a:p>
+        </p:txBody>
+      </p:sp>
+      <p:sp>
+        <p:nvSpPr>
+          <p:cNvPr id="14" name="Objeção resposta 4"/>
+          <p:cNvSpPr txBox="1"/>
+          <p:nvPr/>
+        </p:nvSpPr>
+        <p:spPr>
+          <a:xfrm>
+            <a:off x="6446520" y="3538728"/>
+            <a:ext cx="4937760" cy="685800"/>
+          </a:xfrm>
+          <a:prstGeom prst="rect">
+            <a:avLst/>
+          </a:prstGeom>
+          <a:noFill/>
+          <a:ln/>
+        </p:spPr>
+        <p:txBody>
+          <a:bodyPr wrap="square" lIns="0" tIns="0" rIns="0" bIns="0" rtlCol="0" anchor="t"/>
+          <a:lstStyle/>
+          <a:p>
+            <a:pPr indent="0" marL="0">
+              <a:buNone/>
+            </a:pPr>
+            <a:r>
+              <a:rPr lang="en-US" sz="1400" dirty="0">
                 <a:solidFill>
                   <a:schemeClr val="tx1"/>
                 </a:solidFill>
               </a:rPr>
-              <a:t>Contato errado ou duplicado</a:t>
-            </a:r>
-            <a:endParaRPr lang="en-US" sz="1500" dirty="0"/>
-          </a:p>
-        </p:txBody>
-      </p:sp>
-      <p:sp>
-        <p:nvSpPr>
-          <p:cNvPr id="15" name="Saída destino 4"/>
-          <p:cNvSpPr txBox="1"/>
-          <p:nvPr/>
-        </p:nvSpPr>
-        <p:spPr>
-          <a:xfrm>
-            <a:off x="777240" y="5413248"/>
-            <a:ext cx="4937760" cy="347472"/>
-          </a:xfrm>
-          <a:prstGeom prst="rect">
-            <a:avLst/>
-          </a:prstGeom>
-          <a:noFill/>
-          <a:ln/>
-        </p:spPr>
-        <p:txBody>
-          <a:bodyPr wrap="square" lIns="0" tIns="0" rIns="0" bIns="0" rtlCol="0" anchor="t"/>
-          <a:lstStyle/>
-          <a:p>
-            <a:pPr indent="0" marL="0">
-              <a:buNone/>
-            </a:pPr>
-            <a:r>
-              <a:rPr lang="en-US" sz="1300" dirty="0">
-                <a:solidFill>
-                  <a:schemeClr val="tx2"/>
-                </a:solidFill>
-              </a:rPr>
-              <a:t>Corrigir ou mesclar</a:t>
-            </a:r>
-            <a:endParaRPr lang="en-US" sz="1300" dirty="0"/>
-          </a:p>
-        </p:txBody>
-      </p:sp>
-      <p:sp>
-        <p:nvSpPr>
-          <p:cNvPr id="16" name="Salesforce"/>
+              <a:t>Sem problema. Quem decide? Marcamos uma conversa com vocês dois.</a:t>
+            </a:r>
+            <a:endParaRPr lang="en-US" sz="1400" dirty="0"/>
+          </a:p>
+        </p:txBody>
+      </p:sp>
+      <p:sp>
+        <p:nvSpPr>
+          <p:cNvPr id="15" name="Objeção 5"/>
           <p:cNvSpPr/>
           <p:nvPr/>
         </p:nvSpPr>
         <p:spPr>
           <a:xfrm>
-            <a:off x="6400800" y="1554480"/>
-            <a:ext cx="5212080" cy="4526280"/>
+            <a:off x="548640" y="4434840"/>
+            <a:ext cx="5440680" cy="1325880"/>
           </a:xfrm>
           <a:prstGeom prst="roundRect">
             <a:avLst>
-              <a:gd name="adj" fmla="val 2424"/>
+              <a:gd name="adj" fmla="val 8276"/>
             </a:avLst>
           </a:prstGeom>
           <a:solidFill>
-            <a:schemeClr val="tx2"/>
+            <a:schemeClr val="bg2"/>
           </a:solidFill>
           <a:ln/>
         </p:spPr>
       </p:sp>
       <p:sp>
         <p:nvSpPr>
-          <p:cNvPr id="17" name="Salesforce círculo"/>
+          <p:cNvPr id="16" name="Objeção frase 5"/>
+          <p:cNvSpPr txBox="1"/>
+          <p:nvPr/>
+        </p:nvSpPr>
+        <p:spPr>
+          <a:xfrm>
+            <a:off x="822960" y="4572000"/>
+            <a:ext cx="4937760" cy="411480"/>
+          </a:xfrm>
+          <a:prstGeom prst="rect">
+            <a:avLst/>
+          </a:prstGeom>
+          <a:noFill/>
+          <a:ln/>
+        </p:spPr>
+        <p:txBody>
+          <a:bodyPr wrap="square" lIns="0" tIns="0" rIns="0" bIns="0" rtlCol="0" anchor="t"/>
+          <a:lstStyle/>
+          <a:p>
+            <a:pPr indent="0" marL="0">
+              <a:buNone/>
+            </a:pPr>
+            <a:r>
+              <a:rPr lang="en-US" sz="1600" b="1" dirty="0">
+                <a:solidFill>
+                  <a:schemeClr val="accent4"/>
+                </a:solidFill>
+              </a:rPr>
+              <a:t>"Já tenho fornecedor."</a:t>
+            </a:r>
+            <a:endParaRPr lang="en-US" sz="1600" dirty="0"/>
+          </a:p>
+        </p:txBody>
+      </p:sp>
+      <p:sp>
+        <p:nvSpPr>
+          <p:cNvPr id="17" name="Objeção resposta 5"/>
+          <p:cNvSpPr txBox="1"/>
+          <p:nvPr/>
+        </p:nvSpPr>
+        <p:spPr>
+          <a:xfrm>
+            <a:off x="822960" y="5001768"/>
+            <a:ext cx="4937760" cy="685800"/>
+          </a:xfrm>
+          <a:prstGeom prst="rect">
+            <a:avLst/>
+          </a:prstGeom>
+          <a:noFill/>
+          <a:ln/>
+        </p:spPr>
+        <p:txBody>
+          <a:bodyPr wrap="square" lIns="0" tIns="0" rIns="0" bIns="0" rtlCol="0" anchor="t"/>
+          <a:lstStyle/>
+          <a:p>
+            <a:pPr indent="0" marL="0">
+              <a:buNone/>
+            </a:pPr>
+            <a:r>
+              <a:rPr lang="en-US" sz="1400" dirty="0">
+                <a:solidFill>
+                  <a:schemeClr val="tx1"/>
+                </a:solidFill>
+              </a:rPr>
+              <a:t>Que bom. O que você melhoraria no atendimento de hoje?</a:t>
+            </a:r>
+            <a:endParaRPr lang="en-US" sz="1400" dirty="0"/>
+          </a:p>
+        </p:txBody>
+      </p:sp>
+      <p:sp>
+        <p:nvSpPr>
+          <p:cNvPr id="18" name="Objeção 6"/>
           <p:cNvSpPr/>
           <p:nvPr/>
         </p:nvSpPr>
         <p:spPr>
           <a:xfrm>
-            <a:off x="6720840" y="1783080"/>
-            <a:ext cx="640080" cy="640080"/>
-          </a:xfrm>
-          <a:prstGeom prst="ellipse">
-            <a:avLst/>
+            <a:off x="6172200" y="4434840"/>
+            <a:ext cx="5440680" cy="1325880"/>
+          </a:xfrm>
+          <a:prstGeom prst="roundRect">
+            <a:avLst>
+              <a:gd name="adj" fmla="val 8276"/>
+            </a:avLst>
           </a:prstGeom>
           <a:solidFill>
-            <a:srgbClr val="658DFF"/>
+            <a:schemeClr val="bg2"/>
           </a:solidFill>
           <a:ln/>
         </p:spPr>
       </p:sp>
-      <p:pic>
-        <p:nvPicPr>
-          <p:cNvPr id="18" name="Salesforce ícone" descr="preencoded.png">    </p:cNvPr>
-          <p:cNvPicPr>
-            <a:picLocks noChangeAspect="1"/>
-          </p:cNvPicPr>
-          <p:nvPr/>
-        </p:nvPicPr>
-        <p:blipFill>
-          <a:blip r:embed="rId1"/>
-          <a:stretch>
-            <a:fillRect/>
-          </a:stretch>
-        </p:blipFill>
-        <p:spPr>
-          <a:xfrm>
-            <a:off x="6880860" y="1943100"/>
-            <a:ext cx="320040" cy="320040"/>
-          </a:xfrm>
-          <a:prstGeom prst="rect">
-            <a:avLst/>
-          </a:prstGeom>
-        </p:spPr>
-      </p:pic>
-      <p:sp>
-        <p:nvSpPr>
-          <p:cNvPr id="19" name="Salesforce título"/>
-          <p:cNvSpPr txBox="1"/>
-          <p:nvPr/>
-        </p:nvSpPr>
-        <p:spPr>
-          <a:xfrm>
-            <a:off x="7498080" y="1874520"/>
-            <a:ext cx="3931920" cy="457200"/>
+      <p:sp>
+        <p:nvSpPr>
+          <p:cNvPr id="19" name="Objeção frase 6"/>
+          <p:cNvSpPr txBox="1"/>
+          <p:nvPr/>
+        </p:nvSpPr>
+        <p:spPr>
+          <a:xfrm>
+            <a:off x="6446520" y="4572000"/>
+            <a:ext cx="4937760" cy="411480"/>
           </a:xfrm>
           <a:prstGeom prst="rect">
             <a:avLst/>
@@ -5388,27 +5336,27 @@
               <a:buNone/>
             </a:pPr>
             <a:r>
-              <a:rPr lang="en-US" sz="1800" b="1" dirty="0">
-                <a:solidFill>
-                  <a:schemeClr val="accent2"/>
-                </a:solidFill>
-              </a:rPr>
-              <a:t>Salesforce, na hora</a:t>
-            </a:r>
-            <a:endParaRPr lang="en-US" sz="1800" dirty="0"/>
-          </a:p>
-        </p:txBody>
-      </p:sp>
-      <p:sp>
-        <p:nvSpPr>
-          <p:cNvPr id="20" name="Salesforce regras"/>
-          <p:cNvSpPr txBox="1"/>
-          <p:nvPr/>
-        </p:nvSpPr>
-        <p:spPr>
-          <a:xfrm>
-            <a:off x="6720840" y="2606040"/>
-            <a:ext cx="4572000" cy="3291840"/>
+              <a:rPr lang="en-US" sz="1600" b="1" dirty="0">
+                <a:solidFill>
+                  <a:schemeClr val="accent4"/>
+                </a:solidFill>
+              </a:rPr>
+              <a:t>"Agora não é o momento."</a:t>
+            </a:r>
+            <a:endParaRPr lang="en-US" sz="1600" dirty="0"/>
+          </a:p>
+        </p:txBody>
+      </p:sp>
+      <p:sp>
+        <p:nvSpPr>
+          <p:cNvPr id="20" name="Objeção resposta 6"/>
+          <p:cNvSpPr txBox="1"/>
+          <p:nvPr/>
+        </p:nvSpPr>
+        <p:spPr>
+          <a:xfrm>
+            <a:off x="6446520" y="5001768"/>
+            <a:ext cx="4937760" cy="685800"/>
           </a:xfrm>
           <a:prstGeom prst="rect">
             <a:avLst/>
@@ -5420,112 +5368,54 @@
           <a:bodyPr wrap="square" lIns="0" tIns="0" rIns="0" bIns="0" rtlCol="0" anchor="t"/>
           <a:lstStyle/>
           <a:p>
-            <a:pPr marL="342900" indent="-342900">
-              <a:spcAft>
-                <a:spcPts val="600"/>
-              </a:spcAft>
-              <a:buSzPct val="100000"/>
-              <a:buChar char="•"/>
+            <a:pPr indent="0" marL="0">
+              <a:buNone/>
             </a:pPr>
             <a:r>
               <a:rPr lang="en-US" sz="1400" dirty="0">
                 <a:solidFill>
-                  <a:schemeClr val="bg1"/>
-                </a:solidFill>
-              </a:rPr>
-              <a:t>Status: Novo → Em contato → MQL → SQL → Executivo</a:t>
+                  <a:schemeClr val="tx1"/>
+                </a:solidFill>
+              </a:rPr>
+              <a:t>Quando seria? Anoto aqui e te chamo na data.</a:t>
             </a:r>
             <a:endParaRPr lang="en-US" sz="1400" dirty="0"/>
           </a:p>
-          <a:p>
-            <a:pPr marL="342900" indent="-342900">
-              <a:spcAft>
-                <a:spcPts val="600"/>
-              </a:spcAft>
-              <a:buSzPct val="100000"/>
-              <a:buChar char="•"/>
-            </a:pPr>
-            <a:r>
-              <a:rPr lang="en-US" sz="1400" dirty="0">
-                <a:solidFill>
-                  <a:schemeClr val="bg1"/>
-                </a:solidFill>
-              </a:rPr>
-              <a:t>Cada ligação, WhatsApp e e-mail como atividade</a:t>
-            </a:r>
-            <a:endParaRPr lang="en-US" sz="1400" dirty="0"/>
-          </a:p>
-          <a:p>
-            <a:pPr marL="342900" indent="-342900">
-              <a:spcAft>
-                <a:spcPts val="600"/>
-              </a:spcAft>
-              <a:buSzPct val="100000"/>
-              <a:buChar char="•"/>
-            </a:pPr>
-            <a:r>
-              <a:rPr lang="en-US" sz="1400" dirty="0">
-                <a:solidFill>
-                  <a:schemeClr val="bg1"/>
-                </a:solidFill>
-              </a:rPr>
-              <a:t>TAG obrigatória (Prospecção Ativa ou evento)</a:t>
-            </a:r>
-            <a:endParaRPr lang="en-US" sz="1400" dirty="0"/>
-          </a:p>
-          <a:p>
-            <a:pPr marL="342900" indent="-342900">
-              <a:spcAft>
-                <a:spcPts val="600"/>
-              </a:spcAft>
-              <a:buSzPct val="100000"/>
-              <a:buChar char="•"/>
-            </a:pPr>
-            <a:r>
-              <a:rPr lang="en-US" sz="1400" dirty="0">
-                <a:solidFill>
-                  <a:schemeClr val="bg1"/>
-                </a:solidFill>
-              </a:rPr>
-              <a:t>Nicho, origem, temperatura, propósito, prazo, decisor</a:t>
-            </a:r>
-            <a:endParaRPr lang="en-US" sz="1400" dirty="0"/>
-          </a:p>
-          <a:p>
-            <a:pPr marL="342900" indent="-342900">
-              <a:spcAft>
-                <a:spcPts val="600"/>
-              </a:spcAft>
-              <a:buSzPct val="100000"/>
-              <a:buChar char="•"/>
-            </a:pPr>
-            <a:r>
-              <a:rPr lang="en-US" sz="1400" dirty="0">
-                <a:solidFill>
-                  <a:schemeClr val="bg1"/>
-                </a:solidFill>
-              </a:rPr>
-              <a:t>Motivo de perda sempre preenchido</a:t>
-            </a:r>
-            <a:endParaRPr lang="en-US" sz="1400" dirty="0"/>
-          </a:p>
-          <a:p>
-            <a:pPr marL="342900" indent="-342900">
-              <a:spcAft>
-                <a:spcPts val="600"/>
-              </a:spcAft>
-              <a:buSzPct val="100000"/>
-              <a:buChar char="•"/>
-            </a:pPr>
-            <a:r>
-              <a:rPr lang="en-US" sz="1400" dirty="0">
-                <a:solidFill>
-                  <a:schemeClr val="bg1"/>
-                </a:solidFill>
-              </a:rPr>
-              <a:t>Todo lead aberto com uma próxima tarefa e data</a:t>
-            </a:r>
-            <a:endParaRPr lang="en-US" sz="1400" dirty="0"/>
+        </p:txBody>
+      </p:sp>
+      <p:sp>
+        <p:nvSpPr>
+          <p:cNvPr id="21" name="Método objeções"/>
+          <p:cNvSpPr txBox="1"/>
+          <p:nvPr/>
+        </p:nvSpPr>
+        <p:spPr>
+          <a:xfrm>
+            <a:off x="548640" y="5943600"/>
+            <a:ext cx="11064240" cy="320040"/>
+          </a:xfrm>
+          <a:prstGeom prst="rect">
+            <a:avLst/>
+          </a:prstGeom>
+          <a:noFill/>
+          <a:ln/>
+        </p:spPr>
+        <p:txBody>
+          <a:bodyPr wrap="square" lIns="0" tIns="0" rIns="0" bIns="0" rtlCol="0" anchor="t"/>
+          <a:lstStyle/>
+          <a:p>
+            <a:pPr indent="0" marL="0">
+              <a:buNone/>
+            </a:pPr>
+            <a:r>
+              <a:rPr lang="en-US" sz="1300" dirty="0">
+                <a:solidFill>
+                  <a:schemeClr val="tx2"/>
+                </a:solidFill>
+              </a:rPr>
+              <a:t>Acolha, pergunte o motivo e leve ao próximo passo. Preço, crédito e contrato ficam com o executivo.</a:t>
+            </a:r>
+            <a:endParaRPr lang="en-US" sz="1300" dirty="0"/>
           </a:p>
         </p:txBody>
       </p:sp>
@@ -5631,7 +5521,7 @@
                   <a:schemeClr val="tx1"/>
                 </a:solidFill>
               </a:rPr>
-              <a:t>Indicadores e metas</a:t>
+              <a:t>Etapas 6 e 7: ninguém fica sem status</a:t>
             </a:r>
             <a:endParaRPr lang="en-US" sz="3200" dirty="0"/>
           </a:p>
@@ -5639,18 +5529,54 @@
       </p:sp>
       <p:sp>
         <p:nvSpPr>
-          <p:cNvPr id="3" name="Indicador 1"/>
+          <p:cNvPr id="3" name="Saídas título"/>
+          <p:cNvSpPr txBox="1"/>
+          <p:nvPr/>
+        </p:nvSpPr>
+        <p:spPr>
+          <a:xfrm>
+            <a:off x="548640" y="1554480"/>
+            <a:ext cx="5486400" cy="411480"/>
+          </a:xfrm>
+          <a:prstGeom prst="rect">
+            <a:avLst/>
+          </a:prstGeom>
+          <a:noFill/>
+          <a:ln/>
+        </p:spPr>
+        <p:txBody>
+          <a:bodyPr wrap="square" lIns="0" tIns="0" rIns="0" bIns="0" rtlCol="0" anchor="t"/>
+          <a:lstStyle/>
+          <a:p>
+            <a:pPr indent="0" marL="0">
+              <a:buNone/>
+            </a:pPr>
+            <a:r>
+              <a:rPr lang="en-US" sz="2000" b="1" dirty="0">
+                <a:solidFill>
+                  <a:schemeClr val="accent1"/>
+                </a:solidFill>
+              </a:rPr>
+              <a:t>Saídas da fila</a:t>
+            </a:r>
+            <a:endParaRPr lang="en-US" sz="2000" dirty="0"/>
+          </a:p>
+        </p:txBody>
+      </p:sp>
+      <p:sp>
+        <p:nvSpPr>
+          <p:cNvPr id="4" name="Saída 1"/>
           <p:cNvSpPr/>
           <p:nvPr/>
         </p:nvSpPr>
         <p:spPr>
           <a:xfrm>
-            <a:off x="548640" y="1554480"/>
-            <a:ext cx="3474720" cy="1965960"/>
+            <a:off x="548640" y="2103120"/>
+            <a:ext cx="5394960" cy="822960"/>
           </a:xfrm>
           <a:prstGeom prst="roundRect">
             <a:avLst>
-              <a:gd name="adj" fmla="val 5581"/>
+              <a:gd name="adj" fmla="val 13333"/>
             </a:avLst>
           </a:prstGeom>
           <a:solidFill>
@@ -5661,14 +5587,14 @@
       </p:sp>
       <p:sp>
         <p:nvSpPr>
-          <p:cNvPr id="4" name="Indicador valor 1"/>
-          <p:cNvSpPr txBox="1"/>
-          <p:nvPr/>
-        </p:nvSpPr>
-        <p:spPr>
-          <a:xfrm>
-            <a:off x="822960" y="1737360"/>
-            <a:ext cx="2926080" cy="731520"/>
+          <p:cNvPr id="5" name="Saída situação 1"/>
+          <p:cNvSpPr txBox="1"/>
+          <p:nvPr/>
+        </p:nvSpPr>
+        <p:spPr>
+          <a:xfrm>
+            <a:off x="777240" y="2176272"/>
+            <a:ext cx="4937760" cy="365760"/>
           </a:xfrm>
           <a:prstGeom prst="rect">
             <a:avLst/>
@@ -5684,27 +5610,27 @@
               <a:buNone/>
             </a:pPr>
             <a:r>
-              <a:rPr lang="en-US" sz="3600" b="1" dirty="0">
-                <a:solidFill>
-                  <a:schemeClr val="accent1"/>
-                </a:solidFill>
-              </a:rPr>
-              <a:t>5 min</a:t>
-            </a:r>
-            <a:endParaRPr lang="en-US" sz="3600" dirty="0"/>
-          </a:p>
-        </p:txBody>
-      </p:sp>
-      <p:sp>
-        <p:nvSpPr>
-          <p:cNvPr id="5" name="Indicador nome 1"/>
-          <p:cNvSpPr txBox="1"/>
-          <p:nvPr/>
-        </p:nvSpPr>
-        <p:spPr>
-          <a:xfrm>
-            <a:off x="822960" y="2514600"/>
-            <a:ext cx="2926080" cy="640080"/>
+              <a:rPr lang="en-US" sz="1500" b="1" dirty="0">
+                <a:solidFill>
+                  <a:schemeClr val="tx1"/>
+                </a:solidFill>
+              </a:rPr>
+              <a:t>Bom perfil, sem prazo</a:t>
+            </a:r>
+            <a:endParaRPr lang="en-US" sz="1500" dirty="0"/>
+          </a:p>
+        </p:txBody>
+      </p:sp>
+      <p:sp>
+        <p:nvSpPr>
+          <p:cNvPr id="6" name="Saída destino 1"/>
+          <p:cNvSpPr txBox="1"/>
+          <p:nvPr/>
+        </p:nvSpPr>
+        <p:spPr>
+          <a:xfrm>
+            <a:off x="777240" y="2532888"/>
+            <a:ext cx="4937760" cy="347472"/>
           </a:xfrm>
           <a:prstGeom prst="rect">
             <a:avLst/>
@@ -5720,67 +5646,313 @@
               <a:buNone/>
             </a:pPr>
             <a:r>
-              <a:rPr lang="en-US" sz="1400" dirty="0">
-                <a:solidFill>
-                  <a:schemeClr val="tx1"/>
-                </a:solidFill>
-              </a:rPr>
-              <a:t>Tempo até o 1º contato dos leads quentes</a:t>
-            </a:r>
-            <a:endParaRPr lang="en-US" sz="1400" dirty="0"/>
-          </a:p>
-        </p:txBody>
-      </p:sp>
-      <p:sp>
-        <p:nvSpPr>
-          <p:cNvPr id="6" name="Indicador fonte 1"/>
-          <p:cNvSpPr txBox="1"/>
-          <p:nvPr/>
-        </p:nvSpPr>
-        <p:spPr>
-          <a:xfrm>
-            <a:off x="822960" y="3154680"/>
-            <a:ext cx="2926080" cy="274320"/>
-          </a:xfrm>
-          <a:prstGeom prst="rect">
-            <a:avLst/>
-          </a:prstGeom>
-          <a:noFill/>
-          <a:ln/>
-        </p:spPr>
-        <p:txBody>
-          <a:bodyPr wrap="square" lIns="0" tIns="0" rIns="0" bIns="0" rtlCol="0" anchor="t"/>
-          <a:lstStyle/>
-          <a:p>
-            <a:pPr indent="0" marL="0">
-              <a:buNone/>
-            </a:pPr>
-            <a:r>
-              <a:rPr lang="en-US" sz="1100" i="1" dirty="0">
-                <a:solidFill>
-                  <a:srgbClr val="7A7A7A"/>
-                </a:solidFill>
-              </a:rPr>
-              <a:t>sugestão</a:t>
-            </a:r>
-            <a:endParaRPr lang="en-US" sz="1100" dirty="0"/>
-          </a:p>
-        </p:txBody>
-      </p:sp>
-      <p:sp>
-        <p:nvSpPr>
-          <p:cNvPr id="7" name="Indicador 2"/>
+              <a:rPr lang="en-US" sz="1300" dirty="0">
+                <a:solidFill>
+                  <a:schemeClr val="tx2"/>
+                </a:solidFill>
+              </a:rPr>
+              <a:t>Nutrição com retorno em 30, 60 ou 90 dias</a:t>
+            </a:r>
+            <a:endParaRPr lang="en-US" sz="1300" dirty="0"/>
+          </a:p>
+        </p:txBody>
+      </p:sp>
+      <p:sp>
+        <p:nvSpPr>
+          <p:cNvPr id="7" name="Saída 2"/>
           <p:cNvSpPr/>
           <p:nvPr/>
         </p:nvSpPr>
         <p:spPr>
           <a:xfrm>
-            <a:off x="4297680" y="1554480"/>
-            <a:ext cx="3474720" cy="1965960"/>
+            <a:off x="548640" y="3063240"/>
+            <a:ext cx="5394960" cy="822960"/>
           </a:xfrm>
           <a:prstGeom prst="roundRect">
             <a:avLst>
-              <a:gd name="adj" fmla="val 5581"/>
+              <a:gd name="adj" fmla="val 13333"/>
+            </a:avLst>
+          </a:prstGeom>
+          <a:solidFill>
+            <a:schemeClr val="bg2"/>
+          </a:solidFill>
+          <a:ln/>
+        </p:spPr>
+      </p:sp>
+      <p:sp>
+        <p:nvSpPr>
+          <p:cNvPr id="8" name="Saída situação 2"/>
+          <p:cNvSpPr txBox="1"/>
+          <p:nvPr/>
+        </p:nvSpPr>
+        <p:spPr>
+          <a:xfrm>
+            <a:off x="777240" y="3136392"/>
+            <a:ext cx="4937760" cy="365760"/>
+          </a:xfrm>
+          <a:prstGeom prst="rect">
+            <a:avLst/>
+          </a:prstGeom>
+          <a:noFill/>
+          <a:ln/>
+        </p:spPr>
+        <p:txBody>
+          <a:bodyPr wrap="square" lIns="0" tIns="0" rIns="0" bIns="0" rtlCol="0" anchor="t"/>
+          <a:lstStyle/>
+          <a:p>
+            <a:pPr indent="0" marL="0">
+              <a:buNone/>
+            </a:pPr>
+            <a:r>
+              <a:rPr lang="en-US" sz="1500" b="1" dirty="0">
+                <a:solidFill>
+                  <a:schemeClr val="tx1"/>
+                </a:solidFill>
+              </a:rPr>
+              <a:t>Sem resposta na cadência</a:t>
+            </a:r>
+            <a:endParaRPr lang="en-US" sz="1500" dirty="0"/>
+          </a:p>
+        </p:txBody>
+      </p:sp>
+      <p:sp>
+        <p:nvSpPr>
+          <p:cNvPr id="9" name="Saída destino 2"/>
+          <p:cNvSpPr txBox="1"/>
+          <p:nvPr/>
+        </p:nvSpPr>
+        <p:spPr>
+          <a:xfrm>
+            <a:off x="777240" y="3493008"/>
+            <a:ext cx="4937760" cy="347472"/>
+          </a:xfrm>
+          <a:prstGeom prst="rect">
+            <a:avLst/>
+          </a:prstGeom>
+          <a:noFill/>
+          <a:ln/>
+        </p:spPr>
+        <p:txBody>
+          <a:bodyPr wrap="square" lIns="0" tIns="0" rIns="0" bIns="0" rtlCol="0" anchor="t"/>
+          <a:lstStyle/>
+          <a:p>
+            <a:pPr indent="0" marL="0">
+              <a:buNone/>
+            </a:pPr>
+            <a:r>
+              <a:rPr lang="en-US" sz="1300" dirty="0">
+                <a:solidFill>
+                  <a:schemeClr val="tx2"/>
+                </a:solidFill>
+              </a:rPr>
+              <a:t>Nutrição por e-mail (automação)</a:t>
+            </a:r>
+            <a:endParaRPr lang="en-US" sz="1300" dirty="0"/>
+          </a:p>
+        </p:txBody>
+      </p:sp>
+      <p:sp>
+        <p:nvSpPr>
+          <p:cNvPr id="10" name="Saída 3"/>
+          <p:cNvSpPr/>
+          <p:nvPr/>
+        </p:nvSpPr>
+        <p:spPr>
+          <a:xfrm>
+            <a:off x="548640" y="4023360"/>
+            <a:ext cx="5394960" cy="822960"/>
+          </a:xfrm>
+          <a:prstGeom prst="roundRect">
+            <a:avLst>
+              <a:gd name="adj" fmla="val 13333"/>
+            </a:avLst>
+          </a:prstGeom>
+          <a:solidFill>
+            <a:schemeClr val="bg2"/>
+          </a:solidFill>
+          <a:ln/>
+        </p:spPr>
+      </p:sp>
+      <p:sp>
+        <p:nvSpPr>
+          <p:cNvPr id="11" name="Saída situação 3"/>
+          <p:cNvSpPr txBox="1"/>
+          <p:nvPr/>
+        </p:nvSpPr>
+        <p:spPr>
+          <a:xfrm>
+            <a:off x="777240" y="4096512"/>
+            <a:ext cx="4937760" cy="365760"/>
+          </a:xfrm>
+          <a:prstGeom prst="rect">
+            <a:avLst/>
+          </a:prstGeom>
+          <a:noFill/>
+          <a:ln/>
+        </p:spPr>
+        <p:txBody>
+          <a:bodyPr wrap="square" lIns="0" tIns="0" rIns="0" bIns="0" rtlCol="0" anchor="t"/>
+          <a:lstStyle/>
+          <a:p>
+            <a:pPr indent="0" marL="0">
+              <a:buNone/>
+            </a:pPr>
+            <a:r>
+              <a:rPr lang="en-US" sz="1500" b="1" dirty="0">
+                <a:solidFill>
+                  <a:schemeClr val="tx1"/>
+                </a:solidFill>
+              </a:rPr>
+              <a:t>Fora do perfil</a:t>
+            </a:r>
+            <a:endParaRPr lang="en-US" sz="1500" dirty="0"/>
+          </a:p>
+        </p:txBody>
+      </p:sp>
+      <p:sp>
+        <p:nvSpPr>
+          <p:cNvPr id="12" name="Saída destino 3"/>
+          <p:cNvSpPr txBox="1"/>
+          <p:nvPr/>
+        </p:nvSpPr>
+        <p:spPr>
+          <a:xfrm>
+            <a:off x="777240" y="4453128"/>
+            <a:ext cx="4937760" cy="347472"/>
+          </a:xfrm>
+          <a:prstGeom prst="rect">
+            <a:avLst/>
+          </a:prstGeom>
+          <a:noFill/>
+          <a:ln/>
+        </p:spPr>
+        <p:txBody>
+          <a:bodyPr wrap="square" lIns="0" tIns="0" rIns="0" bIns="0" rtlCol="0" anchor="t"/>
+          <a:lstStyle/>
+          <a:p>
+            <a:pPr indent="0" marL="0">
+              <a:buNone/>
+            </a:pPr>
+            <a:r>
+              <a:rPr lang="en-US" sz="1300" dirty="0">
+                <a:solidFill>
+                  <a:schemeClr val="tx2"/>
+                </a:solidFill>
+              </a:rPr>
+              <a:t>Desqualificado, com motivo</a:t>
+            </a:r>
+            <a:endParaRPr lang="en-US" sz="1300" dirty="0"/>
+          </a:p>
+        </p:txBody>
+      </p:sp>
+      <p:sp>
+        <p:nvSpPr>
+          <p:cNvPr id="13" name="Saída 4"/>
+          <p:cNvSpPr/>
+          <p:nvPr/>
+        </p:nvSpPr>
+        <p:spPr>
+          <a:xfrm>
+            <a:off x="548640" y="4983480"/>
+            <a:ext cx="5394960" cy="822960"/>
+          </a:xfrm>
+          <a:prstGeom prst="roundRect">
+            <a:avLst>
+              <a:gd name="adj" fmla="val 13333"/>
+            </a:avLst>
+          </a:prstGeom>
+          <a:solidFill>
+            <a:schemeClr val="bg2"/>
+          </a:solidFill>
+          <a:ln/>
+        </p:spPr>
+      </p:sp>
+      <p:sp>
+        <p:nvSpPr>
+          <p:cNvPr id="14" name="Saída situação 4"/>
+          <p:cNvSpPr txBox="1"/>
+          <p:nvPr/>
+        </p:nvSpPr>
+        <p:spPr>
+          <a:xfrm>
+            <a:off x="777240" y="5056632"/>
+            <a:ext cx="4937760" cy="365760"/>
+          </a:xfrm>
+          <a:prstGeom prst="rect">
+            <a:avLst/>
+          </a:prstGeom>
+          <a:noFill/>
+          <a:ln/>
+        </p:spPr>
+        <p:txBody>
+          <a:bodyPr wrap="square" lIns="0" tIns="0" rIns="0" bIns="0" rtlCol="0" anchor="t"/>
+          <a:lstStyle/>
+          <a:p>
+            <a:pPr indent="0" marL="0">
+              <a:buNone/>
+            </a:pPr>
+            <a:r>
+              <a:rPr lang="en-US" sz="1500" b="1" dirty="0">
+                <a:solidFill>
+                  <a:schemeClr val="tx1"/>
+                </a:solidFill>
+              </a:rPr>
+              <a:t>Contato errado ou duplicado</a:t>
+            </a:r>
+            <a:endParaRPr lang="en-US" sz="1500" dirty="0"/>
+          </a:p>
+        </p:txBody>
+      </p:sp>
+      <p:sp>
+        <p:nvSpPr>
+          <p:cNvPr id="15" name="Saída destino 4"/>
+          <p:cNvSpPr txBox="1"/>
+          <p:nvPr/>
+        </p:nvSpPr>
+        <p:spPr>
+          <a:xfrm>
+            <a:off x="777240" y="5413248"/>
+            <a:ext cx="4937760" cy="347472"/>
+          </a:xfrm>
+          <a:prstGeom prst="rect">
+            <a:avLst/>
+          </a:prstGeom>
+          <a:noFill/>
+          <a:ln/>
+        </p:spPr>
+        <p:txBody>
+          <a:bodyPr wrap="square" lIns="0" tIns="0" rIns="0" bIns="0" rtlCol="0" anchor="t"/>
+          <a:lstStyle/>
+          <a:p>
+            <a:pPr indent="0" marL="0">
+              <a:buNone/>
+            </a:pPr>
+            <a:r>
+              <a:rPr lang="en-US" sz="1300" dirty="0">
+                <a:solidFill>
+                  <a:schemeClr val="tx2"/>
+                </a:solidFill>
+              </a:rPr>
+              <a:t>Corrigir ou mesclar</a:t>
+            </a:r>
+            <a:endParaRPr lang="en-US" sz="1300" dirty="0"/>
+          </a:p>
+        </p:txBody>
+      </p:sp>
+      <p:sp>
+        <p:nvSpPr>
+          <p:cNvPr id="16" name="Salesforce"/>
+          <p:cNvSpPr/>
+          <p:nvPr/>
+        </p:nvSpPr>
+        <p:spPr>
+          <a:xfrm>
+            <a:off x="6400800" y="1554480"/>
+            <a:ext cx="5212080" cy="4526280"/>
+          </a:xfrm>
+          <a:prstGeom prst="roundRect">
+            <a:avLst>
+              <a:gd name="adj" fmla="val 2424"/>
             </a:avLst>
           </a:prstGeom>
           <a:solidFill>
@@ -5791,14 +5963,58 @@
       </p:sp>
       <p:sp>
         <p:nvSpPr>
-          <p:cNvPr id="8" name="Indicador valor 2"/>
-          <p:cNvSpPr txBox="1"/>
-          <p:nvPr/>
-        </p:nvSpPr>
-        <p:spPr>
-          <a:xfrm>
-            <a:off x="4572000" y="1737360"/>
-            <a:ext cx="2926080" cy="731520"/>
+          <p:cNvPr id="17" name="Salesforce círculo"/>
+          <p:cNvSpPr/>
+          <p:nvPr/>
+        </p:nvSpPr>
+        <p:spPr>
+          <a:xfrm>
+            <a:off x="6720840" y="1783080"/>
+            <a:ext cx="640080" cy="640080"/>
+          </a:xfrm>
+          <a:prstGeom prst="ellipse">
+            <a:avLst/>
+          </a:prstGeom>
+          <a:solidFill>
+            <a:srgbClr val="658DFF"/>
+          </a:solidFill>
+          <a:ln/>
+        </p:spPr>
+      </p:sp>
+      <p:pic>
+        <p:nvPicPr>
+          <p:cNvPr id="18" name="Salesforce ícone" descr="preencoded.png">    </p:cNvPr>
+          <p:cNvPicPr>
+            <a:picLocks noChangeAspect="1"/>
+          </p:cNvPicPr>
+          <p:nvPr/>
+        </p:nvPicPr>
+        <p:blipFill>
+          <a:blip r:embed="rId1"/>
+          <a:stretch>
+            <a:fillRect/>
+          </a:stretch>
+        </p:blipFill>
+        <p:spPr>
+          <a:xfrm>
+            <a:off x="6880860" y="1943100"/>
+            <a:ext cx="320040" cy="320040"/>
+          </a:xfrm>
+          <a:prstGeom prst="rect">
+            <a:avLst/>
+          </a:prstGeom>
+        </p:spPr>
+      </p:pic>
+      <p:sp>
+        <p:nvSpPr>
+          <p:cNvPr id="19" name="Salesforce título"/>
+          <p:cNvSpPr txBox="1"/>
+          <p:nvPr/>
+        </p:nvSpPr>
+        <p:spPr>
+          <a:xfrm>
+            <a:off x="7498080" y="1874520"/>
+            <a:ext cx="3931920" cy="457200"/>
           </a:xfrm>
           <a:prstGeom prst="rect">
             <a:avLst/>
@@ -5814,27 +6030,27 @@
               <a:buNone/>
             </a:pPr>
             <a:r>
-              <a:rPr lang="en-US" sz="3600" b="1" dirty="0">
+              <a:rPr lang="en-US" sz="1800" b="1" dirty="0">
                 <a:solidFill>
                   <a:schemeClr val="accent2"/>
                 </a:solidFill>
               </a:rPr>
-              <a:t>15%</a:t>
-            </a:r>
-            <a:endParaRPr lang="en-US" sz="3600" dirty="0"/>
-          </a:p>
-        </p:txBody>
-      </p:sp>
-      <p:sp>
-        <p:nvSpPr>
-          <p:cNvPr id="9" name="Indicador nome 2"/>
-          <p:cNvSpPr txBox="1"/>
-          <p:nvPr/>
-        </p:nvSpPr>
-        <p:spPr>
-          <a:xfrm>
-            <a:off x="4572000" y="2514600"/>
-            <a:ext cx="2926080" cy="640080"/>
+              <a:t>Salesforce, na hora</a:t>
+            </a:r>
+            <a:endParaRPr lang="en-US" sz="1800" dirty="0"/>
+          </a:p>
+        </p:txBody>
+      </p:sp>
+      <p:sp>
+        <p:nvSpPr>
+          <p:cNvPr id="20" name="Salesforce regras"/>
+          <p:cNvSpPr txBox="1"/>
+          <p:nvPr/>
+        </p:nvSpPr>
+        <p:spPr>
+          <a:xfrm>
+            <a:off x="6720840" y="2606040"/>
+            <a:ext cx="4572000" cy="3291840"/>
           </a:xfrm>
           <a:prstGeom prst="rect">
             <a:avLst/>
@@ -5846,8 +6062,12 @@
           <a:bodyPr wrap="square" lIns="0" tIns="0" rIns="0" bIns="0" rtlCol="0" anchor="t"/>
           <a:lstStyle/>
           <a:p>
-            <a:pPr indent="0" marL="0">
-              <a:buNone/>
+            <a:pPr marL="342900" indent="-342900">
+              <a:spcAft>
+                <a:spcPts val="600"/>
+              </a:spcAft>
+              <a:buSzPct val="100000"/>
+              <a:buChar char="•"/>
             </a:pPr>
             <a:r>
               <a:rPr lang="en-US" sz="1400" dirty="0">
@@ -5855,259 +6075,35 @@
                   <a:schemeClr val="bg1"/>
                 </a:solidFill>
               </a:rPr>
-              <a:t>Taxa de resposta no WhatsApp</a:t>
+              <a:t>Status: Novo → Em contato → MQL → SQL → Executivo</a:t>
             </a:r>
             <a:endParaRPr lang="en-US" sz="1400" dirty="0"/>
           </a:p>
-        </p:txBody>
-      </p:sp>
-      <p:sp>
-        <p:nvSpPr>
-          <p:cNvPr id="10" name="Indicador fonte 2"/>
-          <p:cNvSpPr txBox="1"/>
-          <p:nvPr/>
-        </p:nvSpPr>
-        <p:spPr>
-          <a:xfrm>
-            <a:off x="4572000" y="3154680"/>
-            <a:ext cx="2926080" cy="274320"/>
-          </a:xfrm>
-          <a:prstGeom prst="rect">
-            <a:avLst/>
-          </a:prstGeom>
-          <a:noFill/>
-          <a:ln/>
-        </p:spPr>
-        <p:txBody>
-          <a:bodyPr wrap="square" lIns="0" tIns="0" rIns="0" bIns="0" rtlCol="0" anchor="t"/>
-          <a:lstStyle/>
-          <a:p>
-            <a:pPr indent="0" marL="0">
-              <a:buNone/>
-            </a:pPr>
-            <a:r>
-              <a:rPr lang="en-US" sz="1100" i="1" dirty="0">
-                <a:solidFill>
-                  <a:schemeClr val="bg2"/>
-                </a:solidFill>
-              </a:rPr>
-              <a:t>Plano Limbo</a:t>
-            </a:r>
-            <a:endParaRPr lang="en-US" sz="1100" dirty="0"/>
-          </a:p>
-        </p:txBody>
-      </p:sp>
-      <p:sp>
-        <p:nvSpPr>
-          <p:cNvPr id="11" name="Indicador 3"/>
-          <p:cNvSpPr/>
-          <p:nvPr/>
-        </p:nvSpPr>
-        <p:spPr>
-          <a:xfrm>
-            <a:off x="8046720" y="1554480"/>
-            <a:ext cx="3474720" cy="1965960"/>
-          </a:xfrm>
-          <a:prstGeom prst="roundRect">
-            <a:avLst>
-              <a:gd name="adj" fmla="val 5581"/>
-            </a:avLst>
-          </a:prstGeom>
-          <a:solidFill>
-            <a:schemeClr val="bg2"/>
-          </a:solidFill>
-          <a:ln/>
-        </p:spPr>
-      </p:sp>
-      <p:sp>
-        <p:nvSpPr>
-          <p:cNvPr id="12" name="Indicador valor 3"/>
-          <p:cNvSpPr txBox="1"/>
-          <p:nvPr/>
-        </p:nvSpPr>
-        <p:spPr>
-          <a:xfrm>
-            <a:off x="8321040" y="1737360"/>
-            <a:ext cx="2926080" cy="731520"/>
-          </a:xfrm>
-          <a:prstGeom prst="rect">
-            <a:avLst/>
-          </a:prstGeom>
-          <a:noFill/>
-          <a:ln/>
-        </p:spPr>
-        <p:txBody>
-          <a:bodyPr wrap="square" lIns="0" tIns="0" rIns="0" bIns="0" rtlCol="0" anchor="t"/>
-          <a:lstStyle/>
-          <a:p>
-            <a:pPr indent="0" marL="0">
-              <a:buNone/>
-            </a:pPr>
-            <a:r>
-              <a:rPr lang="en-US" sz="3600" b="1" dirty="0">
-                <a:solidFill>
-                  <a:schemeClr val="accent1"/>
-                </a:solidFill>
-              </a:rPr>
-              <a:t>10%</a:t>
-            </a:r>
-            <a:endParaRPr lang="en-US" sz="3600" dirty="0"/>
-          </a:p>
-        </p:txBody>
-      </p:sp>
-      <p:sp>
-        <p:nvSpPr>
-          <p:cNvPr id="13" name="Indicador nome 3"/>
-          <p:cNvSpPr txBox="1"/>
-          <p:nvPr/>
-        </p:nvSpPr>
-        <p:spPr>
-          <a:xfrm>
-            <a:off x="8321040" y="2514600"/>
-            <a:ext cx="2926080" cy="640080"/>
-          </a:xfrm>
-          <a:prstGeom prst="rect">
-            <a:avLst/>
-          </a:prstGeom>
-          <a:noFill/>
-          <a:ln/>
-        </p:spPr>
-        <p:txBody>
-          <a:bodyPr wrap="square" lIns="0" tIns="0" rIns="0" bIns="0" rtlCol="0" anchor="t"/>
-          <a:lstStyle/>
-          <a:p>
-            <a:pPr indent="0" marL="0">
-              <a:buNone/>
+          <a:p>
+            <a:pPr marL="342900" indent="-342900">
+              <a:spcAft>
+                <a:spcPts val="600"/>
+              </a:spcAft>
+              <a:buSzPct val="100000"/>
+              <a:buChar char="•"/>
             </a:pPr>
             <a:r>
               <a:rPr lang="en-US" sz="1400" dirty="0">
                 <a:solidFill>
-                  <a:schemeClr val="tx1"/>
-                </a:solidFill>
-              </a:rPr>
-              <a:t>Taxa de agendamento sobre contatados</a:t>
+                  <a:schemeClr val="bg1"/>
+                </a:solidFill>
+              </a:rPr>
+              <a:t>Cada ligação, WhatsApp e e-mail como atividade</a:t>
             </a:r>
             <a:endParaRPr lang="en-US" sz="1400" dirty="0"/>
           </a:p>
-        </p:txBody>
-      </p:sp>
-      <p:sp>
-        <p:nvSpPr>
-          <p:cNvPr id="14" name="Indicador fonte 3"/>
-          <p:cNvSpPr txBox="1"/>
-          <p:nvPr/>
-        </p:nvSpPr>
-        <p:spPr>
-          <a:xfrm>
-            <a:off x="8321040" y="3154680"/>
-            <a:ext cx="2926080" cy="274320"/>
-          </a:xfrm>
-          <a:prstGeom prst="rect">
-            <a:avLst/>
-          </a:prstGeom>
-          <a:noFill/>
-          <a:ln/>
-        </p:spPr>
-        <p:txBody>
-          <a:bodyPr wrap="square" lIns="0" tIns="0" rIns="0" bIns="0" rtlCol="0" anchor="t"/>
-          <a:lstStyle/>
-          <a:p>
-            <a:pPr indent="0" marL="0">
-              <a:buNone/>
-            </a:pPr>
-            <a:r>
-              <a:rPr lang="en-US" sz="1100" i="1" dirty="0">
-                <a:solidFill>
-                  <a:srgbClr val="7A7A7A"/>
-                </a:solidFill>
-              </a:rPr>
-              <a:t>Plano Limbo</a:t>
-            </a:r>
-            <a:endParaRPr lang="en-US" sz="1100" dirty="0"/>
-          </a:p>
-        </p:txBody>
-      </p:sp>
-      <p:sp>
-        <p:nvSpPr>
-          <p:cNvPr id="15" name="Indicador 4"/>
-          <p:cNvSpPr/>
-          <p:nvPr/>
-        </p:nvSpPr>
-        <p:spPr>
-          <a:xfrm>
-            <a:off x="548640" y="3703320"/>
-            <a:ext cx="3474720" cy="1965960"/>
-          </a:xfrm>
-          <a:prstGeom prst="roundRect">
-            <a:avLst>
-              <a:gd name="adj" fmla="val 5581"/>
-            </a:avLst>
-          </a:prstGeom>
-          <a:solidFill>
-            <a:schemeClr val="tx2"/>
-          </a:solidFill>
-          <a:ln/>
-        </p:spPr>
-      </p:sp>
-      <p:sp>
-        <p:nvSpPr>
-          <p:cNvPr id="16" name="Indicador valor 4"/>
-          <p:cNvSpPr txBox="1"/>
-          <p:nvPr/>
-        </p:nvSpPr>
-        <p:spPr>
-          <a:xfrm>
-            <a:off x="822960" y="3886200"/>
-            <a:ext cx="2926080" cy="731520"/>
-          </a:xfrm>
-          <a:prstGeom prst="rect">
-            <a:avLst/>
-          </a:prstGeom>
-          <a:noFill/>
-          <a:ln/>
-        </p:spPr>
-        <p:txBody>
-          <a:bodyPr wrap="square" lIns="0" tIns="0" rIns="0" bIns="0" rtlCol="0" anchor="t"/>
-          <a:lstStyle/>
-          <a:p>
-            <a:pPr indent="0" marL="0">
-              <a:buNone/>
-            </a:pPr>
-            <a:r>
-              <a:rPr lang="en-US" sz="3600" b="1" dirty="0">
-                <a:solidFill>
-                  <a:schemeClr val="accent2"/>
-                </a:solidFill>
-              </a:rPr>
-              <a:t>30%</a:t>
-            </a:r>
-            <a:endParaRPr lang="en-US" sz="3600" dirty="0"/>
-          </a:p>
-        </p:txBody>
-      </p:sp>
-      <p:sp>
-        <p:nvSpPr>
-          <p:cNvPr id="17" name="Indicador nome 4"/>
-          <p:cNvSpPr txBox="1"/>
-          <p:nvPr/>
-        </p:nvSpPr>
-        <p:spPr>
-          <a:xfrm>
-            <a:off x="822960" y="4663440"/>
-            <a:ext cx="2926080" cy="640080"/>
-          </a:xfrm>
-          <a:prstGeom prst="rect">
-            <a:avLst/>
-          </a:prstGeom>
-          <a:noFill/>
-          <a:ln/>
-        </p:spPr>
-        <p:txBody>
-          <a:bodyPr wrap="square" lIns="0" tIns="0" rIns="0" bIns="0" rtlCol="0" anchor="t"/>
-          <a:lstStyle/>
-          <a:p>
-            <a:pPr indent="0" marL="0">
-              <a:buNone/>
+          <a:p>
+            <a:pPr marL="342900" indent="-342900">
+              <a:spcAft>
+                <a:spcPts val="600"/>
+              </a:spcAft>
+              <a:buSzPct val="100000"/>
+              <a:buChar char="•"/>
             </a:pPr>
             <a:r>
               <a:rPr lang="en-US" sz="1400" dirty="0">
@@ -6115,259 +6111,35 @@
                   <a:schemeClr val="bg1"/>
                 </a:solidFill>
               </a:rPr>
-              <a:t>Conversão em MQL dos leads com conversa</a:t>
+              <a:t>TAG obrigatória (Prospecção Ativa ou evento)</a:t>
             </a:r>
             <a:endParaRPr lang="en-US" sz="1400" dirty="0"/>
           </a:p>
-        </p:txBody>
-      </p:sp>
-      <p:sp>
-        <p:nvSpPr>
-          <p:cNvPr id="18" name="Indicador fonte 4"/>
-          <p:cNvSpPr txBox="1"/>
-          <p:nvPr/>
-        </p:nvSpPr>
-        <p:spPr>
-          <a:xfrm>
-            <a:off x="822960" y="5303520"/>
-            <a:ext cx="2926080" cy="274320"/>
-          </a:xfrm>
-          <a:prstGeom prst="rect">
-            <a:avLst/>
-          </a:prstGeom>
-          <a:noFill/>
-          <a:ln/>
-        </p:spPr>
-        <p:txBody>
-          <a:bodyPr wrap="square" lIns="0" tIns="0" rIns="0" bIns="0" rtlCol="0" anchor="t"/>
-          <a:lstStyle/>
-          <a:p>
-            <a:pPr indent="0" marL="0">
-              <a:buNone/>
-            </a:pPr>
-            <a:r>
-              <a:rPr lang="en-US" sz="1100" i="1" dirty="0">
-                <a:solidFill>
-                  <a:schemeClr val="bg2"/>
-                </a:solidFill>
-              </a:rPr>
-              <a:t>Plano Limbo</a:t>
-            </a:r>
-            <a:endParaRPr lang="en-US" sz="1100" dirty="0"/>
-          </a:p>
-        </p:txBody>
-      </p:sp>
-      <p:sp>
-        <p:nvSpPr>
-          <p:cNvPr id="19" name="Indicador 5"/>
-          <p:cNvSpPr/>
-          <p:nvPr/>
-        </p:nvSpPr>
-        <p:spPr>
-          <a:xfrm>
-            <a:off x="4297680" y="3703320"/>
-            <a:ext cx="3474720" cy="1965960"/>
-          </a:xfrm>
-          <a:prstGeom prst="roundRect">
-            <a:avLst>
-              <a:gd name="adj" fmla="val 5581"/>
-            </a:avLst>
-          </a:prstGeom>
-          <a:solidFill>
-            <a:schemeClr val="bg2"/>
-          </a:solidFill>
-          <a:ln/>
-        </p:spPr>
-      </p:sp>
-      <p:sp>
-        <p:nvSpPr>
-          <p:cNvPr id="20" name="Indicador valor 5"/>
-          <p:cNvSpPr txBox="1"/>
-          <p:nvPr/>
-        </p:nvSpPr>
-        <p:spPr>
-          <a:xfrm>
-            <a:off x="4572000" y="3886200"/>
-            <a:ext cx="2926080" cy="731520"/>
-          </a:xfrm>
-          <a:prstGeom prst="rect">
-            <a:avLst/>
-          </a:prstGeom>
-          <a:noFill/>
-          <a:ln/>
-        </p:spPr>
-        <p:txBody>
-          <a:bodyPr wrap="square" lIns="0" tIns="0" rIns="0" bIns="0" rtlCol="0" anchor="t"/>
-          <a:lstStyle/>
-          <a:p>
-            <a:pPr indent="0" marL="0">
-              <a:buNone/>
-            </a:pPr>
-            <a:r>
-              <a:rPr lang="en-US" sz="3600" b="1" dirty="0">
-                <a:solidFill>
-                  <a:schemeClr val="accent1"/>
-                </a:solidFill>
-              </a:rPr>
-              <a:t>80%</a:t>
-            </a:r>
-            <a:endParaRPr lang="en-US" sz="3600" dirty="0"/>
-          </a:p>
-        </p:txBody>
-      </p:sp>
-      <p:sp>
-        <p:nvSpPr>
-          <p:cNvPr id="21" name="Indicador nome 5"/>
-          <p:cNvSpPr txBox="1"/>
-          <p:nvPr/>
-        </p:nvSpPr>
-        <p:spPr>
-          <a:xfrm>
-            <a:off x="4572000" y="4663440"/>
-            <a:ext cx="2926080" cy="640080"/>
-          </a:xfrm>
-          <a:prstGeom prst="rect">
-            <a:avLst/>
-          </a:prstGeom>
-          <a:noFill/>
-          <a:ln/>
-        </p:spPr>
-        <p:txBody>
-          <a:bodyPr wrap="square" lIns="0" tIns="0" rIns="0" bIns="0" rtlCol="0" anchor="t"/>
-          <a:lstStyle/>
-          <a:p>
-            <a:pPr indent="0" marL="0">
-              <a:buNone/>
+          <a:p>
+            <a:pPr marL="342900" indent="-342900">
+              <a:spcAft>
+                <a:spcPts val="600"/>
+              </a:spcAft>
+              <a:buSzPct val="100000"/>
+              <a:buChar char="•"/>
             </a:pPr>
             <a:r>
               <a:rPr lang="en-US" sz="1400" dirty="0">
                 <a:solidFill>
-                  <a:schemeClr val="tx1"/>
-                </a:solidFill>
-              </a:rPr>
-              <a:t>Comparecimento às reuniões agendadas</a:t>
+                  <a:schemeClr val="bg1"/>
+                </a:solidFill>
+              </a:rPr>
+              <a:t>Nicho, origem, temperatura, propósito, prazo, decisor</a:t>
             </a:r>
             <a:endParaRPr lang="en-US" sz="1400" dirty="0"/>
           </a:p>
-        </p:txBody>
-      </p:sp>
-      <p:sp>
-        <p:nvSpPr>
-          <p:cNvPr id="22" name="Indicador fonte 5"/>
-          <p:cNvSpPr txBox="1"/>
-          <p:nvPr/>
-        </p:nvSpPr>
-        <p:spPr>
-          <a:xfrm>
-            <a:off x="4572000" y="5303520"/>
-            <a:ext cx="2926080" cy="274320"/>
-          </a:xfrm>
-          <a:prstGeom prst="rect">
-            <a:avLst/>
-          </a:prstGeom>
-          <a:noFill/>
-          <a:ln/>
-        </p:spPr>
-        <p:txBody>
-          <a:bodyPr wrap="square" lIns="0" tIns="0" rIns="0" bIns="0" rtlCol="0" anchor="t"/>
-          <a:lstStyle/>
-          <a:p>
-            <a:pPr indent="0" marL="0">
-              <a:buNone/>
-            </a:pPr>
-            <a:r>
-              <a:rPr lang="en-US" sz="1100" i="1" dirty="0">
-                <a:solidFill>
-                  <a:srgbClr val="7A7A7A"/>
-                </a:solidFill>
-              </a:rPr>
-              <a:t>sugestão</a:t>
-            </a:r>
-            <a:endParaRPr lang="en-US" sz="1100" dirty="0"/>
-          </a:p>
-        </p:txBody>
-      </p:sp>
-      <p:sp>
-        <p:nvSpPr>
-          <p:cNvPr id="23" name="Indicador 6"/>
-          <p:cNvSpPr/>
-          <p:nvPr/>
-        </p:nvSpPr>
-        <p:spPr>
-          <a:xfrm>
-            <a:off x="8046720" y="3703320"/>
-            <a:ext cx="3474720" cy="1965960"/>
-          </a:xfrm>
-          <a:prstGeom prst="roundRect">
-            <a:avLst>
-              <a:gd name="adj" fmla="val 5581"/>
-            </a:avLst>
-          </a:prstGeom>
-          <a:solidFill>
-            <a:schemeClr val="tx2"/>
-          </a:solidFill>
-          <a:ln/>
-        </p:spPr>
-      </p:sp>
-      <p:sp>
-        <p:nvSpPr>
-          <p:cNvPr id="24" name="Indicador valor 6"/>
-          <p:cNvSpPr txBox="1"/>
-          <p:nvPr/>
-        </p:nvSpPr>
-        <p:spPr>
-          <a:xfrm>
-            <a:off x="8321040" y="3886200"/>
-            <a:ext cx="2926080" cy="731520"/>
-          </a:xfrm>
-          <a:prstGeom prst="rect">
-            <a:avLst/>
-          </a:prstGeom>
-          <a:noFill/>
-          <a:ln/>
-        </p:spPr>
-        <p:txBody>
-          <a:bodyPr wrap="square" lIns="0" tIns="0" rIns="0" bIns="0" rtlCol="0" anchor="t"/>
-          <a:lstStyle/>
-          <a:p>
-            <a:pPr indent="0" marL="0">
-              <a:buNone/>
-            </a:pPr>
-            <a:r>
-              <a:rPr lang="en-US" sz="3600" b="1" dirty="0">
-                <a:solidFill>
-                  <a:schemeClr val="accent2"/>
-                </a:solidFill>
-              </a:rPr>
-              <a:t>zero</a:t>
-            </a:r>
-            <a:endParaRPr lang="en-US" sz="3600" dirty="0"/>
-          </a:p>
-        </p:txBody>
-      </p:sp>
-      <p:sp>
-        <p:nvSpPr>
-          <p:cNvPr id="25" name="Indicador nome 6"/>
-          <p:cNvSpPr txBox="1"/>
-          <p:nvPr/>
-        </p:nvSpPr>
-        <p:spPr>
-          <a:xfrm>
-            <a:off x="8321040" y="4663440"/>
-            <a:ext cx="2926080" cy="640080"/>
-          </a:xfrm>
-          <a:prstGeom prst="rect">
-            <a:avLst/>
-          </a:prstGeom>
-          <a:noFill/>
-          <a:ln/>
-        </p:spPr>
-        <p:txBody>
-          <a:bodyPr wrap="square" lIns="0" tIns="0" rIns="0" bIns="0" rtlCol="0" anchor="t"/>
-          <a:lstStyle/>
-          <a:p>
-            <a:pPr indent="0" marL="0">
-              <a:buNone/>
+          <a:p>
+            <a:pPr marL="342900" indent="-342900">
+              <a:spcAft>
+                <a:spcPts val="600"/>
+              </a:spcAft>
+              <a:buSzPct val="100000"/>
+              <a:buChar char="•"/>
             </a:pPr>
             <a:r>
               <a:rPr lang="en-US" sz="1400" dirty="0">
@@ -6375,81 +6147,27 @@
                   <a:schemeClr val="bg1"/>
                 </a:solidFill>
               </a:rPr>
-              <a:t>Leads sem status ou sem próxima tarefa</a:t>
+              <a:t>Motivo de perda sempre preenchido</a:t>
             </a:r>
             <a:endParaRPr lang="en-US" sz="1400" dirty="0"/>
           </a:p>
-        </p:txBody>
-      </p:sp>
-      <p:sp>
-        <p:nvSpPr>
-          <p:cNvPr id="26" name="Indicador fonte 6"/>
-          <p:cNvSpPr txBox="1"/>
-          <p:nvPr/>
-        </p:nvSpPr>
-        <p:spPr>
-          <a:xfrm>
-            <a:off x="8321040" y="5303520"/>
-            <a:ext cx="2926080" cy="274320"/>
-          </a:xfrm>
-          <a:prstGeom prst="rect">
-            <a:avLst/>
-          </a:prstGeom>
-          <a:noFill/>
-          <a:ln/>
-        </p:spPr>
-        <p:txBody>
-          <a:bodyPr wrap="square" lIns="0" tIns="0" rIns="0" bIns="0" rtlCol="0" anchor="t"/>
-          <a:lstStyle/>
-          <a:p>
-            <a:pPr indent="0" marL="0">
-              <a:buNone/>
-            </a:pPr>
-            <a:r>
-              <a:rPr lang="en-US" sz="1100" i="1" dirty="0">
-                <a:solidFill>
-                  <a:schemeClr val="bg2"/>
-                </a:solidFill>
-              </a:rPr>
-              <a:t>sugestão</a:t>
-            </a:r>
-            <a:endParaRPr lang="en-US" sz="1100" dirty="0"/>
-          </a:p>
-        </p:txBody>
-      </p:sp>
-      <p:sp>
-        <p:nvSpPr>
-          <p:cNvPr id="27" name="Revisão"/>
-          <p:cNvSpPr txBox="1"/>
-          <p:nvPr/>
-        </p:nvSpPr>
-        <p:spPr>
-          <a:xfrm>
-            <a:off x="548640" y="5897880"/>
-            <a:ext cx="11064240" cy="320040"/>
-          </a:xfrm>
-          <a:prstGeom prst="rect">
-            <a:avLst/>
-          </a:prstGeom>
-          <a:noFill/>
-          <a:ln/>
-        </p:spPr>
-        <p:txBody>
-          <a:bodyPr wrap="square" lIns="0" tIns="0" rIns="0" bIns="0" rtlCol="0" anchor="t"/>
-          <a:lstStyle/>
-          <a:p>
-            <a:pPr indent="0" marL="0">
-              <a:buNone/>
-            </a:pPr>
-            <a:r>
-              <a:rPr lang="en-US" sz="1300" dirty="0">
-                <a:solidFill>
-                  <a:schemeClr val="tx2"/>
-                </a:solidFill>
-              </a:rPr>
-              <a:t>Revisão semanal: números da Pryscila e da Kelly lado a lado e 2 ou 3 conversas ouvidas juntas.</a:t>
-            </a:r>
-            <a:endParaRPr lang="en-US" sz="1300" dirty="0"/>
+          <a:p>
+            <a:pPr marL="342900" indent="-342900">
+              <a:spcAft>
+                <a:spcPts val="600"/>
+              </a:spcAft>
+              <a:buSzPct val="100000"/>
+              <a:buChar char="•"/>
+            </a:pPr>
+            <a:r>
+              <a:rPr lang="en-US" sz="1400" dirty="0">
+                <a:solidFill>
+                  <a:schemeClr val="bg1"/>
+                </a:solidFill>
+              </a:rPr>
+              <a:t>Todo lead aberto com uma próxima tarefa e data</a:t>
+            </a:r>
+            <a:endParaRPr lang="en-US" sz="1400" dirty="0"/>
           </a:p>
         </p:txBody>
       </p:sp>
@@ -6555,7 +6273,7 @@
                   <a:schemeClr val="tx1"/>
                 </a:solidFill>
               </a:rPr>
-              <a:t>Rotina do dia e próximos passos</a:t>
+              <a:t>Indicadores e metas</a:t>
             </a:r>
             <a:endParaRPr lang="en-US" sz="3200" dirty="0"/>
           </a:p>
@@ -6563,414 +6281,18 @@
       </p:sp>
       <p:sp>
         <p:nvSpPr>
-          <p:cNvPr id="3" name="Rotina título"/>
-          <p:cNvSpPr txBox="1"/>
+          <p:cNvPr id="3" name="Indicador 1"/>
+          <p:cNvSpPr/>
           <p:nvPr/>
         </p:nvSpPr>
         <p:spPr>
           <a:xfrm>
             <a:off x="548640" y="1554480"/>
-            <a:ext cx="5486400" cy="411480"/>
-          </a:xfrm>
-          <a:prstGeom prst="rect">
-            <a:avLst/>
-          </a:prstGeom>
-          <a:noFill/>
-          <a:ln/>
-        </p:spPr>
-        <p:txBody>
-          <a:bodyPr wrap="square" lIns="0" tIns="0" rIns="0" bIns="0" rtlCol="0" anchor="t"/>
-          <a:lstStyle/>
-          <a:p>
-            <a:pPr indent="0" marL="0">
-              <a:buNone/>
-            </a:pPr>
-            <a:r>
-              <a:rPr lang="en-US" sz="2000" b="1" dirty="0">
-                <a:solidFill>
-                  <a:schemeClr val="accent1"/>
-                </a:solidFill>
-              </a:rPr>
-              <a:t>Rotina sugerida</a:t>
-            </a:r>
-            <a:endParaRPr lang="en-US" sz="2000" dirty="0"/>
-          </a:p>
-        </p:txBody>
-      </p:sp>
-      <p:sp>
-        <p:nvSpPr>
-          <p:cNvPr id="4" name="Rotina hora 1"/>
-          <p:cNvSpPr txBox="1"/>
-          <p:nvPr/>
-        </p:nvSpPr>
-        <p:spPr>
-          <a:xfrm>
-            <a:off x="548640" y="2103120"/>
-            <a:ext cx="1097280" cy="548640"/>
-          </a:xfrm>
-          <a:prstGeom prst="rect">
-            <a:avLst/>
-          </a:prstGeom>
-          <a:noFill/>
-          <a:ln/>
-        </p:spPr>
-        <p:txBody>
-          <a:bodyPr wrap="square" lIns="0" tIns="0" rIns="0" bIns="0" rtlCol="0" anchor="ctr"/>
-          <a:lstStyle/>
-          <a:p>
-            <a:pPr indent="0" marL="0">
-              <a:buNone/>
-            </a:pPr>
-            <a:r>
-              <a:rPr lang="en-US" sz="1800" b="1" dirty="0">
-                <a:solidFill>
-                  <a:schemeClr val="accent4"/>
-                </a:solidFill>
-              </a:rPr>
-              <a:t>8h30</a:t>
-            </a:r>
-            <a:endParaRPr lang="en-US" sz="1800" dirty="0"/>
-          </a:p>
-        </p:txBody>
-      </p:sp>
-      <p:sp>
-        <p:nvSpPr>
-          <p:cNvPr id="5" name="Rotina atividade 1"/>
-          <p:cNvSpPr txBox="1"/>
-          <p:nvPr/>
-        </p:nvSpPr>
-        <p:spPr>
-          <a:xfrm>
-            <a:off x="1691640" y="2103120"/>
-            <a:ext cx="4206240" cy="548640"/>
-          </a:xfrm>
-          <a:prstGeom prst="rect">
-            <a:avLst/>
-          </a:prstGeom>
-          <a:noFill/>
-          <a:ln/>
-        </p:spPr>
-        <p:txBody>
-          <a:bodyPr wrap="square" lIns="0" tIns="0" rIns="0" bIns="0" rtlCol="0" anchor="ctr"/>
-          <a:lstStyle/>
-          <a:p>
-            <a:pPr indent="0" marL="0">
-              <a:buNone/>
-            </a:pPr>
-            <a:r>
-              <a:rPr lang="en-US" sz="1500" dirty="0">
-                <a:solidFill>
-                  <a:schemeClr val="tx1"/>
-                </a:solidFill>
-              </a:rPr>
-              <a:t>Fila da noite, quentes primeiro</a:t>
-            </a:r>
-            <a:endParaRPr lang="en-US" sz="1500" dirty="0"/>
-          </a:p>
-        </p:txBody>
-      </p:sp>
-      <p:sp>
-        <p:nvSpPr>
-          <p:cNvPr id="6" name="Rotina hora 2"/>
-          <p:cNvSpPr txBox="1"/>
-          <p:nvPr/>
-        </p:nvSpPr>
-        <p:spPr>
-          <a:xfrm>
-            <a:off x="548640" y="2852928"/>
-            <a:ext cx="1097280" cy="548640"/>
-          </a:xfrm>
-          <a:prstGeom prst="rect">
-            <a:avLst/>
-          </a:prstGeom>
-          <a:noFill/>
-          <a:ln/>
-        </p:spPr>
-        <p:txBody>
-          <a:bodyPr wrap="square" lIns="0" tIns="0" rIns="0" bIns="0" rtlCol="0" anchor="ctr"/>
-          <a:lstStyle/>
-          <a:p>
-            <a:pPr indent="0" marL="0">
-              <a:buNone/>
-            </a:pPr>
-            <a:r>
-              <a:rPr lang="en-US" sz="1800" b="1" dirty="0">
-                <a:solidFill>
-                  <a:schemeClr val="accent4"/>
-                </a:solidFill>
-              </a:rPr>
-              <a:t>9h</a:t>
-            </a:r>
-            <a:endParaRPr lang="en-US" sz="1800" dirty="0"/>
-          </a:p>
-        </p:txBody>
-      </p:sp>
-      <p:sp>
-        <p:nvSpPr>
-          <p:cNvPr id="7" name="Rotina atividade 2"/>
-          <p:cNvSpPr txBox="1"/>
-          <p:nvPr/>
-        </p:nvSpPr>
-        <p:spPr>
-          <a:xfrm>
-            <a:off x="1691640" y="2852928"/>
-            <a:ext cx="4206240" cy="548640"/>
-          </a:xfrm>
-          <a:prstGeom prst="rect">
-            <a:avLst/>
-          </a:prstGeom>
-          <a:noFill/>
-          <a:ln/>
-        </p:spPr>
-        <p:txBody>
-          <a:bodyPr wrap="square" lIns="0" tIns="0" rIns="0" bIns="0" rtlCol="0" anchor="ctr"/>
-          <a:lstStyle/>
-          <a:p>
-            <a:pPr indent="0" marL="0">
-              <a:buNone/>
-            </a:pPr>
-            <a:r>
-              <a:rPr lang="en-US" sz="1500" dirty="0">
-                <a:solidFill>
-                  <a:schemeClr val="tx1"/>
-                </a:solidFill>
-              </a:rPr>
-              <a:t>Ligações e qualificações</a:t>
-            </a:r>
-            <a:endParaRPr lang="en-US" sz="1500" dirty="0"/>
-          </a:p>
-        </p:txBody>
-      </p:sp>
-      <p:sp>
-        <p:nvSpPr>
-          <p:cNvPr id="8" name="Rotina hora 3"/>
-          <p:cNvSpPr txBox="1"/>
-          <p:nvPr/>
-        </p:nvSpPr>
-        <p:spPr>
-          <a:xfrm>
-            <a:off x="548640" y="3602736"/>
-            <a:ext cx="1097280" cy="548640"/>
-          </a:xfrm>
-          <a:prstGeom prst="rect">
-            <a:avLst/>
-          </a:prstGeom>
-          <a:noFill/>
-          <a:ln/>
-        </p:spPr>
-        <p:txBody>
-          <a:bodyPr wrap="square" lIns="0" tIns="0" rIns="0" bIns="0" rtlCol="0" anchor="ctr"/>
-          <a:lstStyle/>
-          <a:p>
-            <a:pPr indent="0" marL="0">
-              <a:buNone/>
-            </a:pPr>
-            <a:r>
-              <a:rPr lang="en-US" sz="1800" b="1" dirty="0">
-                <a:solidFill>
-                  <a:schemeClr val="accent4"/>
-                </a:solidFill>
-              </a:rPr>
-              <a:t>13h30</a:t>
-            </a:r>
-            <a:endParaRPr lang="en-US" sz="1800" dirty="0"/>
-          </a:p>
-        </p:txBody>
-      </p:sp>
-      <p:sp>
-        <p:nvSpPr>
-          <p:cNvPr id="9" name="Rotina atividade 3"/>
-          <p:cNvSpPr txBox="1"/>
-          <p:nvPr/>
-        </p:nvSpPr>
-        <p:spPr>
-          <a:xfrm>
-            <a:off x="1691640" y="3602736"/>
-            <a:ext cx="4206240" cy="548640"/>
-          </a:xfrm>
-          <a:prstGeom prst="rect">
-            <a:avLst/>
-          </a:prstGeom>
-          <a:noFill/>
-          <a:ln/>
-        </p:spPr>
-        <p:txBody>
-          <a:bodyPr wrap="square" lIns="0" tIns="0" rIns="0" bIns="0" rtlCol="0" anchor="ctr"/>
-          <a:lstStyle/>
-          <a:p>
-            <a:pPr indent="0" marL="0">
-              <a:buNone/>
-            </a:pPr>
-            <a:r>
-              <a:rPr lang="en-US" sz="1500" dirty="0">
-                <a:solidFill>
-                  <a:schemeClr val="tx1"/>
-                </a:solidFill>
-              </a:rPr>
-              <a:t>Cadência e confirmações</a:t>
-            </a:r>
-            <a:endParaRPr lang="en-US" sz="1500" dirty="0"/>
-          </a:p>
-        </p:txBody>
-      </p:sp>
-      <p:sp>
-        <p:nvSpPr>
-          <p:cNvPr id="10" name="Rotina hora 4"/>
-          <p:cNvSpPr txBox="1"/>
-          <p:nvPr/>
-        </p:nvSpPr>
-        <p:spPr>
-          <a:xfrm>
-            <a:off x="548640" y="4352544"/>
-            <a:ext cx="1097280" cy="548640"/>
-          </a:xfrm>
-          <a:prstGeom prst="rect">
-            <a:avLst/>
-          </a:prstGeom>
-          <a:noFill/>
-          <a:ln/>
-        </p:spPr>
-        <p:txBody>
-          <a:bodyPr wrap="square" lIns="0" tIns="0" rIns="0" bIns="0" rtlCol="0" anchor="ctr"/>
-          <a:lstStyle/>
-          <a:p>
-            <a:pPr indent="0" marL="0">
-              <a:buNone/>
-            </a:pPr>
-            <a:r>
-              <a:rPr lang="en-US" sz="1800" b="1" dirty="0">
-                <a:solidFill>
-                  <a:schemeClr val="accent4"/>
-                </a:solidFill>
-              </a:rPr>
-              <a:t>16h</a:t>
-            </a:r>
-            <a:endParaRPr lang="en-US" sz="1800" dirty="0"/>
-          </a:p>
-        </p:txBody>
-      </p:sp>
-      <p:sp>
-        <p:nvSpPr>
-          <p:cNvPr id="11" name="Rotina atividade 4"/>
-          <p:cNvSpPr txBox="1"/>
-          <p:nvPr/>
-        </p:nvSpPr>
-        <p:spPr>
-          <a:xfrm>
-            <a:off x="1691640" y="4352544"/>
-            <a:ext cx="4206240" cy="548640"/>
-          </a:xfrm>
-          <a:prstGeom prst="rect">
-            <a:avLst/>
-          </a:prstGeom>
-          <a:noFill/>
-          <a:ln/>
-        </p:spPr>
-        <p:txBody>
-          <a:bodyPr wrap="square" lIns="0" tIns="0" rIns="0" bIns="0" rtlCol="0" anchor="ctr"/>
-          <a:lstStyle/>
-          <a:p>
-            <a:pPr indent="0" marL="0">
-              <a:buNone/>
-            </a:pPr>
-            <a:r>
-              <a:rPr lang="en-US" sz="1500" dirty="0">
-                <a:solidFill>
-                  <a:schemeClr val="tx1"/>
-                </a:solidFill>
-              </a:rPr>
-              <a:t>Novos leads e Plano Limbo</a:t>
-            </a:r>
-            <a:endParaRPr lang="en-US" sz="1500" dirty="0"/>
-          </a:p>
-        </p:txBody>
-      </p:sp>
-      <p:sp>
-        <p:nvSpPr>
-          <p:cNvPr id="12" name="Rotina hora 5"/>
-          <p:cNvSpPr txBox="1"/>
-          <p:nvPr/>
-        </p:nvSpPr>
-        <p:spPr>
-          <a:xfrm>
-            <a:off x="548640" y="5102352"/>
-            <a:ext cx="1097280" cy="548640"/>
-          </a:xfrm>
-          <a:prstGeom prst="rect">
-            <a:avLst/>
-          </a:prstGeom>
-          <a:noFill/>
-          <a:ln/>
-        </p:spPr>
-        <p:txBody>
-          <a:bodyPr wrap="square" lIns="0" tIns="0" rIns="0" bIns="0" rtlCol="0" anchor="ctr"/>
-          <a:lstStyle/>
-          <a:p>
-            <a:pPr indent="0" marL="0">
-              <a:buNone/>
-            </a:pPr>
-            <a:r>
-              <a:rPr lang="en-US" sz="1800" b="1" dirty="0">
-                <a:solidFill>
-                  <a:schemeClr val="accent4"/>
-                </a:solidFill>
-              </a:rPr>
-              <a:t>17h30</a:t>
-            </a:r>
-            <a:endParaRPr lang="en-US" sz="1800" dirty="0"/>
-          </a:p>
-        </p:txBody>
-      </p:sp>
-      <p:sp>
-        <p:nvSpPr>
-          <p:cNvPr id="13" name="Rotina atividade 5"/>
-          <p:cNvSpPr txBox="1"/>
-          <p:nvPr/>
-        </p:nvSpPr>
-        <p:spPr>
-          <a:xfrm>
-            <a:off x="1691640" y="5102352"/>
-            <a:ext cx="4206240" cy="548640"/>
-          </a:xfrm>
-          <a:prstGeom prst="rect">
-            <a:avLst/>
-          </a:prstGeom>
-          <a:noFill/>
-          <a:ln/>
-        </p:spPr>
-        <p:txBody>
-          <a:bodyPr wrap="square" lIns="0" tIns="0" rIns="0" bIns="0" rtlCol="0" anchor="ctr"/>
-          <a:lstStyle/>
-          <a:p>
-            <a:pPr indent="0" marL="0">
-              <a:buNone/>
-            </a:pPr>
-            <a:r>
-              <a:rPr lang="en-US" sz="1500" dirty="0">
-                <a:solidFill>
-                  <a:schemeClr val="tx1"/>
-                </a:solidFill>
-              </a:rPr>
-              <a:t>Salesforce em dia</a:t>
-            </a:r>
-            <a:endParaRPr lang="en-US" sz="1500" dirty="0"/>
-          </a:p>
-        </p:txBody>
-      </p:sp>
-      <p:sp>
-        <p:nvSpPr>
-          <p:cNvPr id="14" name="Próximos passos"/>
-          <p:cNvSpPr/>
-          <p:nvPr/>
-        </p:nvSpPr>
-        <p:spPr>
-          <a:xfrm>
-            <a:off x="6400800" y="1554480"/>
-            <a:ext cx="5212080" cy="4526280"/>
+            <a:ext cx="3474720" cy="1965960"/>
           </a:xfrm>
           <a:prstGeom prst="roundRect">
             <a:avLst>
-              <a:gd name="adj" fmla="val 2424"/>
+              <a:gd name="adj" fmla="val 5581"/>
             </a:avLst>
           </a:prstGeom>
           <a:solidFill>
@@ -6981,14 +6303,14 @@
       </p:sp>
       <p:sp>
         <p:nvSpPr>
-          <p:cNvPr id="15" name="Próximos título"/>
-          <p:cNvSpPr txBox="1"/>
-          <p:nvPr/>
-        </p:nvSpPr>
-        <p:spPr>
-          <a:xfrm>
-            <a:off x="6720840" y="1783080"/>
-            <a:ext cx="4572000" cy="457200"/>
+          <p:cNvPr id="4" name="Indicador valor 1"/>
+          <p:cNvSpPr txBox="1"/>
+          <p:nvPr/>
+        </p:nvSpPr>
+        <p:spPr>
+          <a:xfrm>
+            <a:off x="822960" y="1737360"/>
+            <a:ext cx="2926080" cy="731520"/>
           </a:xfrm>
           <a:prstGeom prst="rect">
             <a:avLst/>
@@ -7004,27 +6326,63 @@
               <a:buNone/>
             </a:pPr>
             <a:r>
-              <a:rPr lang="en-US" sz="1800" b="1" dirty="0">
+              <a:rPr lang="en-US" sz="3600" b="1" dirty="0">
+                <a:solidFill>
+                  <a:schemeClr val="accent1"/>
+                </a:solidFill>
+              </a:rPr>
+              <a:t>5 min</a:t>
+            </a:r>
+            <a:endParaRPr lang="en-US" sz="3600" dirty="0"/>
+          </a:p>
+        </p:txBody>
+      </p:sp>
+      <p:sp>
+        <p:nvSpPr>
+          <p:cNvPr id="5" name="Indicador nome 1"/>
+          <p:cNvSpPr txBox="1"/>
+          <p:nvPr/>
+        </p:nvSpPr>
+        <p:spPr>
+          <a:xfrm>
+            <a:off x="822960" y="2514600"/>
+            <a:ext cx="2926080" cy="640080"/>
+          </a:xfrm>
+          <a:prstGeom prst="rect">
+            <a:avLst/>
+          </a:prstGeom>
+          <a:noFill/>
+          <a:ln/>
+        </p:spPr>
+        <p:txBody>
+          <a:bodyPr wrap="square" lIns="0" tIns="0" rIns="0" bIns="0" rtlCol="0" anchor="t"/>
+          <a:lstStyle/>
+          <a:p>
+            <a:pPr indent="0" marL="0">
+              <a:buNone/>
+            </a:pPr>
+            <a:r>
+              <a:rPr lang="en-US" sz="1400" dirty="0">
                 <a:solidFill>
                   <a:schemeClr val="tx1"/>
                 </a:solidFill>
               </a:rPr>
-              <a:t>Próximos passos</a:t>
-            </a:r>
-            <a:endParaRPr lang="en-US" sz="1800" dirty="0"/>
-          </a:p>
-        </p:txBody>
-      </p:sp>
-      <p:sp>
-        <p:nvSpPr>
-          <p:cNvPr id="16" name="Próximos lista"/>
-          <p:cNvSpPr txBox="1"/>
-          <p:nvPr/>
-        </p:nvSpPr>
-        <p:spPr>
-          <a:xfrm>
-            <a:off x="6720840" y="2377440"/>
-            <a:ext cx="4572000" cy="3566160"/>
+              <a:t>Tempo até o 1º contato dos leads quentes</a:t>
+            </a:r>
+            <a:endParaRPr lang="en-US" sz="1400" dirty="0"/>
+          </a:p>
+        </p:txBody>
+      </p:sp>
+      <p:sp>
+        <p:nvSpPr>
+          <p:cNvPr id="6" name="Indicador fonte 1"/>
+          <p:cNvSpPr txBox="1"/>
+          <p:nvPr/>
+        </p:nvSpPr>
+        <p:spPr>
+          <a:xfrm>
+            <a:off x="822960" y="3154680"/>
+            <a:ext cx="2926080" cy="274320"/>
           </a:xfrm>
           <a:prstGeom prst="rect">
             <a:avLst/>
@@ -7036,118 +6394,704 @@
           <a:bodyPr wrap="square" lIns="0" tIns="0" rIns="0" bIns="0" rtlCol="0" anchor="t"/>
           <a:lstStyle/>
           <a:p>
-            <a:pPr marL="342900" indent="-342900">
-              <a:spcAft>
-                <a:spcPts val="600"/>
-              </a:spcAft>
-              <a:buSzPct val="100000"/>
-              <a:buFont typeface="+mj-lt"/>
-              <a:buAutoNum type="arabicPeriod" startAt="1"/>
+            <a:pPr indent="0" marL="0">
+              <a:buNone/>
+            </a:pPr>
+            <a:r>
+              <a:rPr lang="en-US" sz="1100" i="1" dirty="0">
+                <a:solidFill>
+                  <a:srgbClr val="7A7A7A"/>
+                </a:solidFill>
+              </a:rPr>
+              <a:t>sugestão</a:t>
+            </a:r>
+            <a:endParaRPr lang="en-US" sz="1100" dirty="0"/>
+          </a:p>
+        </p:txBody>
+      </p:sp>
+      <p:sp>
+        <p:nvSpPr>
+          <p:cNvPr id="7" name="Indicador 2"/>
+          <p:cNvSpPr/>
+          <p:nvPr/>
+        </p:nvSpPr>
+        <p:spPr>
+          <a:xfrm>
+            <a:off x="4297680" y="1554480"/>
+            <a:ext cx="3474720" cy="1965960"/>
+          </a:xfrm>
+          <a:prstGeom prst="roundRect">
+            <a:avLst>
+              <a:gd name="adj" fmla="val 5581"/>
+            </a:avLst>
+          </a:prstGeom>
+          <a:solidFill>
+            <a:schemeClr val="tx2"/>
+          </a:solidFill>
+          <a:ln/>
+        </p:spPr>
+      </p:sp>
+      <p:sp>
+        <p:nvSpPr>
+          <p:cNvPr id="8" name="Indicador valor 2"/>
+          <p:cNvSpPr txBox="1"/>
+          <p:nvPr/>
+        </p:nvSpPr>
+        <p:spPr>
+          <a:xfrm>
+            <a:off x="4572000" y="1737360"/>
+            <a:ext cx="2926080" cy="731520"/>
+          </a:xfrm>
+          <a:prstGeom prst="rect">
+            <a:avLst/>
+          </a:prstGeom>
+          <a:noFill/>
+          <a:ln/>
+        </p:spPr>
+        <p:txBody>
+          <a:bodyPr wrap="square" lIns="0" tIns="0" rIns="0" bIns="0" rtlCol="0" anchor="t"/>
+          <a:lstStyle/>
+          <a:p>
+            <a:pPr indent="0" marL="0">
+              <a:buNone/>
+            </a:pPr>
+            <a:r>
+              <a:rPr lang="en-US" sz="3600" b="1" dirty="0">
+                <a:solidFill>
+                  <a:schemeClr val="accent2"/>
+                </a:solidFill>
+              </a:rPr>
+              <a:t>15%</a:t>
+            </a:r>
+            <a:endParaRPr lang="en-US" sz="3600" dirty="0"/>
+          </a:p>
+        </p:txBody>
+      </p:sp>
+      <p:sp>
+        <p:nvSpPr>
+          <p:cNvPr id="9" name="Indicador nome 2"/>
+          <p:cNvSpPr txBox="1"/>
+          <p:nvPr/>
+        </p:nvSpPr>
+        <p:spPr>
+          <a:xfrm>
+            <a:off x="4572000" y="2514600"/>
+            <a:ext cx="2926080" cy="640080"/>
+          </a:xfrm>
+          <a:prstGeom prst="rect">
+            <a:avLst/>
+          </a:prstGeom>
+          <a:noFill/>
+          <a:ln/>
+        </p:spPr>
+        <p:txBody>
+          <a:bodyPr wrap="square" lIns="0" tIns="0" rIns="0" bIns="0" rtlCol="0" anchor="t"/>
+          <a:lstStyle/>
+          <a:p>
+            <a:pPr indent="0" marL="0">
+              <a:buNone/>
             </a:pPr>
             <a:r>
               <a:rPr lang="en-US" sz="1400" dirty="0">
                 <a:solidFill>
+                  <a:schemeClr val="bg1"/>
+                </a:solidFill>
+              </a:rPr>
+              <a:t>Taxa de resposta no WhatsApp</a:t>
+            </a:r>
+            <a:endParaRPr lang="en-US" sz="1400" dirty="0"/>
+          </a:p>
+        </p:txBody>
+      </p:sp>
+      <p:sp>
+        <p:nvSpPr>
+          <p:cNvPr id="10" name="Indicador fonte 2"/>
+          <p:cNvSpPr txBox="1"/>
+          <p:nvPr/>
+        </p:nvSpPr>
+        <p:spPr>
+          <a:xfrm>
+            <a:off x="4572000" y="3154680"/>
+            <a:ext cx="2926080" cy="274320"/>
+          </a:xfrm>
+          <a:prstGeom prst="rect">
+            <a:avLst/>
+          </a:prstGeom>
+          <a:noFill/>
+          <a:ln/>
+        </p:spPr>
+        <p:txBody>
+          <a:bodyPr wrap="square" lIns="0" tIns="0" rIns="0" bIns="0" rtlCol="0" anchor="t"/>
+          <a:lstStyle/>
+          <a:p>
+            <a:pPr indent="0" marL="0">
+              <a:buNone/>
+            </a:pPr>
+            <a:r>
+              <a:rPr lang="en-US" sz="1100" i="1" dirty="0">
+                <a:solidFill>
+                  <a:schemeClr val="bg2"/>
+                </a:solidFill>
+              </a:rPr>
+              <a:t>Plano Limbo</a:t>
+            </a:r>
+            <a:endParaRPr lang="en-US" sz="1100" dirty="0"/>
+          </a:p>
+        </p:txBody>
+      </p:sp>
+      <p:sp>
+        <p:nvSpPr>
+          <p:cNvPr id="11" name="Indicador 3"/>
+          <p:cNvSpPr/>
+          <p:nvPr/>
+        </p:nvSpPr>
+        <p:spPr>
+          <a:xfrm>
+            <a:off x="8046720" y="1554480"/>
+            <a:ext cx="3474720" cy="1965960"/>
+          </a:xfrm>
+          <a:prstGeom prst="roundRect">
+            <a:avLst>
+              <a:gd name="adj" fmla="val 5581"/>
+            </a:avLst>
+          </a:prstGeom>
+          <a:solidFill>
+            <a:schemeClr val="bg2"/>
+          </a:solidFill>
+          <a:ln/>
+        </p:spPr>
+      </p:sp>
+      <p:sp>
+        <p:nvSpPr>
+          <p:cNvPr id="12" name="Indicador valor 3"/>
+          <p:cNvSpPr txBox="1"/>
+          <p:nvPr/>
+        </p:nvSpPr>
+        <p:spPr>
+          <a:xfrm>
+            <a:off x="8321040" y="1737360"/>
+            <a:ext cx="2926080" cy="731520"/>
+          </a:xfrm>
+          <a:prstGeom prst="rect">
+            <a:avLst/>
+          </a:prstGeom>
+          <a:noFill/>
+          <a:ln/>
+        </p:spPr>
+        <p:txBody>
+          <a:bodyPr wrap="square" lIns="0" tIns="0" rIns="0" bIns="0" rtlCol="0" anchor="t"/>
+          <a:lstStyle/>
+          <a:p>
+            <a:pPr indent="0" marL="0">
+              <a:buNone/>
+            </a:pPr>
+            <a:r>
+              <a:rPr lang="en-US" sz="3600" b="1" dirty="0">
+                <a:solidFill>
+                  <a:schemeClr val="accent1"/>
+                </a:solidFill>
+              </a:rPr>
+              <a:t>10%</a:t>
+            </a:r>
+            <a:endParaRPr lang="en-US" sz="3600" dirty="0"/>
+          </a:p>
+        </p:txBody>
+      </p:sp>
+      <p:sp>
+        <p:nvSpPr>
+          <p:cNvPr id="13" name="Indicador nome 3"/>
+          <p:cNvSpPr txBox="1"/>
+          <p:nvPr/>
+        </p:nvSpPr>
+        <p:spPr>
+          <a:xfrm>
+            <a:off x="8321040" y="2514600"/>
+            <a:ext cx="2926080" cy="640080"/>
+          </a:xfrm>
+          <a:prstGeom prst="rect">
+            <a:avLst/>
+          </a:prstGeom>
+          <a:noFill/>
+          <a:ln/>
+        </p:spPr>
+        <p:txBody>
+          <a:bodyPr wrap="square" lIns="0" tIns="0" rIns="0" bIns="0" rtlCol="0" anchor="t"/>
+          <a:lstStyle/>
+          <a:p>
+            <a:pPr indent="0" marL="0">
+              <a:buNone/>
+            </a:pPr>
+            <a:r>
+              <a:rPr lang="en-US" sz="1400" dirty="0">
+                <a:solidFill>
                   <a:schemeClr val="tx1"/>
                 </a:solidFill>
               </a:rPr>
-              <a:t>Validar a divisão: uma SDR com site, Google e Ledson; a outra com feiras, eventos e Plano Limbo</a:t>
+              <a:t>Taxa de agendamento sobre contatados</a:t>
             </a:r>
             <a:endParaRPr lang="en-US" sz="1400" dirty="0"/>
           </a:p>
-          <a:p>
-            <a:pPr marL="342900" indent="-342900">
-              <a:spcAft>
-                <a:spcPts val="600"/>
-              </a:spcAft>
-              <a:buSzPct val="100000"/>
-              <a:buFont typeface="+mj-lt"/>
-              <a:buAutoNum type="arabicPeriod" startAt="1"/>
+        </p:txBody>
+      </p:sp>
+      <p:sp>
+        <p:nvSpPr>
+          <p:cNvPr id="14" name="Indicador fonte 3"/>
+          <p:cNvSpPr txBox="1"/>
+          <p:nvPr/>
+        </p:nvSpPr>
+        <p:spPr>
+          <a:xfrm>
+            <a:off x="8321040" y="3154680"/>
+            <a:ext cx="2926080" cy="274320"/>
+          </a:xfrm>
+          <a:prstGeom prst="rect">
+            <a:avLst/>
+          </a:prstGeom>
+          <a:noFill/>
+          <a:ln/>
+        </p:spPr>
+        <p:txBody>
+          <a:bodyPr wrap="square" lIns="0" tIns="0" rIns="0" bIns="0" rtlCol="0" anchor="t"/>
+          <a:lstStyle/>
+          <a:p>
+            <a:pPr indent="0" marL="0">
+              <a:buNone/>
+            </a:pPr>
+            <a:r>
+              <a:rPr lang="en-US" sz="1100" i="1" dirty="0">
+                <a:solidFill>
+                  <a:srgbClr val="7A7A7A"/>
+                </a:solidFill>
+              </a:rPr>
+              <a:t>Plano Limbo</a:t>
+            </a:r>
+            <a:endParaRPr lang="en-US" sz="1100" dirty="0"/>
+          </a:p>
+        </p:txBody>
+      </p:sp>
+      <p:sp>
+        <p:nvSpPr>
+          <p:cNvPr id="15" name="Indicador 4"/>
+          <p:cNvSpPr/>
+          <p:nvPr/>
+        </p:nvSpPr>
+        <p:spPr>
+          <a:xfrm>
+            <a:off x="548640" y="3703320"/>
+            <a:ext cx="3474720" cy="1965960"/>
+          </a:xfrm>
+          <a:prstGeom prst="roundRect">
+            <a:avLst>
+              <a:gd name="adj" fmla="val 5581"/>
+            </a:avLst>
+          </a:prstGeom>
+          <a:solidFill>
+            <a:schemeClr val="tx2"/>
+          </a:solidFill>
+          <a:ln/>
+        </p:spPr>
+      </p:sp>
+      <p:sp>
+        <p:nvSpPr>
+          <p:cNvPr id="16" name="Indicador valor 4"/>
+          <p:cNvSpPr txBox="1"/>
+          <p:nvPr/>
+        </p:nvSpPr>
+        <p:spPr>
+          <a:xfrm>
+            <a:off x="822960" y="3886200"/>
+            <a:ext cx="2926080" cy="731520"/>
+          </a:xfrm>
+          <a:prstGeom prst="rect">
+            <a:avLst/>
+          </a:prstGeom>
+          <a:noFill/>
+          <a:ln/>
+        </p:spPr>
+        <p:txBody>
+          <a:bodyPr wrap="square" lIns="0" tIns="0" rIns="0" bIns="0" rtlCol="0" anchor="t"/>
+          <a:lstStyle/>
+          <a:p>
+            <a:pPr indent="0" marL="0">
+              <a:buNone/>
+            </a:pPr>
+            <a:r>
+              <a:rPr lang="en-US" sz="3600" b="1" dirty="0">
+                <a:solidFill>
+                  <a:schemeClr val="accent2"/>
+                </a:solidFill>
+              </a:rPr>
+              <a:t>30%</a:t>
+            </a:r>
+            <a:endParaRPr lang="en-US" sz="3600" dirty="0"/>
+          </a:p>
+        </p:txBody>
+      </p:sp>
+      <p:sp>
+        <p:nvSpPr>
+          <p:cNvPr id="17" name="Indicador nome 4"/>
+          <p:cNvSpPr txBox="1"/>
+          <p:nvPr/>
+        </p:nvSpPr>
+        <p:spPr>
+          <a:xfrm>
+            <a:off x="822960" y="4663440"/>
+            <a:ext cx="2926080" cy="640080"/>
+          </a:xfrm>
+          <a:prstGeom prst="rect">
+            <a:avLst/>
+          </a:prstGeom>
+          <a:noFill/>
+          <a:ln/>
+        </p:spPr>
+        <p:txBody>
+          <a:bodyPr wrap="square" lIns="0" tIns="0" rIns="0" bIns="0" rtlCol="0" anchor="t"/>
+          <a:lstStyle/>
+          <a:p>
+            <a:pPr indent="0" marL="0">
+              <a:buNone/>
             </a:pPr>
             <a:r>
               <a:rPr lang="en-US" sz="1400" dirty="0">
                 <a:solidFill>
+                  <a:schemeClr val="bg1"/>
+                </a:solidFill>
+              </a:rPr>
+              <a:t>Conversão em MQL dos leads com conversa</a:t>
+            </a:r>
+            <a:endParaRPr lang="en-US" sz="1400" dirty="0"/>
+          </a:p>
+        </p:txBody>
+      </p:sp>
+      <p:sp>
+        <p:nvSpPr>
+          <p:cNvPr id="18" name="Indicador fonte 4"/>
+          <p:cNvSpPr txBox="1"/>
+          <p:nvPr/>
+        </p:nvSpPr>
+        <p:spPr>
+          <a:xfrm>
+            <a:off x="822960" y="5303520"/>
+            <a:ext cx="2926080" cy="274320"/>
+          </a:xfrm>
+          <a:prstGeom prst="rect">
+            <a:avLst/>
+          </a:prstGeom>
+          <a:noFill/>
+          <a:ln/>
+        </p:spPr>
+        <p:txBody>
+          <a:bodyPr wrap="square" lIns="0" tIns="0" rIns="0" bIns="0" rtlCol="0" anchor="t"/>
+          <a:lstStyle/>
+          <a:p>
+            <a:pPr indent="0" marL="0">
+              <a:buNone/>
+            </a:pPr>
+            <a:r>
+              <a:rPr lang="en-US" sz="1100" i="1" dirty="0">
+                <a:solidFill>
+                  <a:schemeClr val="bg2"/>
+                </a:solidFill>
+              </a:rPr>
+              <a:t>Plano Limbo</a:t>
+            </a:r>
+            <a:endParaRPr lang="en-US" sz="1100" dirty="0"/>
+          </a:p>
+        </p:txBody>
+      </p:sp>
+      <p:sp>
+        <p:nvSpPr>
+          <p:cNvPr id="19" name="Indicador 5"/>
+          <p:cNvSpPr/>
+          <p:nvPr/>
+        </p:nvSpPr>
+        <p:spPr>
+          <a:xfrm>
+            <a:off x="4297680" y="3703320"/>
+            <a:ext cx="3474720" cy="1965960"/>
+          </a:xfrm>
+          <a:prstGeom prst="roundRect">
+            <a:avLst>
+              <a:gd name="adj" fmla="val 5581"/>
+            </a:avLst>
+          </a:prstGeom>
+          <a:solidFill>
+            <a:schemeClr val="bg2"/>
+          </a:solidFill>
+          <a:ln/>
+        </p:spPr>
+      </p:sp>
+      <p:sp>
+        <p:nvSpPr>
+          <p:cNvPr id="20" name="Indicador valor 5"/>
+          <p:cNvSpPr txBox="1"/>
+          <p:nvPr/>
+        </p:nvSpPr>
+        <p:spPr>
+          <a:xfrm>
+            <a:off x="4572000" y="3886200"/>
+            <a:ext cx="2926080" cy="731520"/>
+          </a:xfrm>
+          <a:prstGeom prst="rect">
+            <a:avLst/>
+          </a:prstGeom>
+          <a:noFill/>
+          <a:ln/>
+        </p:spPr>
+        <p:txBody>
+          <a:bodyPr wrap="square" lIns="0" tIns="0" rIns="0" bIns="0" rtlCol="0" anchor="t"/>
+          <a:lstStyle/>
+          <a:p>
+            <a:pPr indent="0" marL="0">
+              <a:buNone/>
+            </a:pPr>
+            <a:r>
+              <a:rPr lang="en-US" sz="3600" b="1" dirty="0">
+                <a:solidFill>
+                  <a:schemeClr val="accent1"/>
+                </a:solidFill>
+              </a:rPr>
+              <a:t>80%</a:t>
+            </a:r>
+            <a:endParaRPr lang="en-US" sz="3600" dirty="0"/>
+          </a:p>
+        </p:txBody>
+      </p:sp>
+      <p:sp>
+        <p:nvSpPr>
+          <p:cNvPr id="21" name="Indicador nome 5"/>
+          <p:cNvSpPr txBox="1"/>
+          <p:nvPr/>
+        </p:nvSpPr>
+        <p:spPr>
+          <a:xfrm>
+            <a:off x="4572000" y="4663440"/>
+            <a:ext cx="2926080" cy="640080"/>
+          </a:xfrm>
+          <a:prstGeom prst="rect">
+            <a:avLst/>
+          </a:prstGeom>
+          <a:noFill/>
+          <a:ln/>
+        </p:spPr>
+        <p:txBody>
+          <a:bodyPr wrap="square" lIns="0" tIns="0" rIns="0" bIns="0" rtlCol="0" anchor="t"/>
+          <a:lstStyle/>
+          <a:p>
+            <a:pPr indent="0" marL="0">
+              <a:buNone/>
+            </a:pPr>
+            <a:r>
+              <a:rPr lang="en-US" sz="1400" dirty="0">
+                <a:solidFill>
                   <a:schemeClr val="tx1"/>
                 </a:solidFill>
               </a:rPr>
-              <a:t>Rebalancear os 873 leads parados da fila da Pryscila</a:t>
+              <a:t>Comparecimento às reuniões agendadas</a:t>
             </a:r>
             <a:endParaRPr lang="en-US" sz="1400" dirty="0"/>
           </a:p>
-          <a:p>
-            <a:pPr marL="342900" indent="-342900">
-              <a:spcAft>
-                <a:spcPts val="600"/>
-              </a:spcAft>
-              <a:buSzPct val="100000"/>
-              <a:buFont typeface="+mj-lt"/>
-              <a:buAutoNum type="arabicPeriod" startAt="1"/>
+        </p:txBody>
+      </p:sp>
+      <p:sp>
+        <p:nvSpPr>
+          <p:cNvPr id="22" name="Indicador fonte 5"/>
+          <p:cNvSpPr txBox="1"/>
+          <p:nvPr/>
+        </p:nvSpPr>
+        <p:spPr>
+          <a:xfrm>
+            <a:off x="4572000" y="5303520"/>
+            <a:ext cx="2926080" cy="274320"/>
+          </a:xfrm>
+          <a:prstGeom prst="rect">
+            <a:avLst/>
+          </a:prstGeom>
+          <a:noFill/>
+          <a:ln/>
+        </p:spPr>
+        <p:txBody>
+          <a:bodyPr wrap="square" lIns="0" tIns="0" rIns="0" bIns="0" rtlCol="0" anchor="t"/>
+          <a:lstStyle/>
+          <a:p>
+            <a:pPr indent="0" marL="0">
+              <a:buNone/>
+            </a:pPr>
+            <a:r>
+              <a:rPr lang="en-US" sz="1100" i="1" dirty="0">
+                <a:solidFill>
+                  <a:srgbClr val="7A7A7A"/>
+                </a:solidFill>
+              </a:rPr>
+              <a:t>sugestão</a:t>
+            </a:r>
+            <a:endParaRPr lang="en-US" sz="1100" dirty="0"/>
+          </a:p>
+        </p:txBody>
+      </p:sp>
+      <p:sp>
+        <p:nvSpPr>
+          <p:cNvPr id="23" name="Indicador 6"/>
+          <p:cNvSpPr/>
+          <p:nvPr/>
+        </p:nvSpPr>
+        <p:spPr>
+          <a:xfrm>
+            <a:off x="8046720" y="3703320"/>
+            <a:ext cx="3474720" cy="1965960"/>
+          </a:xfrm>
+          <a:prstGeom prst="roundRect">
+            <a:avLst>
+              <a:gd name="adj" fmla="val 5581"/>
+            </a:avLst>
+          </a:prstGeom>
+          <a:solidFill>
+            <a:schemeClr val="tx2"/>
+          </a:solidFill>
+          <a:ln/>
+        </p:spPr>
+      </p:sp>
+      <p:sp>
+        <p:nvSpPr>
+          <p:cNvPr id="24" name="Indicador valor 6"/>
+          <p:cNvSpPr txBox="1"/>
+          <p:nvPr/>
+        </p:nvSpPr>
+        <p:spPr>
+          <a:xfrm>
+            <a:off x="8321040" y="3886200"/>
+            <a:ext cx="2926080" cy="731520"/>
+          </a:xfrm>
+          <a:prstGeom prst="rect">
+            <a:avLst/>
+          </a:prstGeom>
+          <a:noFill/>
+          <a:ln/>
+        </p:spPr>
+        <p:txBody>
+          <a:bodyPr wrap="square" lIns="0" tIns="0" rIns="0" bIns="0" rtlCol="0" anchor="t"/>
+          <a:lstStyle/>
+          <a:p>
+            <a:pPr indent="0" marL="0">
+              <a:buNone/>
+            </a:pPr>
+            <a:r>
+              <a:rPr lang="en-US" sz="3600" b="1" dirty="0">
+                <a:solidFill>
+                  <a:schemeClr val="accent2"/>
+                </a:solidFill>
+              </a:rPr>
+              <a:t>zero</a:t>
+            </a:r>
+            <a:endParaRPr lang="en-US" sz="3600" dirty="0"/>
+          </a:p>
+        </p:txBody>
+      </p:sp>
+      <p:sp>
+        <p:nvSpPr>
+          <p:cNvPr id="25" name="Indicador nome 6"/>
+          <p:cNvSpPr txBox="1"/>
+          <p:nvPr/>
+        </p:nvSpPr>
+        <p:spPr>
+          <a:xfrm>
+            <a:off x="8321040" y="4663440"/>
+            <a:ext cx="2926080" cy="640080"/>
+          </a:xfrm>
+          <a:prstGeom prst="rect">
+            <a:avLst/>
+          </a:prstGeom>
+          <a:noFill/>
+          <a:ln/>
+        </p:spPr>
+        <p:txBody>
+          <a:bodyPr wrap="square" lIns="0" tIns="0" rIns="0" bIns="0" rtlCol="0" anchor="t"/>
+          <a:lstStyle/>
+          <a:p>
+            <a:pPr indent="0" marL="0">
+              <a:buNone/>
             </a:pPr>
             <a:r>
               <a:rPr lang="en-US" sz="1400" dirty="0">
                 <a:solidFill>
-                  <a:schemeClr val="tx1"/>
-                </a:solidFill>
-              </a:rPr>
-              <a:t>Criar no Salesforce os campos de temperatura e propósito</a:t>
+                  <a:schemeClr val="bg1"/>
+                </a:solidFill>
+              </a:rPr>
+              <a:t>Leads sem status ou sem próxima tarefa</a:t>
             </a:r>
             <a:endParaRPr lang="en-US" sz="1400" dirty="0"/>
           </a:p>
-          <a:p>
-            <a:pPr marL="342900" indent="-342900">
-              <a:spcAft>
-                <a:spcPts val="600"/>
-              </a:spcAft>
-              <a:buSzPct val="100000"/>
-              <a:buFont typeface="+mj-lt"/>
-              <a:buAutoNum type="arabicPeriod" startAt="1"/>
-            </a:pPr>
-            <a:r>
-              <a:rPr lang="en-US" sz="1400" dirty="0">
-                <a:solidFill>
-                  <a:schemeClr val="tx1"/>
-                </a:solidFill>
-              </a:rPr>
-              <a:t>Salvar os WhatsApps como respostas rápidas</a:t>
-            </a:r>
-            <a:endParaRPr lang="en-US" sz="1400" dirty="0"/>
-          </a:p>
-          <a:p>
-            <a:pPr marL="342900" indent="-342900">
-              <a:spcAft>
-                <a:spcPts val="600"/>
-              </a:spcAft>
-              <a:buSzPct val="100000"/>
-              <a:buFont typeface="+mj-lt"/>
-              <a:buAutoNum type="arabicPeriod" startAt="1"/>
-            </a:pPr>
-            <a:r>
-              <a:rPr lang="en-US" sz="1400" dirty="0">
-                <a:solidFill>
-                  <a:schemeClr val="tx1"/>
-                </a:solidFill>
-              </a:rPr>
-              <a:t>Roleplay de cada script com o comercial</a:t>
-            </a:r>
-            <a:endParaRPr lang="en-US" sz="1400" dirty="0"/>
-          </a:p>
-          <a:p>
-            <a:pPr marL="342900" indent="-342900">
-              <a:spcAft>
-                <a:spcPts val="600"/>
-              </a:spcAft>
-              <a:buSzPct val="100000"/>
-              <a:buFont typeface="+mj-lt"/>
-              <a:buAutoNum type="arabicPeriod" startAt="1"/>
-            </a:pPr>
-            <a:r>
-              <a:rPr lang="en-US" sz="1400" dirty="0">
-                <a:solidFill>
-                  <a:schemeClr val="tx1"/>
-                </a:solidFill>
-              </a:rPr>
-              <a:t>Revisar os indicadores em 2 semanas</a:t>
-            </a:r>
-            <a:endParaRPr lang="en-US" sz="1400" dirty="0"/>
+        </p:txBody>
+      </p:sp>
+      <p:sp>
+        <p:nvSpPr>
+          <p:cNvPr id="26" name="Indicador fonte 6"/>
+          <p:cNvSpPr txBox="1"/>
+          <p:nvPr/>
+        </p:nvSpPr>
+        <p:spPr>
+          <a:xfrm>
+            <a:off x="8321040" y="5303520"/>
+            <a:ext cx="2926080" cy="274320"/>
+          </a:xfrm>
+          <a:prstGeom prst="rect">
+            <a:avLst/>
+          </a:prstGeom>
+          <a:noFill/>
+          <a:ln/>
+        </p:spPr>
+        <p:txBody>
+          <a:bodyPr wrap="square" lIns="0" tIns="0" rIns="0" bIns="0" rtlCol="0" anchor="t"/>
+          <a:lstStyle/>
+          <a:p>
+            <a:pPr indent="0" marL="0">
+              <a:buNone/>
+            </a:pPr>
+            <a:r>
+              <a:rPr lang="en-US" sz="1100" i="1" dirty="0">
+                <a:solidFill>
+                  <a:schemeClr val="bg2"/>
+                </a:solidFill>
+              </a:rPr>
+              <a:t>sugestão</a:t>
+            </a:r>
+            <a:endParaRPr lang="en-US" sz="1100" dirty="0"/>
+          </a:p>
+        </p:txBody>
+      </p:sp>
+      <p:sp>
+        <p:nvSpPr>
+          <p:cNvPr id="27" name="Revisão"/>
+          <p:cNvSpPr txBox="1"/>
+          <p:nvPr/>
+        </p:nvSpPr>
+        <p:spPr>
+          <a:xfrm>
+            <a:off x="548640" y="5897880"/>
+            <a:ext cx="11064240" cy="320040"/>
+          </a:xfrm>
+          <a:prstGeom prst="rect">
+            <a:avLst/>
+          </a:prstGeom>
+          <a:noFill/>
+          <a:ln/>
+        </p:spPr>
+        <p:txBody>
+          <a:bodyPr wrap="square" lIns="0" tIns="0" rIns="0" bIns="0" rtlCol="0" anchor="t"/>
+          <a:lstStyle/>
+          <a:p>
+            <a:pPr indent="0" marL="0">
+              <a:buNone/>
+            </a:pPr>
+            <a:r>
+              <a:rPr lang="en-US" sz="1300" dirty="0">
+                <a:solidFill>
+                  <a:schemeClr val="tx2"/>
+                </a:solidFill>
+              </a:rPr>
+              <a:t>Revisão semanal: números da Pryscila e da Kelly lado a lado e 2 ou 3 conversas ouvidas juntas.</a:t>
+            </a:r>
+            <a:endParaRPr lang="en-US" sz="1300" dirty="0"/>
           </a:p>
         </p:txBody>
       </p:sp>
@@ -7223,6 +7167,704 @@
       </p:grpSpPr>
       <p:sp>
         <p:nvSpPr>
+          <p:cNvPr id="2" name="Text 1"/>
+          <p:cNvSpPr/>
+          <p:nvPr>
+            <p:ph idx="102" type="title" hasCustomPrompt="1"/>
+          </p:nvPr>
+        </p:nvSpPr>
+        <p:spPr>
+          <a:xfrm>
+            <a:off x="548640" y="411480"/>
+            <a:ext cx="11064240" cy="822960"/>
+          </a:xfrm>
+          <a:prstGeom prst="rect">
+            <a:avLst/>
+          </a:prstGeom>
+          <a:noFill/>
+          <a:ln/>
+        </p:spPr>
+        <p:txBody>
+          <a:bodyPr wrap="square" lIns="0" tIns="0" rIns="0" bIns="0" rtlCol="0" anchor="ctr"/>
+          <a:lstStyle/>
+          <a:p>
+            <a:pPr algn="l" indent="0" marL="0">
+              <a:buNone/>
+            </a:pPr>
+            <a:r>
+              <a:rPr lang="en-US" sz="3200" b="1" dirty="0">
+                <a:solidFill>
+                  <a:schemeClr val="tx1"/>
+                </a:solidFill>
+              </a:rPr>
+              <a:t>Rotina do dia e próximos passos</a:t>
+            </a:r>
+            <a:endParaRPr lang="en-US" sz="3200" dirty="0"/>
+          </a:p>
+        </p:txBody>
+      </p:sp>
+      <p:sp>
+        <p:nvSpPr>
+          <p:cNvPr id="3" name="Rotina título"/>
+          <p:cNvSpPr txBox="1"/>
+          <p:nvPr/>
+        </p:nvSpPr>
+        <p:spPr>
+          <a:xfrm>
+            <a:off x="548640" y="1554480"/>
+            <a:ext cx="5486400" cy="411480"/>
+          </a:xfrm>
+          <a:prstGeom prst="rect">
+            <a:avLst/>
+          </a:prstGeom>
+          <a:noFill/>
+          <a:ln/>
+        </p:spPr>
+        <p:txBody>
+          <a:bodyPr wrap="square" lIns="0" tIns="0" rIns="0" bIns="0" rtlCol="0" anchor="t"/>
+          <a:lstStyle/>
+          <a:p>
+            <a:pPr indent="0" marL="0">
+              <a:buNone/>
+            </a:pPr>
+            <a:r>
+              <a:rPr lang="en-US" sz="2000" b="1" dirty="0">
+                <a:solidFill>
+                  <a:schemeClr val="accent1"/>
+                </a:solidFill>
+              </a:rPr>
+              <a:t>Rotina sugerida</a:t>
+            </a:r>
+            <a:endParaRPr lang="en-US" sz="2000" dirty="0"/>
+          </a:p>
+        </p:txBody>
+      </p:sp>
+      <p:sp>
+        <p:nvSpPr>
+          <p:cNvPr id="4" name="Rotina hora 1"/>
+          <p:cNvSpPr txBox="1"/>
+          <p:nvPr/>
+        </p:nvSpPr>
+        <p:spPr>
+          <a:xfrm>
+            <a:off x="548640" y="2103120"/>
+            <a:ext cx="1097280" cy="548640"/>
+          </a:xfrm>
+          <a:prstGeom prst="rect">
+            <a:avLst/>
+          </a:prstGeom>
+          <a:noFill/>
+          <a:ln/>
+        </p:spPr>
+        <p:txBody>
+          <a:bodyPr wrap="square" lIns="0" tIns="0" rIns="0" bIns="0" rtlCol="0" anchor="ctr"/>
+          <a:lstStyle/>
+          <a:p>
+            <a:pPr indent="0" marL="0">
+              <a:buNone/>
+            </a:pPr>
+            <a:r>
+              <a:rPr lang="en-US" sz="1800" b="1" dirty="0">
+                <a:solidFill>
+                  <a:schemeClr val="accent4"/>
+                </a:solidFill>
+              </a:rPr>
+              <a:t>8h30</a:t>
+            </a:r>
+            <a:endParaRPr lang="en-US" sz="1800" dirty="0"/>
+          </a:p>
+        </p:txBody>
+      </p:sp>
+      <p:sp>
+        <p:nvSpPr>
+          <p:cNvPr id="5" name="Rotina atividade 1"/>
+          <p:cNvSpPr txBox="1"/>
+          <p:nvPr/>
+        </p:nvSpPr>
+        <p:spPr>
+          <a:xfrm>
+            <a:off x="1691640" y="2103120"/>
+            <a:ext cx="4206240" cy="548640"/>
+          </a:xfrm>
+          <a:prstGeom prst="rect">
+            <a:avLst/>
+          </a:prstGeom>
+          <a:noFill/>
+          <a:ln/>
+        </p:spPr>
+        <p:txBody>
+          <a:bodyPr wrap="square" lIns="0" tIns="0" rIns="0" bIns="0" rtlCol="0" anchor="ctr"/>
+          <a:lstStyle/>
+          <a:p>
+            <a:pPr indent="0" marL="0">
+              <a:buNone/>
+            </a:pPr>
+            <a:r>
+              <a:rPr lang="en-US" sz="1500" dirty="0">
+                <a:solidFill>
+                  <a:schemeClr val="tx1"/>
+                </a:solidFill>
+              </a:rPr>
+              <a:t>Fila da noite, quentes primeiro</a:t>
+            </a:r>
+            <a:endParaRPr lang="en-US" sz="1500" dirty="0"/>
+          </a:p>
+        </p:txBody>
+      </p:sp>
+      <p:sp>
+        <p:nvSpPr>
+          <p:cNvPr id="6" name="Rotina hora 2"/>
+          <p:cNvSpPr txBox="1"/>
+          <p:nvPr/>
+        </p:nvSpPr>
+        <p:spPr>
+          <a:xfrm>
+            <a:off x="548640" y="2852928"/>
+            <a:ext cx="1097280" cy="548640"/>
+          </a:xfrm>
+          <a:prstGeom prst="rect">
+            <a:avLst/>
+          </a:prstGeom>
+          <a:noFill/>
+          <a:ln/>
+        </p:spPr>
+        <p:txBody>
+          <a:bodyPr wrap="square" lIns="0" tIns="0" rIns="0" bIns="0" rtlCol="0" anchor="ctr"/>
+          <a:lstStyle/>
+          <a:p>
+            <a:pPr indent="0" marL="0">
+              <a:buNone/>
+            </a:pPr>
+            <a:r>
+              <a:rPr lang="en-US" sz="1800" b="1" dirty="0">
+                <a:solidFill>
+                  <a:schemeClr val="accent4"/>
+                </a:solidFill>
+              </a:rPr>
+              <a:t>9h</a:t>
+            </a:r>
+            <a:endParaRPr lang="en-US" sz="1800" dirty="0"/>
+          </a:p>
+        </p:txBody>
+      </p:sp>
+      <p:sp>
+        <p:nvSpPr>
+          <p:cNvPr id="7" name="Rotina atividade 2"/>
+          <p:cNvSpPr txBox="1"/>
+          <p:nvPr/>
+        </p:nvSpPr>
+        <p:spPr>
+          <a:xfrm>
+            <a:off x="1691640" y="2852928"/>
+            <a:ext cx="4206240" cy="548640"/>
+          </a:xfrm>
+          <a:prstGeom prst="rect">
+            <a:avLst/>
+          </a:prstGeom>
+          <a:noFill/>
+          <a:ln/>
+        </p:spPr>
+        <p:txBody>
+          <a:bodyPr wrap="square" lIns="0" tIns="0" rIns="0" bIns="0" rtlCol="0" anchor="ctr"/>
+          <a:lstStyle/>
+          <a:p>
+            <a:pPr indent="0" marL="0">
+              <a:buNone/>
+            </a:pPr>
+            <a:r>
+              <a:rPr lang="en-US" sz="1500" dirty="0">
+                <a:solidFill>
+                  <a:schemeClr val="tx1"/>
+                </a:solidFill>
+              </a:rPr>
+              <a:t>Ligações e qualificações</a:t>
+            </a:r>
+            <a:endParaRPr lang="en-US" sz="1500" dirty="0"/>
+          </a:p>
+        </p:txBody>
+      </p:sp>
+      <p:sp>
+        <p:nvSpPr>
+          <p:cNvPr id="8" name="Rotina hora 3"/>
+          <p:cNvSpPr txBox="1"/>
+          <p:nvPr/>
+        </p:nvSpPr>
+        <p:spPr>
+          <a:xfrm>
+            <a:off x="548640" y="3602736"/>
+            <a:ext cx="1097280" cy="548640"/>
+          </a:xfrm>
+          <a:prstGeom prst="rect">
+            <a:avLst/>
+          </a:prstGeom>
+          <a:noFill/>
+          <a:ln/>
+        </p:spPr>
+        <p:txBody>
+          <a:bodyPr wrap="square" lIns="0" tIns="0" rIns="0" bIns="0" rtlCol="0" anchor="ctr"/>
+          <a:lstStyle/>
+          <a:p>
+            <a:pPr indent="0" marL="0">
+              <a:buNone/>
+            </a:pPr>
+            <a:r>
+              <a:rPr lang="en-US" sz="1800" b="1" dirty="0">
+                <a:solidFill>
+                  <a:schemeClr val="accent4"/>
+                </a:solidFill>
+              </a:rPr>
+              <a:t>13h30</a:t>
+            </a:r>
+            <a:endParaRPr lang="en-US" sz="1800" dirty="0"/>
+          </a:p>
+        </p:txBody>
+      </p:sp>
+      <p:sp>
+        <p:nvSpPr>
+          <p:cNvPr id="9" name="Rotina atividade 3"/>
+          <p:cNvSpPr txBox="1"/>
+          <p:nvPr/>
+        </p:nvSpPr>
+        <p:spPr>
+          <a:xfrm>
+            <a:off x="1691640" y="3602736"/>
+            <a:ext cx="4206240" cy="548640"/>
+          </a:xfrm>
+          <a:prstGeom prst="rect">
+            <a:avLst/>
+          </a:prstGeom>
+          <a:noFill/>
+          <a:ln/>
+        </p:spPr>
+        <p:txBody>
+          <a:bodyPr wrap="square" lIns="0" tIns="0" rIns="0" bIns="0" rtlCol="0" anchor="ctr"/>
+          <a:lstStyle/>
+          <a:p>
+            <a:pPr indent="0" marL="0">
+              <a:buNone/>
+            </a:pPr>
+            <a:r>
+              <a:rPr lang="en-US" sz="1500" dirty="0">
+                <a:solidFill>
+                  <a:schemeClr val="tx1"/>
+                </a:solidFill>
+              </a:rPr>
+              <a:t>Cadência e confirmações</a:t>
+            </a:r>
+            <a:endParaRPr lang="en-US" sz="1500" dirty="0"/>
+          </a:p>
+        </p:txBody>
+      </p:sp>
+      <p:sp>
+        <p:nvSpPr>
+          <p:cNvPr id="10" name="Rotina hora 4"/>
+          <p:cNvSpPr txBox="1"/>
+          <p:nvPr/>
+        </p:nvSpPr>
+        <p:spPr>
+          <a:xfrm>
+            <a:off x="548640" y="4352544"/>
+            <a:ext cx="1097280" cy="548640"/>
+          </a:xfrm>
+          <a:prstGeom prst="rect">
+            <a:avLst/>
+          </a:prstGeom>
+          <a:noFill/>
+          <a:ln/>
+        </p:spPr>
+        <p:txBody>
+          <a:bodyPr wrap="square" lIns="0" tIns="0" rIns="0" bIns="0" rtlCol="0" anchor="ctr"/>
+          <a:lstStyle/>
+          <a:p>
+            <a:pPr indent="0" marL="0">
+              <a:buNone/>
+            </a:pPr>
+            <a:r>
+              <a:rPr lang="en-US" sz="1800" b="1" dirty="0">
+                <a:solidFill>
+                  <a:schemeClr val="accent4"/>
+                </a:solidFill>
+              </a:rPr>
+              <a:t>16h</a:t>
+            </a:r>
+            <a:endParaRPr lang="en-US" sz="1800" dirty="0"/>
+          </a:p>
+        </p:txBody>
+      </p:sp>
+      <p:sp>
+        <p:nvSpPr>
+          <p:cNvPr id="11" name="Rotina atividade 4"/>
+          <p:cNvSpPr txBox="1"/>
+          <p:nvPr/>
+        </p:nvSpPr>
+        <p:spPr>
+          <a:xfrm>
+            <a:off x="1691640" y="4352544"/>
+            <a:ext cx="4206240" cy="548640"/>
+          </a:xfrm>
+          <a:prstGeom prst="rect">
+            <a:avLst/>
+          </a:prstGeom>
+          <a:noFill/>
+          <a:ln/>
+        </p:spPr>
+        <p:txBody>
+          <a:bodyPr wrap="square" lIns="0" tIns="0" rIns="0" bIns="0" rtlCol="0" anchor="ctr"/>
+          <a:lstStyle/>
+          <a:p>
+            <a:pPr indent="0" marL="0">
+              <a:buNone/>
+            </a:pPr>
+            <a:r>
+              <a:rPr lang="en-US" sz="1500" dirty="0">
+                <a:solidFill>
+                  <a:schemeClr val="tx1"/>
+                </a:solidFill>
+              </a:rPr>
+              <a:t>Novos leads e Plano Limbo</a:t>
+            </a:r>
+            <a:endParaRPr lang="en-US" sz="1500" dirty="0"/>
+          </a:p>
+        </p:txBody>
+      </p:sp>
+      <p:sp>
+        <p:nvSpPr>
+          <p:cNvPr id="12" name="Rotina hora 5"/>
+          <p:cNvSpPr txBox="1"/>
+          <p:nvPr/>
+        </p:nvSpPr>
+        <p:spPr>
+          <a:xfrm>
+            <a:off x="548640" y="5102352"/>
+            <a:ext cx="1097280" cy="548640"/>
+          </a:xfrm>
+          <a:prstGeom prst="rect">
+            <a:avLst/>
+          </a:prstGeom>
+          <a:noFill/>
+          <a:ln/>
+        </p:spPr>
+        <p:txBody>
+          <a:bodyPr wrap="square" lIns="0" tIns="0" rIns="0" bIns="0" rtlCol="0" anchor="ctr"/>
+          <a:lstStyle/>
+          <a:p>
+            <a:pPr indent="0" marL="0">
+              <a:buNone/>
+            </a:pPr>
+            <a:r>
+              <a:rPr lang="en-US" sz="1800" b="1" dirty="0">
+                <a:solidFill>
+                  <a:schemeClr val="accent4"/>
+                </a:solidFill>
+              </a:rPr>
+              <a:t>17h30</a:t>
+            </a:r>
+            <a:endParaRPr lang="en-US" sz="1800" dirty="0"/>
+          </a:p>
+        </p:txBody>
+      </p:sp>
+      <p:sp>
+        <p:nvSpPr>
+          <p:cNvPr id="13" name="Rotina atividade 5"/>
+          <p:cNvSpPr txBox="1"/>
+          <p:nvPr/>
+        </p:nvSpPr>
+        <p:spPr>
+          <a:xfrm>
+            <a:off x="1691640" y="5102352"/>
+            <a:ext cx="4206240" cy="548640"/>
+          </a:xfrm>
+          <a:prstGeom prst="rect">
+            <a:avLst/>
+          </a:prstGeom>
+          <a:noFill/>
+          <a:ln/>
+        </p:spPr>
+        <p:txBody>
+          <a:bodyPr wrap="square" lIns="0" tIns="0" rIns="0" bIns="0" rtlCol="0" anchor="ctr"/>
+          <a:lstStyle/>
+          <a:p>
+            <a:pPr indent="0" marL="0">
+              <a:buNone/>
+            </a:pPr>
+            <a:r>
+              <a:rPr lang="en-US" sz="1500" dirty="0">
+                <a:solidFill>
+                  <a:schemeClr val="tx1"/>
+                </a:solidFill>
+              </a:rPr>
+              <a:t>Salesforce em dia</a:t>
+            </a:r>
+            <a:endParaRPr lang="en-US" sz="1500" dirty="0"/>
+          </a:p>
+        </p:txBody>
+      </p:sp>
+      <p:sp>
+        <p:nvSpPr>
+          <p:cNvPr id="14" name="Próximos passos"/>
+          <p:cNvSpPr/>
+          <p:nvPr/>
+        </p:nvSpPr>
+        <p:spPr>
+          <a:xfrm>
+            <a:off x="6400800" y="1554480"/>
+            <a:ext cx="5212080" cy="4526280"/>
+          </a:xfrm>
+          <a:prstGeom prst="roundRect">
+            <a:avLst>
+              <a:gd name="adj" fmla="val 2424"/>
+            </a:avLst>
+          </a:prstGeom>
+          <a:solidFill>
+            <a:schemeClr val="bg2"/>
+          </a:solidFill>
+          <a:ln/>
+        </p:spPr>
+      </p:sp>
+      <p:sp>
+        <p:nvSpPr>
+          <p:cNvPr id="15" name="Próximos título"/>
+          <p:cNvSpPr txBox="1"/>
+          <p:nvPr/>
+        </p:nvSpPr>
+        <p:spPr>
+          <a:xfrm>
+            <a:off x="6720840" y="1783080"/>
+            <a:ext cx="4572000" cy="457200"/>
+          </a:xfrm>
+          <a:prstGeom prst="rect">
+            <a:avLst/>
+          </a:prstGeom>
+          <a:noFill/>
+          <a:ln/>
+        </p:spPr>
+        <p:txBody>
+          <a:bodyPr wrap="square" lIns="0" tIns="0" rIns="0" bIns="0" rtlCol="0" anchor="t"/>
+          <a:lstStyle/>
+          <a:p>
+            <a:pPr indent="0" marL="0">
+              <a:buNone/>
+            </a:pPr>
+            <a:r>
+              <a:rPr lang="en-US" sz="1800" b="1" dirty="0">
+                <a:solidFill>
+                  <a:schemeClr val="tx1"/>
+                </a:solidFill>
+              </a:rPr>
+              <a:t>Próximos passos</a:t>
+            </a:r>
+            <a:endParaRPr lang="en-US" sz="1800" dirty="0"/>
+          </a:p>
+        </p:txBody>
+      </p:sp>
+      <p:sp>
+        <p:nvSpPr>
+          <p:cNvPr id="16" name="Próximos lista"/>
+          <p:cNvSpPr txBox="1"/>
+          <p:nvPr/>
+        </p:nvSpPr>
+        <p:spPr>
+          <a:xfrm>
+            <a:off x="6720840" y="2377440"/>
+            <a:ext cx="4572000" cy="3566160"/>
+          </a:xfrm>
+          <a:prstGeom prst="rect">
+            <a:avLst/>
+          </a:prstGeom>
+          <a:noFill/>
+          <a:ln/>
+        </p:spPr>
+        <p:txBody>
+          <a:bodyPr wrap="square" lIns="0" tIns="0" rIns="0" bIns="0" rtlCol="0" anchor="t"/>
+          <a:lstStyle/>
+          <a:p>
+            <a:pPr marL="342900" indent="-342900">
+              <a:spcAft>
+                <a:spcPts val="600"/>
+              </a:spcAft>
+              <a:buSzPct val="100000"/>
+              <a:buFont typeface="+mj-lt"/>
+              <a:buAutoNum type="arabicPeriod" startAt="1"/>
+            </a:pPr>
+            <a:r>
+              <a:rPr lang="en-US" sz="1400" dirty="0">
+                <a:solidFill>
+                  <a:schemeClr val="tx1"/>
+                </a:solidFill>
+              </a:rPr>
+              <a:t>Validar a divisão: uma SDR com site, Google e Ledson; a outra com feiras, eventos e Plano Limbo</a:t>
+            </a:r>
+            <a:endParaRPr lang="en-US" sz="1400" dirty="0"/>
+          </a:p>
+          <a:p>
+            <a:pPr marL="342900" indent="-342900">
+              <a:spcAft>
+                <a:spcPts val="600"/>
+              </a:spcAft>
+              <a:buSzPct val="100000"/>
+              <a:buFont typeface="+mj-lt"/>
+              <a:buAutoNum type="arabicPeriod" startAt="1"/>
+            </a:pPr>
+            <a:r>
+              <a:rPr lang="en-US" sz="1400" dirty="0">
+                <a:solidFill>
+                  <a:schemeClr val="tx1"/>
+                </a:solidFill>
+              </a:rPr>
+              <a:t>Rebalancear os 873 leads parados da fila da Pryscila</a:t>
+            </a:r>
+            <a:endParaRPr lang="en-US" sz="1400" dirty="0"/>
+          </a:p>
+          <a:p>
+            <a:pPr marL="342900" indent="-342900">
+              <a:spcAft>
+                <a:spcPts val="600"/>
+              </a:spcAft>
+              <a:buSzPct val="100000"/>
+              <a:buFont typeface="+mj-lt"/>
+              <a:buAutoNum type="arabicPeriod" startAt="1"/>
+            </a:pPr>
+            <a:r>
+              <a:rPr lang="en-US" sz="1400" dirty="0">
+                <a:solidFill>
+                  <a:schemeClr val="tx1"/>
+                </a:solidFill>
+              </a:rPr>
+              <a:t>Criar no Salesforce os campos de temperatura e propósito</a:t>
+            </a:r>
+            <a:endParaRPr lang="en-US" sz="1400" dirty="0"/>
+          </a:p>
+          <a:p>
+            <a:pPr marL="342900" indent="-342900">
+              <a:spcAft>
+                <a:spcPts val="600"/>
+              </a:spcAft>
+              <a:buSzPct val="100000"/>
+              <a:buFont typeface="+mj-lt"/>
+              <a:buAutoNum type="arabicPeriod" startAt="1"/>
+            </a:pPr>
+            <a:r>
+              <a:rPr lang="en-US" sz="1400" dirty="0">
+                <a:solidFill>
+                  <a:schemeClr val="tx1"/>
+                </a:solidFill>
+              </a:rPr>
+              <a:t>Salvar os WhatsApps como respostas rápidas</a:t>
+            </a:r>
+            <a:endParaRPr lang="en-US" sz="1400" dirty="0"/>
+          </a:p>
+          <a:p>
+            <a:pPr marL="342900" indent="-342900">
+              <a:spcAft>
+                <a:spcPts val="600"/>
+              </a:spcAft>
+              <a:buSzPct val="100000"/>
+              <a:buFont typeface="+mj-lt"/>
+              <a:buAutoNum type="arabicPeriod" startAt="1"/>
+            </a:pPr>
+            <a:r>
+              <a:rPr lang="en-US" sz="1400" dirty="0">
+                <a:solidFill>
+                  <a:schemeClr val="tx1"/>
+                </a:solidFill>
+              </a:rPr>
+              <a:t>Roleplay de cada script com o comercial</a:t>
+            </a:r>
+            <a:endParaRPr lang="en-US" sz="1400" dirty="0"/>
+          </a:p>
+          <a:p>
+            <a:pPr marL="342900" indent="-342900">
+              <a:spcAft>
+                <a:spcPts val="600"/>
+              </a:spcAft>
+              <a:buSzPct val="100000"/>
+              <a:buFont typeface="+mj-lt"/>
+              <a:buAutoNum type="arabicPeriod" startAt="1"/>
+            </a:pPr>
+            <a:r>
+              <a:rPr lang="en-US" sz="1400" dirty="0">
+                <a:solidFill>
+                  <a:schemeClr val="tx1"/>
+                </a:solidFill>
+              </a:rPr>
+              <a:t>Revisar os indicadores em 2 semanas</a:t>
+            </a:r>
+            <a:endParaRPr lang="en-US" sz="1400" dirty="0"/>
+          </a:p>
+        </p:txBody>
+      </p:sp>
+      <p:sp>
+        <p:nvSpPr>
+          <p:cNvPr id="25" name="Slide Number Placeholder 0"/>
+          <p:cNvSpPr>
+            <a:spLocks noGrp="1"/>
+          </p:cNvSpPr>
+          <p:nvPr>
+            <p:ph type="sldNum" sz="quarter" idx="4294967295"/>
+          </p:nvPr>
+        </p:nvSpPr>
+        <p:spPr>
+          <a:xfrm>
+            <a:off x="11155680" y="6355080"/>
+            <a:ext cx="457200" cy="274320"/>
+          </a:xfrm>
+          <a:prstGeom prst="rect">
+            <a:avLst/>
+          </a:prstGeom>
+          <a:extLst>
+            <a:ext uri="{C572A759-6A51-4108-AA02-DFA0A04FC94B}">
+              <ma14:wrappingTextBoxFlag xmlns:ma14="http://schemas.microsoft.com/office/mac/drawingml/2011/main" val="0"/>
+            </a:ext>
+          </a:extLst>
+        </p:spPr>
+        <p:txBody>
+          <a:bodyPr/>
+          <a:lstStyle>
+            <a:lvl1pPr>
+              <a:defRPr sz="1000">
+                <a:solidFill>
+                  <a:srgbClr val="7A7A7A"/>
+                </a:solidFill>
+              </a:defRPr>
+            </a:lvl1pPr>
+          </a:lstStyle>
+          <a:p>
+            <a:pPr algn="r"/>
+            <a:fld id="{F7021451-1387-4CA6-816F-3879F97B5CBC}" type="slidenum">
+              <a:rPr b="0" lang="en-US"/>
+              <a:t>15</a:t>
+            </a:fld>
+            <a:endParaRPr lang="en-US"/>
+          </a:p>
+        </p:txBody>
+      </p:sp>
+    </p:spTree>
+  </p:cSld>
+  <p:clrMapOvr>
+    <a:masterClrMapping/>
+  </p:clrMapOvr>
+</p:sld>
+</file>
+
+<file path=ppt/slides/slide16.xml><?xml version="1.0" encoding="utf-8"?>
+<p:sld xmlns:a="http://schemas.openxmlformats.org/drawingml/2006/main" xmlns:r="http://schemas.openxmlformats.org/officeDocument/2006/relationships" xmlns:p="http://schemas.openxmlformats.org/presentationml/2006/main">
+  <p:cSld name="Slide 16">
+    <p:spTree>
+      <p:nvGrpSpPr>
+        <p:cNvPr id="1" name=""/>
+        <p:cNvGrpSpPr/>
+        <p:nvPr/>
+      </p:nvGrpSpPr>
+      <p:grpSpPr>
+        <a:xfrm>
+          <a:off x="0" y="0"/>
+          <a:ext cx="0" cy="0"/>
+          <a:chOff x="0" y="0"/>
+          <a:chExt cx="0" cy="0"/>
+        </a:xfrm>
+      </p:grpSpPr>
+      <p:sp>
+        <p:nvSpPr>
           <p:cNvPr id="2" name="Text 0"/>
           <p:cNvSpPr/>
           <p:nvPr>
@@ -13216,7 +13858,7 @@
                   <a:schemeClr val="tx1"/>
                 </a:solidFill>
               </a:rPr>
-              <a:t>Etapa 4: agendar e passar o bastão</a:t>
+              <a:t>Aluguel de painel para eventos: vertical pausada</a:t>
             </a:r>
             <a:endParaRPr lang="en-US" sz="3200" dirty="0"/>
           </a:p>
@@ -13224,220 +13866,131 @@
       </p:sp>
       <p:sp>
         <p:nvSpPr>
-          <p:cNvPr id="3" name="Na conversa título"/>
-          <p:cNvSpPr txBox="1"/>
-          <p:nvPr/>
-        </p:nvSpPr>
-        <p:spPr>
-          <a:xfrm>
-            <a:off x="548640" y="1554480"/>
-            <a:ext cx="5486400" cy="411480"/>
-          </a:xfrm>
-          <a:prstGeom prst="rect">
-            <a:avLst/>
-          </a:prstGeom>
-          <a:noFill/>
-          <a:ln/>
-        </p:spPr>
-        <p:txBody>
-          <a:bodyPr wrap="square" lIns="0" tIns="0" rIns="0" bIns="0" rtlCol="0" anchor="t"/>
-          <a:lstStyle/>
-          <a:p>
-            <a:pPr indent="0" marL="0">
-              <a:buNone/>
-            </a:pPr>
-            <a:r>
-              <a:rPr lang="en-US" sz="2000" b="1" dirty="0">
-                <a:solidFill>
-                  <a:schemeClr val="accent1"/>
-                </a:solidFill>
-              </a:rPr>
-              <a:t>Na conversa</a:t>
-            </a:r>
-            <a:endParaRPr lang="en-US" sz="2000" dirty="0"/>
-          </a:p>
-        </p:txBody>
-      </p:sp>
-      <p:sp>
-        <p:nvSpPr>
-          <p:cNvPr id="4" name="Script agenda"/>
-          <p:cNvSpPr txBox="1"/>
-          <p:nvPr/>
-        </p:nvSpPr>
-        <p:spPr>
-          <a:xfrm>
-            <a:off x="548640" y="2057400"/>
-            <a:ext cx="5394960" cy="1463040"/>
-          </a:xfrm>
-          <a:prstGeom prst="rect">
-            <a:avLst/>
-          </a:prstGeom>
-          <a:noFill/>
-          <a:ln/>
-        </p:spPr>
-        <p:txBody>
-          <a:bodyPr wrap="square" lIns="0" tIns="0" rIns="0" bIns="0" rtlCol="0" anchor="t"/>
-          <a:lstStyle/>
-          <a:p>
-            <a:pPr indent="0" marL="0">
-              <a:buNone/>
-            </a:pPr>
-            <a:r>
-              <a:rPr lang="en-US" sz="1600" i="1" dirty="0">
-                <a:solidFill>
-                  <a:schemeClr val="tx1"/>
-                </a:solidFill>
-              </a:rPr>
-              <a:t>"Faz sentido uma conversa de 30 minutos com o [executivo], nosso especialista em [nicho]. Ele mostra como ficaria no seu espaço. Terça às 10h ou quinta às 15h?"</a:t>
-            </a:r>
-            <a:endParaRPr lang="en-US" sz="1600" dirty="0"/>
-          </a:p>
-        </p:txBody>
-      </p:sp>
-      <p:sp>
-        <p:nvSpPr>
-          <p:cNvPr id="5" name="Depois título"/>
-          <p:cNvSpPr txBox="1"/>
-          <p:nvPr/>
-        </p:nvSpPr>
-        <p:spPr>
-          <a:xfrm>
-            <a:off x="548640" y="3657600"/>
-            <a:ext cx="5486400" cy="411480"/>
-          </a:xfrm>
-          <a:prstGeom prst="rect">
-            <a:avLst/>
-          </a:prstGeom>
-          <a:noFill/>
-          <a:ln/>
-        </p:spPr>
-        <p:txBody>
-          <a:bodyPr wrap="square" lIns="0" tIns="0" rIns="0" bIns="0" rtlCol="0" anchor="t"/>
-          <a:lstStyle/>
-          <a:p>
-            <a:pPr indent="0" marL="0">
-              <a:buNone/>
-            </a:pPr>
-            <a:r>
-              <a:rPr lang="en-US" sz="2000" b="1" dirty="0">
-                <a:solidFill>
-                  <a:schemeClr val="accent1"/>
-                </a:solidFill>
-              </a:rPr>
-              <a:t>Depois</a:t>
-            </a:r>
-            <a:endParaRPr lang="en-US" sz="2000" dirty="0"/>
-          </a:p>
-        </p:txBody>
-      </p:sp>
-      <p:sp>
-        <p:nvSpPr>
-          <p:cNvPr id="6" name="Depois lista"/>
-          <p:cNvSpPr txBox="1"/>
-          <p:nvPr/>
-        </p:nvSpPr>
-        <p:spPr>
-          <a:xfrm>
-            <a:off x="548640" y="4114800"/>
-            <a:ext cx="5394960" cy="1828800"/>
-          </a:xfrm>
-          <a:prstGeom prst="rect">
-            <a:avLst/>
-          </a:prstGeom>
-          <a:noFill/>
-          <a:ln/>
-        </p:spPr>
-        <p:txBody>
-          <a:bodyPr wrap="square" lIns="0" tIns="0" rIns="0" bIns="0" rtlCol="0" anchor="t"/>
-          <a:lstStyle/>
-          <a:p>
-            <a:pPr marL="342900" indent="-342900">
-              <a:spcAft>
-                <a:spcPts val="600"/>
-              </a:spcAft>
-              <a:buSzPct val="100000"/>
-              <a:buChar char="•"/>
-            </a:pPr>
-            <a:r>
-              <a:rPr lang="en-US" sz="1500" dirty="0">
-                <a:solidFill>
-                  <a:schemeClr val="tx1"/>
-                </a:solidFill>
-              </a:rPr>
-              <a:t>Confirmação no WhatsApp com data, hora e formato</a:t>
-            </a:r>
-            <a:endParaRPr lang="en-US" sz="1500" dirty="0"/>
-          </a:p>
-          <a:p>
-            <a:pPr marL="342900" indent="-342900">
-              <a:spcAft>
-                <a:spcPts val="600"/>
-              </a:spcAft>
-              <a:buSzPct val="100000"/>
-              <a:buChar char="•"/>
-            </a:pPr>
-            <a:r>
-              <a:rPr lang="en-US" sz="1500" dirty="0">
-                <a:solidFill>
-                  <a:schemeClr val="tx1"/>
-                </a:solidFill>
-              </a:rPr>
-              <a:t>Pedir uma foto do espaço para a simulação</a:t>
-            </a:r>
-            <a:endParaRPr lang="en-US" sz="1500" dirty="0"/>
-          </a:p>
-          <a:p>
-            <a:pPr marL="342900" indent="-342900">
-              <a:spcAft>
-                <a:spcPts val="600"/>
-              </a:spcAft>
-              <a:buSzPct val="100000"/>
-              <a:buChar char="•"/>
-            </a:pPr>
-            <a:r>
-              <a:rPr lang="en-US" sz="1500" dirty="0">
-                <a:solidFill>
-                  <a:schemeClr val="tx1"/>
-                </a:solidFill>
-              </a:rPr>
-              <a:t>Lembrete na véspera e 1 hora antes</a:t>
-            </a:r>
-            <a:endParaRPr lang="en-US" sz="1500" dirty="0"/>
-          </a:p>
-          <a:p>
-            <a:pPr marL="342900" indent="-342900">
-              <a:spcAft>
-                <a:spcPts val="600"/>
-              </a:spcAft>
-              <a:buSzPct val="100000"/>
-              <a:buChar char="•"/>
-            </a:pPr>
-            <a:r>
-              <a:rPr lang="en-US" sz="1500" dirty="0">
-                <a:solidFill>
-                  <a:schemeClr val="tx1"/>
-                </a:solidFill>
-              </a:rPr>
-              <a:t>Faltou? Remarcar no mesmo dia</a:t>
-            </a:r>
-            <a:endParaRPr lang="en-US" sz="1500" dirty="0"/>
-          </a:p>
-        </p:txBody>
-      </p:sp>
-      <p:sp>
-        <p:nvSpPr>
-          <p:cNvPr id="7" name="Nota de passagem"/>
+          <p:cNvPr id="3" name="Aviso pausa"/>
           <p:cNvSpPr/>
           <p:nvPr/>
         </p:nvSpPr>
         <p:spPr>
           <a:xfrm>
-            <a:off x="6400800" y="1554480"/>
-            <a:ext cx="5212080" cy="4526280"/>
+            <a:off x="548640" y="1463040"/>
+            <a:ext cx="11064240" cy="868680"/>
           </a:xfrm>
           <a:prstGeom prst="roundRect">
             <a:avLst>
-              <a:gd name="adj" fmla="val 2424"/>
+              <a:gd name="adj" fmla="val 12632"/>
+            </a:avLst>
+          </a:prstGeom>
+          <a:solidFill>
+            <a:schemeClr val="bg2"/>
+          </a:solidFill>
+          <a:ln/>
+        </p:spPr>
+      </p:sp>
+      <p:sp>
+        <p:nvSpPr>
+          <p:cNvPr id="4" name="Pausa círculo"/>
+          <p:cNvSpPr/>
+          <p:nvPr/>
+        </p:nvSpPr>
+        <p:spPr>
+          <a:xfrm>
+            <a:off x="777240" y="1600200"/>
+            <a:ext cx="594360" cy="594360"/>
+          </a:xfrm>
+          <a:prstGeom prst="ellipse">
+            <a:avLst/>
+          </a:prstGeom>
+          <a:solidFill>
+            <a:srgbClr val="E011FF"/>
+          </a:solidFill>
+          <a:ln/>
+        </p:spPr>
+      </p:sp>
+      <p:pic>
+        <p:nvPicPr>
+          <p:cNvPr id="5" name="Pausa ícone" descr="preencoded.png">    </p:cNvPr>
+          <p:cNvPicPr>
+            <a:picLocks noChangeAspect="1"/>
+          </p:cNvPicPr>
+          <p:nvPr/>
+        </p:nvPicPr>
+        <p:blipFill>
+          <a:blip r:embed="rId1"/>
+          <a:stretch>
+            <a:fillRect/>
+          </a:stretch>
+        </p:blipFill>
+        <p:spPr>
+          <a:xfrm>
+            <a:off x="925830" y="1748790"/>
+            <a:ext cx="297180" cy="297180"/>
+          </a:xfrm>
+          <a:prstGeom prst="rect">
+            <a:avLst/>
+          </a:prstGeom>
+        </p:spPr>
+      </p:pic>
+      <p:sp>
+        <p:nvSpPr>
+          <p:cNvPr id="6" name="Aviso texto"/>
+          <p:cNvSpPr txBox="1"/>
+          <p:nvPr/>
+        </p:nvSpPr>
+        <p:spPr>
+          <a:xfrm>
+            <a:off x="1600200" y="1463040"/>
+            <a:ext cx="9784080" cy="868680"/>
+          </a:xfrm>
+          <a:prstGeom prst="rect">
+            <a:avLst/>
+          </a:prstGeom>
+          <a:noFill/>
+          <a:ln/>
+        </p:spPr>
+        <p:txBody>
+          <a:bodyPr wrap="square" lIns="0" tIns="0" rIns="0" bIns="0" rtlCol="0" anchor="ctr"/>
+          <a:lstStyle/>
+          <a:p>
+            <a:pPr indent="0" marL="0">
+              <a:buNone/>
+            </a:pPr>
+            <a:r>
+              <a:rPr lang="en-US" sz="1600" b="1" dirty="0">
+                <a:solidFill>
+                  <a:schemeClr val="tx1"/>
+                </a:solidFill>
+              </a:rPr>
+              <a:t>No momento, a locação de painéis para eventos está pausada. </a:t>
+            </a:r>
+            <a:pPr indent="0" marL="0">
+              <a:buNone/>
+            </a:pPr>
+            <a:r>
+              <a:rPr lang="en-US" sz="1600" dirty="0">
+                <a:solidFill>
+                  <a:schemeClr val="tx1"/>
+                </a:solidFill>
+              </a:rPr>
+              <a:t>Vamos retomar em breve, então nenhum desses leads se perde: todos ficam registrados para o retorno.</a:t>
+            </a:r>
+            <a:endParaRPr lang="en-US" sz="1600" dirty="0"/>
+          </a:p>
+        </p:txBody>
+      </p:sp>
+      <p:sp>
+        <p:nvSpPr>
+          <p:cNvPr id="7" name="Mensagem evento"/>
+          <p:cNvSpPr/>
+          <p:nvPr/>
+        </p:nvSpPr>
+        <p:spPr>
+          <a:xfrm>
+            <a:off x="548640" y="2560320"/>
+            <a:ext cx="6035040" cy="3520440"/>
+          </a:xfrm>
+          <a:prstGeom prst="roundRect">
+            <a:avLst>
+              <a:gd name="adj" fmla="val 3117"/>
             </a:avLst>
           </a:prstGeom>
           <a:solidFill>
@@ -13448,14 +14001,94 @@
       </p:sp>
       <p:sp>
         <p:nvSpPr>
-          <p:cNvPr id="8" name="Nota título"/>
-          <p:cNvSpPr txBox="1"/>
-          <p:nvPr/>
-        </p:nvSpPr>
-        <p:spPr>
-          <a:xfrm>
-            <a:off x="6720840" y="1783080"/>
-            <a:ext cx="4572000" cy="457200"/>
+          <p:cNvPr id="8" name="Mensagem evento círculo"/>
+          <p:cNvSpPr/>
+          <p:nvPr/>
+        </p:nvSpPr>
+        <p:spPr>
+          <a:xfrm>
+            <a:off x="822960" y="2788920"/>
+            <a:ext cx="502920" cy="502920"/>
+          </a:xfrm>
+          <a:prstGeom prst="ellipse">
+            <a:avLst/>
+          </a:prstGeom>
+          <a:solidFill>
+            <a:srgbClr val="12D9FF"/>
+          </a:solidFill>
+          <a:ln/>
+        </p:spPr>
+      </p:sp>
+      <p:pic>
+        <p:nvPicPr>
+          <p:cNvPr id="9" name="Mensagem evento ícone" descr="preencoded.png">    </p:cNvPr>
+          <p:cNvPicPr>
+            <a:picLocks noChangeAspect="1"/>
+          </p:cNvPicPr>
+          <p:nvPr/>
+        </p:nvPicPr>
+        <p:blipFill>
+          <a:blip r:embed="rId2"/>
+          <a:stretch>
+            <a:fillRect/>
+          </a:stretch>
+        </p:blipFill>
+        <p:spPr>
+          <a:xfrm>
+            <a:off x="948690" y="2914650"/>
+            <a:ext cx="251460" cy="251460"/>
+          </a:xfrm>
+          <a:prstGeom prst="rect">
+            <a:avLst/>
+          </a:prstGeom>
+        </p:spPr>
+      </p:pic>
+      <p:sp>
+        <p:nvSpPr>
+          <p:cNvPr id="10" name="Mensagem evento título"/>
+          <p:cNvSpPr txBox="1"/>
+          <p:nvPr/>
+        </p:nvSpPr>
+        <p:spPr>
+          <a:xfrm>
+            <a:off x="1463040" y="2788920"/>
+            <a:ext cx="4846320" cy="502920"/>
+          </a:xfrm>
+          <a:prstGeom prst="rect">
+            <a:avLst/>
+          </a:prstGeom>
+          <a:noFill/>
+          <a:ln/>
+        </p:spPr>
+        <p:txBody>
+          <a:bodyPr wrap="square" lIns="0" tIns="0" rIns="0" bIns="0" rtlCol="0" anchor="ctr"/>
+          <a:lstStyle/>
+          <a:p>
+            <a:pPr indent="0" marL="0">
+              <a:buNone/>
+            </a:pPr>
+            <a:r>
+              <a:rPr lang="en-US" sz="1800" b="1" dirty="0">
+                <a:solidFill>
+                  <a:schemeClr val="accent2"/>
+                </a:solidFill>
+              </a:rPr>
+              <a:t>Mensagem para o lead</a:t>
+            </a:r>
+            <a:endParaRPr lang="en-US" sz="1800" dirty="0"/>
+          </a:p>
+        </p:txBody>
+      </p:sp>
+      <p:sp>
+        <p:nvSpPr>
+          <p:cNvPr id="11" name="Mensagem evento texto"/>
+          <p:cNvSpPr txBox="1"/>
+          <p:nvPr/>
+        </p:nvSpPr>
+        <p:spPr>
+          <a:xfrm>
+            <a:off x="822960" y="3474720"/>
+            <a:ext cx="5486400" cy="2468880"/>
           </a:xfrm>
           <a:prstGeom prst="rect">
             <a:avLst/>
@@ -13471,12 +14104,12 @@
               <a:buNone/>
             </a:pPr>
             <a:r>
-              <a:rPr lang="en-US" sz="1800" b="1" dirty="0">
-                <a:solidFill>
-                  <a:schemeClr val="accent2"/>
-                </a:solidFill>
-              </a:rPr>
-              <a:t>Nota de passagem no Salesforce</a:t>
+              <a:rPr lang="en-US" sz="1800" i="1" dirty="0">
+                <a:solidFill>
+                  <a:schemeClr val="bg1"/>
+                </a:solidFill>
+              </a:rPr>
+              <a:t>"Oi, [Nome]! Aqui é a [Pryscila/Kelly], da LedWave. Obrigada pelo contato! No momento, a locação de painéis para eventos está pausada, mas vamos retomar em breve. Posso guardar seu contato e te avisar assim que voltarmos? E se você tiver um projeto de painel fixo, como fachada, loja ou igreja, já consigo te ajudar agora."</a:t>
             </a:r>
             <a:endParaRPr lang="en-US" sz="1800" dirty="0"/>
           </a:p>
@@ -13484,14 +14117,14 @@
       </p:sp>
       <p:sp>
         <p:nvSpPr>
-          <p:cNvPr id="9" name="Nota campos"/>
-          <p:cNvSpPr txBox="1"/>
-          <p:nvPr/>
-        </p:nvSpPr>
-        <p:spPr>
-          <a:xfrm>
-            <a:off x="6720840" y="2377440"/>
-            <a:ext cx="4572000" cy="3566160"/>
+          <p:cNvPr id="12" name="Evento passos título"/>
+          <p:cNvSpPr txBox="1"/>
+          <p:nvPr/>
+        </p:nvSpPr>
+        <p:spPr>
+          <a:xfrm>
+            <a:off x="6949440" y="2560320"/>
+            <a:ext cx="4663440" cy="457200"/>
           </a:xfrm>
           <a:prstGeom prst="rect">
             <a:avLst/>
@@ -13503,166 +14136,386 @@
           <a:bodyPr wrap="square" lIns="0" tIns="0" rIns="0" bIns="0" rtlCol="0" anchor="t"/>
           <a:lstStyle/>
           <a:p>
-            <a:pPr marL="342900" indent="-342900">
-              <a:spcAft>
-                <a:spcPts val="500"/>
-              </a:spcAft>
-              <a:buSzPct val="100000"/>
-              <a:buChar char="•"/>
-            </a:pPr>
-            <a:r>
-              <a:rPr lang="en-US" sz="1500" dirty="0">
-                <a:solidFill>
-                  <a:schemeClr val="bg1"/>
-                </a:solidFill>
-              </a:rPr>
-              <a:t>Empresa, nicho e contato</a:t>
-            </a:r>
-            <a:endParaRPr lang="en-US" sz="1500" dirty="0"/>
-          </a:p>
-          <a:p>
-            <a:pPr marL="342900" indent="-342900">
-              <a:spcAft>
-                <a:spcPts val="500"/>
-              </a:spcAft>
-              <a:buSzPct val="100000"/>
-              <a:buChar char="•"/>
-            </a:pPr>
-            <a:r>
-              <a:rPr lang="en-US" sz="1500" dirty="0">
-                <a:solidFill>
-                  <a:schemeClr val="bg1"/>
-                </a:solidFill>
-              </a:rPr>
-              <a:t>Decisor(es)</a:t>
-            </a:r>
-            <a:endParaRPr lang="en-US" sz="1500" dirty="0"/>
-          </a:p>
-          <a:p>
-            <a:pPr marL="342900" indent="-342900">
-              <a:spcAft>
-                <a:spcPts val="500"/>
-              </a:spcAft>
-              <a:buSzPct val="100000"/>
-              <a:buChar char="•"/>
-            </a:pPr>
-            <a:r>
-              <a:rPr lang="en-US" sz="1500" dirty="0">
-                <a:solidFill>
-                  <a:schemeClr val="bg1"/>
-                </a:solidFill>
-              </a:rPr>
-              <a:t>Projeto: local, medidas, indoor/outdoor</a:t>
-            </a:r>
-            <a:endParaRPr lang="en-US" sz="1500" dirty="0"/>
-          </a:p>
-          <a:p>
-            <a:pPr marL="342900" indent="-342900">
-              <a:spcAft>
-                <a:spcPts val="500"/>
-              </a:spcAft>
-              <a:buSzPct val="100000"/>
-              <a:buChar char="•"/>
-            </a:pPr>
-            <a:r>
-              <a:rPr lang="en-US" sz="1500" dirty="0">
-                <a:solidFill>
-                  <a:schemeClr val="bg1"/>
-                </a:solidFill>
-              </a:rPr>
-              <a:t>Propósito de compra</a:t>
-            </a:r>
-            <a:endParaRPr lang="en-US" sz="1500" dirty="0"/>
-          </a:p>
-          <a:p>
-            <a:pPr marL="342900" indent="-342900">
-              <a:spcAft>
-                <a:spcPts val="500"/>
-              </a:spcAft>
-              <a:buSzPct val="100000"/>
-              <a:buChar char="•"/>
-            </a:pPr>
-            <a:r>
-              <a:rPr lang="en-US" sz="1500" dirty="0">
-                <a:solidFill>
-                  <a:schemeClr val="bg1"/>
-                </a:solidFill>
-              </a:rPr>
-              <a:t>Dor nas palavras do cliente</a:t>
-            </a:r>
-            <a:endParaRPr lang="en-US" sz="1500" dirty="0"/>
-          </a:p>
-          <a:p>
-            <a:pPr marL="342900" indent="-342900">
-              <a:spcAft>
-                <a:spcPts val="500"/>
-              </a:spcAft>
-              <a:buSzPct val="100000"/>
-              <a:buChar char="•"/>
-            </a:pPr>
-            <a:r>
-              <a:rPr lang="en-US" sz="1500" dirty="0">
-                <a:solidFill>
-                  <a:schemeClr val="bg1"/>
-                </a:solidFill>
-              </a:rPr>
-              <a:t>Prazo ou evento</a:t>
-            </a:r>
-            <a:endParaRPr lang="en-US" sz="1500" dirty="0"/>
-          </a:p>
-          <a:p>
-            <a:pPr marL="342900" indent="-342900">
-              <a:spcAft>
-                <a:spcPts val="500"/>
-              </a:spcAft>
-              <a:buSzPct val="100000"/>
-              <a:buChar char="•"/>
-            </a:pPr>
-            <a:r>
-              <a:rPr lang="en-US" sz="1500" dirty="0">
-                <a:solidFill>
-                  <a:schemeClr val="bg1"/>
-                </a:solidFill>
-              </a:rPr>
-              <a:t>Compra ou locação e investimento</a:t>
-            </a:r>
-            <a:endParaRPr lang="en-US" sz="1500" dirty="0"/>
-          </a:p>
-          <a:p>
-            <a:pPr marL="342900" indent="-342900">
-              <a:spcAft>
-                <a:spcPts val="500"/>
-              </a:spcAft>
-              <a:buSzPct val="100000"/>
-              <a:buChar char="•"/>
-            </a:pPr>
-            <a:r>
-              <a:rPr lang="en-US" sz="1500" dirty="0">
-                <a:solidFill>
-                  <a:schemeClr val="bg1"/>
-                </a:solidFill>
-              </a:rPr>
-              <a:t>Objeções que apareceram</a:t>
-            </a:r>
-            <a:endParaRPr lang="en-US" sz="1500" dirty="0"/>
-          </a:p>
-          <a:p>
-            <a:pPr marL="342900" indent="-342900">
-              <a:spcAft>
-                <a:spcPts val="500"/>
-              </a:spcAft>
-              <a:buSzPct val="100000"/>
-              <a:buChar char="•"/>
-            </a:pPr>
-            <a:r>
-              <a:rPr lang="en-US" sz="1500" dirty="0">
-                <a:solidFill>
-                  <a:schemeClr val="bg1"/>
-                </a:solidFill>
-              </a:rPr>
-              <a:t>Origem, TAG e próximo passo</a:t>
-            </a:r>
-            <a:endParaRPr lang="en-US" sz="1500" dirty="0"/>
+            <a:pPr indent="0" marL="0">
+              <a:buNone/>
+            </a:pPr>
+            <a:r>
+              <a:rPr lang="en-US" sz="2000" b="1" dirty="0">
+                <a:solidFill>
+                  <a:schemeClr val="accent1"/>
+                </a:solidFill>
+              </a:rPr>
+              <a:t>O que fazer</a:t>
+            </a:r>
+            <a:endParaRPr lang="en-US" sz="2000" dirty="0"/>
+          </a:p>
+        </p:txBody>
+      </p:sp>
+      <p:sp>
+        <p:nvSpPr>
+          <p:cNvPr id="13" name="Passo evento 1 círculo"/>
+          <p:cNvSpPr/>
+          <p:nvPr/>
+        </p:nvSpPr>
+        <p:spPr>
+          <a:xfrm>
+            <a:off x="6949440" y="3154680"/>
+            <a:ext cx="457200" cy="457200"/>
+          </a:xfrm>
+          <a:prstGeom prst="ellipse">
+            <a:avLst/>
+          </a:prstGeom>
+          <a:solidFill>
+            <a:srgbClr val="658DFF"/>
+          </a:solidFill>
+          <a:ln/>
+        </p:spPr>
+      </p:sp>
+      <p:sp>
+        <p:nvSpPr>
+          <p:cNvPr id="14" name="Passo evento 1 número"/>
+          <p:cNvSpPr txBox="1"/>
+          <p:nvPr/>
+        </p:nvSpPr>
+        <p:spPr>
+          <a:xfrm>
+            <a:off x="6949440" y="3154680"/>
+            <a:ext cx="457200" cy="457200"/>
+          </a:xfrm>
+          <a:prstGeom prst="rect">
+            <a:avLst/>
+          </a:prstGeom>
+          <a:noFill/>
+          <a:ln/>
+        </p:spPr>
+        <p:txBody>
+          <a:bodyPr wrap="square" lIns="0" tIns="0" rIns="0" bIns="0" rtlCol="0" anchor="ctr"/>
+          <a:lstStyle/>
+          <a:p>
+            <a:pPr algn="ctr" indent="0" marL="0">
+              <a:buNone/>
+            </a:pPr>
+            <a:r>
+              <a:rPr lang="en-US" sz="1300" b="1" dirty="0">
+                <a:solidFill>
+                  <a:srgbClr val="FFFFFF"/>
+                </a:solidFill>
+              </a:rPr>
+              <a:t>1</a:t>
+            </a:r>
+            <a:endParaRPr lang="en-US" sz="1300" dirty="0"/>
+          </a:p>
+        </p:txBody>
+      </p:sp>
+      <p:sp>
+        <p:nvSpPr>
+          <p:cNvPr id="15" name="Passo evento texto 1"/>
+          <p:cNvSpPr txBox="1"/>
+          <p:nvPr/>
+        </p:nvSpPr>
+        <p:spPr>
+          <a:xfrm>
+            <a:off x="7589520" y="3063240"/>
+            <a:ext cx="4023360" cy="640080"/>
+          </a:xfrm>
+          <a:prstGeom prst="rect">
+            <a:avLst/>
+          </a:prstGeom>
+          <a:noFill/>
+          <a:ln/>
+        </p:spPr>
+        <p:txBody>
+          <a:bodyPr wrap="square" lIns="0" tIns="0" rIns="0" bIns="0" rtlCol="0" anchor="ctr"/>
+          <a:lstStyle/>
+          <a:p>
+            <a:pPr indent="0" marL="0">
+              <a:buNone/>
+            </a:pPr>
+            <a:r>
+              <a:rPr lang="en-US" sz="1400" dirty="0">
+                <a:solidFill>
+                  <a:schemeClr val="tx1"/>
+                </a:solidFill>
+              </a:rPr>
+              <a:t>Enviar a mensagem e anotar data, cidade e tipo do evento</a:t>
+            </a:r>
+            <a:endParaRPr lang="en-US" sz="1400" dirty="0"/>
+          </a:p>
+        </p:txBody>
+      </p:sp>
+      <p:sp>
+        <p:nvSpPr>
+          <p:cNvPr id="16" name="Passo evento 2 círculo"/>
+          <p:cNvSpPr/>
+          <p:nvPr/>
+        </p:nvSpPr>
+        <p:spPr>
+          <a:xfrm>
+            <a:off x="6949440" y="3886200"/>
+            <a:ext cx="457200" cy="457200"/>
+          </a:xfrm>
+          <a:prstGeom prst="ellipse">
+            <a:avLst/>
+          </a:prstGeom>
+          <a:solidFill>
+            <a:srgbClr val="8A5CF6"/>
+          </a:solidFill>
+          <a:ln/>
+        </p:spPr>
+      </p:sp>
+      <p:sp>
+        <p:nvSpPr>
+          <p:cNvPr id="17" name="Passo evento 2 número"/>
+          <p:cNvSpPr txBox="1"/>
+          <p:nvPr/>
+        </p:nvSpPr>
+        <p:spPr>
+          <a:xfrm>
+            <a:off x="6949440" y="3886200"/>
+            <a:ext cx="457200" cy="457200"/>
+          </a:xfrm>
+          <a:prstGeom prst="rect">
+            <a:avLst/>
+          </a:prstGeom>
+          <a:noFill/>
+          <a:ln/>
+        </p:spPr>
+        <p:txBody>
+          <a:bodyPr wrap="square" lIns="0" tIns="0" rIns="0" bIns="0" rtlCol="0" anchor="ctr"/>
+          <a:lstStyle/>
+          <a:p>
+            <a:pPr algn="ctr" indent="0" marL="0">
+              <a:buNone/>
+            </a:pPr>
+            <a:r>
+              <a:rPr lang="en-US" sz="1300" b="1" dirty="0">
+                <a:solidFill>
+                  <a:srgbClr val="FFFFFF"/>
+                </a:solidFill>
+              </a:rPr>
+              <a:t>2</a:t>
+            </a:r>
+            <a:endParaRPr lang="en-US" sz="1300" dirty="0"/>
+          </a:p>
+        </p:txBody>
+      </p:sp>
+      <p:sp>
+        <p:nvSpPr>
+          <p:cNvPr id="18" name="Passo evento texto 2"/>
+          <p:cNvSpPr txBox="1"/>
+          <p:nvPr/>
+        </p:nvSpPr>
+        <p:spPr>
+          <a:xfrm>
+            <a:off x="7589520" y="3794760"/>
+            <a:ext cx="4023360" cy="640080"/>
+          </a:xfrm>
+          <a:prstGeom prst="rect">
+            <a:avLst/>
+          </a:prstGeom>
+          <a:noFill/>
+          <a:ln/>
+        </p:spPr>
+        <p:txBody>
+          <a:bodyPr wrap="square" lIns="0" tIns="0" rIns="0" bIns="0" rtlCol="0" anchor="ctr"/>
+          <a:lstStyle/>
+          <a:p>
+            <a:pPr indent="0" marL="0">
+              <a:buNone/>
+            </a:pPr>
+            <a:r>
+              <a:rPr lang="en-US" sz="1400" dirty="0">
+                <a:solidFill>
+                  <a:schemeClr val="tx1"/>
+                </a:solidFill>
+              </a:rPr>
+              <a:t>Perguntar se há projeto de painel fixo: se sim, segue a qualificação</a:t>
+            </a:r>
+            <a:endParaRPr lang="en-US" sz="1400" dirty="0"/>
+          </a:p>
+        </p:txBody>
+      </p:sp>
+      <p:sp>
+        <p:nvSpPr>
+          <p:cNvPr id="19" name="Passo evento 3 círculo"/>
+          <p:cNvSpPr/>
+          <p:nvPr/>
+        </p:nvSpPr>
+        <p:spPr>
+          <a:xfrm>
+            <a:off x="6949440" y="4617720"/>
+            <a:ext cx="457200" cy="457200"/>
+          </a:xfrm>
+          <a:prstGeom prst="ellipse">
+            <a:avLst/>
+          </a:prstGeom>
+          <a:solidFill>
+            <a:srgbClr val="B43CF8"/>
+          </a:solidFill>
+          <a:ln/>
+        </p:spPr>
+      </p:sp>
+      <p:sp>
+        <p:nvSpPr>
+          <p:cNvPr id="20" name="Passo evento 3 número"/>
+          <p:cNvSpPr txBox="1"/>
+          <p:nvPr/>
+        </p:nvSpPr>
+        <p:spPr>
+          <a:xfrm>
+            <a:off x="6949440" y="4617720"/>
+            <a:ext cx="457200" cy="457200"/>
+          </a:xfrm>
+          <a:prstGeom prst="rect">
+            <a:avLst/>
+          </a:prstGeom>
+          <a:noFill/>
+          <a:ln/>
+        </p:spPr>
+        <p:txBody>
+          <a:bodyPr wrap="square" lIns="0" tIns="0" rIns="0" bIns="0" rtlCol="0" anchor="ctr"/>
+          <a:lstStyle/>
+          <a:p>
+            <a:pPr algn="ctr" indent="0" marL="0">
+              <a:buNone/>
+            </a:pPr>
+            <a:r>
+              <a:rPr lang="en-US" sz="1300" b="1" dirty="0">
+                <a:solidFill>
+                  <a:srgbClr val="FFFFFF"/>
+                </a:solidFill>
+              </a:rPr>
+              <a:t>3</a:t>
+            </a:r>
+            <a:endParaRPr lang="en-US" sz="1300" dirty="0"/>
+          </a:p>
+        </p:txBody>
+      </p:sp>
+      <p:sp>
+        <p:nvSpPr>
+          <p:cNvPr id="21" name="Passo evento texto 3"/>
+          <p:cNvSpPr txBox="1"/>
+          <p:nvPr/>
+        </p:nvSpPr>
+        <p:spPr>
+          <a:xfrm>
+            <a:off x="7589520" y="4526280"/>
+            <a:ext cx="4023360" cy="640080"/>
+          </a:xfrm>
+          <a:prstGeom prst="rect">
+            <a:avLst/>
+          </a:prstGeom>
+          <a:noFill/>
+          <a:ln/>
+        </p:spPr>
+        <p:txBody>
+          <a:bodyPr wrap="square" lIns="0" tIns="0" rIns="0" bIns="0" rtlCol="0" anchor="ctr"/>
+          <a:lstStyle/>
+          <a:p>
+            <a:pPr indent="0" marL="0">
+              <a:buNone/>
+            </a:pPr>
+            <a:r>
+              <a:rPr lang="en-US" sz="1400" dirty="0">
+                <a:solidFill>
+                  <a:schemeClr val="tx1"/>
+                </a:solidFill>
+              </a:rPr>
+              <a:t>Salesforce: Nutrição, motivo "Locação de eventos pausada"</a:t>
+            </a:r>
+            <a:endParaRPr lang="en-US" sz="1400" dirty="0"/>
+          </a:p>
+        </p:txBody>
+      </p:sp>
+      <p:sp>
+        <p:nvSpPr>
+          <p:cNvPr id="22" name="Passo evento 4 círculo"/>
+          <p:cNvSpPr/>
+          <p:nvPr/>
+        </p:nvSpPr>
+        <p:spPr>
+          <a:xfrm>
+            <a:off x="6949440" y="5349240"/>
+            <a:ext cx="457200" cy="457200"/>
+          </a:xfrm>
+          <a:prstGeom prst="ellipse">
+            <a:avLst/>
+          </a:prstGeom>
+          <a:solidFill>
+            <a:srgbClr val="E011FF"/>
+          </a:solidFill>
+          <a:ln/>
+        </p:spPr>
+      </p:sp>
+      <p:sp>
+        <p:nvSpPr>
+          <p:cNvPr id="23" name="Passo evento 4 número"/>
+          <p:cNvSpPr txBox="1"/>
+          <p:nvPr/>
+        </p:nvSpPr>
+        <p:spPr>
+          <a:xfrm>
+            <a:off x="6949440" y="5349240"/>
+            <a:ext cx="457200" cy="457200"/>
+          </a:xfrm>
+          <a:prstGeom prst="rect">
+            <a:avLst/>
+          </a:prstGeom>
+          <a:noFill/>
+          <a:ln/>
+        </p:spPr>
+        <p:txBody>
+          <a:bodyPr wrap="square" lIns="0" tIns="0" rIns="0" bIns="0" rtlCol="0" anchor="ctr"/>
+          <a:lstStyle/>
+          <a:p>
+            <a:pPr algn="ctr" indent="0" marL="0">
+              <a:buNone/>
+            </a:pPr>
+            <a:r>
+              <a:rPr lang="en-US" sz="1300" b="1" dirty="0">
+                <a:solidFill>
+                  <a:srgbClr val="FFFFFF"/>
+                </a:solidFill>
+              </a:rPr>
+              <a:t>4</a:t>
+            </a:r>
+            <a:endParaRPr lang="en-US" sz="1300" dirty="0"/>
+          </a:p>
+        </p:txBody>
+      </p:sp>
+      <p:sp>
+        <p:nvSpPr>
+          <p:cNvPr id="24" name="Passo evento texto 4"/>
+          <p:cNvSpPr txBox="1"/>
+          <p:nvPr/>
+        </p:nvSpPr>
+        <p:spPr>
+          <a:xfrm>
+            <a:off x="7589520" y="5257800"/>
+            <a:ext cx="4023360" cy="640080"/>
+          </a:xfrm>
+          <a:prstGeom prst="rect">
+            <a:avLst/>
+          </a:prstGeom>
+          <a:noFill/>
+          <a:ln/>
+        </p:spPr>
+        <p:txBody>
+          <a:bodyPr wrap="square" lIns="0" tIns="0" rIns="0" bIns="0" rtlCol="0" anchor="ctr"/>
+          <a:lstStyle/>
+          <a:p>
+            <a:pPr indent="0" marL="0">
+              <a:buNone/>
+            </a:pPr>
+            <a:r>
+              <a:rPr lang="en-US" sz="1400" dirty="0">
+                <a:solidFill>
+                  <a:schemeClr val="tx1"/>
+                </a:solidFill>
+              </a:rPr>
+              <a:t>Na volta da vertical, essa lista é a primeira a ser chamada</a:t>
+            </a:r>
+            <a:endParaRPr lang="en-US" sz="1400" dirty="0"/>
           </a:p>
         </p:txBody>
       </p:sp>

--- a/ledwave-comercial/sdr/LedWave_Jornada_do_Lead_SDR.pptx
+++ b/ledwave-comercial/sdr/LedWave_Jornada_do_Lead_SDR.pptx
@@ -122,14 +122,14 @@
   <p:extLst>
     <p:ext uri="{521415D9-36F7-43E2-AB2F-B90AF26B5E84}">
       <p14:sectionLst xmlns:p14="http://schemas.microsoft.com/office/powerpoint/2010/main">
-        <p14:section name="Abertura" id="{0683c920-c275-3db4-6b23-dd3a9c2fda0b}">
+        <p14:section name="Abertura" id="{b094ea31-33db-31eb-eb93-badb7cadecec}">
           <p14:sldIdLst>
             <p14:sldId id="256"/>
             <p14:sldId id="257"/>
             <p14:sldId id="258"/>
           </p14:sldIdLst>
         </p14:section>
-        <p14:section name="Jornada" id="{db779f32-19a0-e788-9f0b-536a171d693d}">
+        <p14:section name="Jornada" id="{8f88ab93-16a4-3050-f268-20cd53d58e8f}">
           <p14:sldIdLst>
             <p14:sldId id="259"/>
             <p14:sldId id="260"/>
@@ -141,13 +141,13 @@
             <p14:sldId id="266"/>
           </p14:sldIdLst>
         </p14:section>
-        <p14:section name="Conversa" id="{af460e2a-806c-3997-416f-edc64f11dbe1}">
+        <p14:section name="Conversa" id="{2a218802-2c00-2f42-2d97-0c79fae052a0}">
           <p14:sldIdLst>
             <p14:sldId id="267"/>
             <p14:sldId id="268"/>
           </p14:sldIdLst>
         </p14:section>
-        <p14:section name="Gestão" id="{713d8bf4-c321-d59c-7a12-c0f885b08427}">
+        <p14:section name="Gestão" id="{89945d29-50cb-ec9f-a5d0-10c6f908c7e9}">
           <p14:sldIdLst>
             <p14:sldId id="269"/>
             <p14:sldId id="270"/>
@@ -558,7 +558,7 @@
           <a:p>
             <a:r>
               <a:rPr lang="en-US" dirty="0"/>
-              <a:t>Abertura: o objetivo é que todo lead seja respondido em até 5 minutos no horário comercial, qualificado em uma conversa e entregue ao executivo com tudo registrado.</a:t>
+              <a:t>Abertura: o objetivo é que todo lead seja respondido em até 5 minutos no horário comercial, qualificado em uma conversa e registrado como oportunidade no Salesforce, para o gerente da vertical indicar o executivo.</a:t>
             </a:r>
             <a:endParaRPr lang="en-US" dirty="0"/>
           </a:p>
@@ -2854,7 +2854,7 @@
                   <a:schemeClr val="tx2"/>
                 </a:solidFill>
               </a:rPr>
-              <a:t>Do primeiro contato à reunião com o executivo</a:t>
+              <a:t>Do primeiro contato à oportunidade no Salesforce</a:t>
             </a:r>
             <a:endParaRPr lang="en-US" sz="2000" dirty="0"/>
           </a:p>
@@ -2997,7 +2997,7 @@
                   <a:schemeClr val="tx1"/>
                 </a:solidFill>
               </a:rPr>
-              <a:t>Etapa 4: agendar e passar o bastão</a:t>
+              <a:t>Etapa 4: gerar a oportunidade e passar o bastão</a:t>
             </a:r>
             <a:endParaRPr lang="en-US" sz="3200" dirty="0"/>
           </a:p>
@@ -3048,7 +3048,7 @@
         <p:spPr>
           <a:xfrm>
             <a:off x="548640" y="2057400"/>
-            <a:ext cx="5394960" cy="1463040"/>
+            <a:ext cx="5394960" cy="1508760"/>
           </a:xfrm>
           <a:prstGeom prst="rect">
             <a:avLst/>
@@ -3064,14 +3064,14 @@
               <a:buNone/>
             </a:pPr>
             <a:r>
-              <a:rPr lang="en-US" sz="1600" i="1" dirty="0">
+              <a:rPr lang="en-US" sz="1500" i="1" dirty="0">
                 <a:solidFill>
                   <a:schemeClr val="tx1"/>
                 </a:solidFill>
               </a:rPr>
-              <a:t>"Faz sentido uma conversa de 30 minutos com o [executivo], nosso especialista em [nicho]. Ele mostra como ficaria no seu espaço. Terça às 10h ou quinta às 15h?"</a:t>
-            </a:r>
-            <a:endParaRPr lang="en-US" sz="1600" dirty="0"/>
+              <a:t>"Faz sentido uma conversa de 30 minutos com um especialista nosso em [nicho]. Vou registrar tudo e passar para o nosso gerente de [nicho], que indica o especialista ideal para o seu projeto. Assim você não repete nada. Qual o melhor dia e período para ele te chamar?"</a:t>
+            </a:r>
+            <a:endParaRPr lang="en-US" sz="1500" dirty="0"/>
           </a:p>
         </p:txBody>
       </p:sp>
@@ -3145,7 +3145,7 @@
                   <a:schemeClr val="tx1"/>
                 </a:solidFill>
               </a:rPr>
-              <a:t>Confirmação no WhatsApp com data, hora e formato</a:t>
+              <a:t>Gerar a oportunidade no Salesforce com a nota completa</a:t>
             </a:r>
             <a:endParaRPr lang="en-US" sz="1500" dirty="0"/>
           </a:p>
@@ -3163,7 +3163,7 @@
                   <a:schemeClr val="tx1"/>
                 </a:solidFill>
               </a:rPr>
-              <a:t>Pedir uma foto do espaço para a simulação</a:t>
+              <a:t>Passar ao gerente da vertical, que indica o executivo</a:t>
             </a:r>
             <a:endParaRPr lang="en-US" sz="1500" dirty="0"/>
           </a:p>
@@ -3181,7 +3181,7 @@
                   <a:schemeClr val="tx1"/>
                 </a:solidFill>
               </a:rPr>
-              <a:t>Lembrete na véspera e 1 hora antes</a:t>
+              <a:t>Confirmar no WhatsApp e pedir uma foto do espaço</a:t>
             </a:r>
             <a:endParaRPr lang="en-US" sz="1500" dirty="0"/>
           </a:p>
@@ -3199,7 +3199,7 @@
                   <a:schemeClr val="tx1"/>
                 </a:solidFill>
               </a:rPr>
-              <a:t>Faltou? Remarcar no mesmo dia</a:t>
+              <a:t>Acompanhar: executivo indicado e contato feito</a:t>
             </a:r>
             <a:endParaRPr lang="en-US" sz="1500" dirty="0"/>
           </a:p>
@@ -3257,7 +3257,7 @@
                   <a:schemeClr val="accent2"/>
                 </a:solidFill>
               </a:rPr>
-              <a:t>Nota de passagem no Salesforce</a:t>
+              <a:t>Nota da oportunidade no Salesforce</a:t>
             </a:r>
             <a:endParaRPr lang="en-US" sz="1800" dirty="0"/>
           </a:p>
@@ -3441,7 +3441,7 @@
                   <a:schemeClr val="bg1"/>
                 </a:solidFill>
               </a:rPr>
-              <a:t>Origem, TAG e próximo passo</a:t>
+              <a:t>Origem, TAG e melhor dia para o contato</a:t>
             </a:r>
             <a:endParaRPr lang="en-US" sz="1500" dirty="0"/>
           </a:p>
@@ -6075,7 +6075,7 @@
                   <a:schemeClr val="bg1"/>
                 </a:solidFill>
               </a:rPr>
-              <a:t>Status: Novo → Em contato → MQL → SQL → Executivo</a:t>
+              <a:t>Status: Novo → Em contato → MQL → Oportunidade (SQL) → Gerente → Executivo</a:t>
             </a:r>
             <a:endParaRPr lang="en-US" sz="1400" dirty="0"/>
           </a:p>
@@ -7933,7 +7933,7 @@
                   <a:schemeClr val="tx1"/>
                 </a:solidFill>
               </a:rPr>
-              <a:t>Responder rápido, conversar sobre o negócio do cliente e entregar ao executivo uma reunião com tudo anotado.</a:t>
+              <a:t>Responder rápido, conversar sobre o negócio do cliente e entregar ao gerente da vertical uma oportunidade com tudo anotado.</a:t>
             </a:r>
             <a:endParaRPr lang="en-US" sz="3400" dirty="0"/>
           </a:p>
@@ -8966,7 +8966,7 @@
                   <a:schemeClr val="tx2"/>
                 </a:solidFill>
               </a:rPr>
-              <a:t>O executivo vende; o SDR entende e agenda</a:t>
+              <a:t>O executivo vende; o SDR entende e gera a oportunidade</a:t>
             </a:r>
             <a:endParaRPr lang="en-US" sz="1500" dirty="0"/>
           </a:p>
@@ -9922,7 +9922,7 @@
                   <a:schemeClr val="tx1"/>
                 </a:solidFill>
               </a:rPr>
-              <a:t>Agendamento</a:t>
+              <a:t>Oportunidade</a:t>
             </a:r>
             <a:endParaRPr lang="en-US" sz="1500" dirty="0"/>
           </a:p>
@@ -9958,7 +9958,7 @@
                   <a:schemeClr val="tx2"/>
                 </a:solidFill>
               </a:rPr>
-              <a:t>reunião + nota de passagem</a:t>
+              <a:t>Salesforce + gerente da vertical</a:t>
             </a:r>
             <a:endParaRPr lang="en-US" sz="1300" dirty="0"/>
           </a:p>
@@ -10459,7 +10459,7 @@
                   <a:schemeClr val="tx1"/>
                 </a:solidFill>
               </a:rPr>
-              <a:t>o lead só sai da fila com reunião agendada ou com motivo registrado. Respondeu na cadência? Volta para a qualificação.</a:t>
+              <a:t>o lead só sai da fila como oportunidade passada ao gerente da vertical ou com motivo registrado. Respondeu na cadência? Volta para a qualificação.</a:t>
             </a:r>
             <a:endParaRPr lang="en-US" sz="1700" dirty="0"/>
           </a:p>
